--- a/powerpoints/Pokerbot_Upgrade_Week3.pptx
+++ b/powerpoints/Pokerbot_Upgrade_Week3.pptx
@@ -28,6 +28,19 @@
     <p:sldId id="276" r:id="rId27"/>
     <p:sldId id="277" r:id="rId28"/>
     <p:sldId id="278" r:id="rId29"/>
+    <p:sldId id="279" r:id="rId30"/>
+    <p:sldId id="280" r:id="rId31"/>
+    <p:sldId id="281" r:id="rId32"/>
+    <p:sldId id="282" r:id="rId33"/>
+    <p:sldId id="283" r:id="rId34"/>
+    <p:sldId id="284" r:id="rId35"/>
+    <p:sldId id="285" r:id="rId36"/>
+    <p:sldId id="286" r:id="rId37"/>
+    <p:sldId id="287" r:id="rId38"/>
+    <p:sldId id="288" r:id="rId39"/>
+    <p:sldId id="289" r:id="rId40"/>
+    <p:sldId id="290" r:id="rId41"/>
+    <p:sldId id="291" r:id="rId42"/>
   </p:sldIdLst>
   <p:sldSz cx="12191695" cy="6858000" type="screen4x3"/>
   <p:notesSz cx="6858000" cy="9144000"/>
@@ -3311,7 +3324,7 @@
               </a:defRPr>
             </a:pPr>
             <a:r>
-              <a:t>DEEL 4 · 14 MIN · WAT JIJ DOET</a:t>
+              <a:t>DEEL 2 · DE SPELREGELS</a:t>
             </a:r>
           </a:p>
           <a:p>
@@ -3326,59 +3339,35 @@
               </a:defRPr>
             </a:pPr>
             <a:r>
-              <a:t>Handsterkte: wat wint er eigenlijk?</a:t>
-            </a:r>
-          </a:p>
-        </p:txBody>
-      </p:sp>
-      <p:sp>
-        <p:nvSpPr>
-          <p:cNvPr id="4" name="Rounded Rectangle 3"/>
-          <p:cNvSpPr/>
-          <p:nvPr/>
-        </p:nvSpPr>
-        <p:spPr>
-          <a:xfrm>
-            <a:off x="731520" y="1600200"/>
-            <a:ext cx="10698480" cy="2468880"/>
-          </a:xfrm>
-          <a:prstGeom prst="roundRect">
-            <a:avLst>
-              <a:gd name="adj" fmla="val 3000"/>
-            </a:avLst>
-          </a:prstGeom>
-          <a:solidFill>
-            <a:srgbClr val="FFFFFF"/>
-          </a:solidFill>
-          <a:ln w="9525">
-            <a:solidFill>
-              <a:srgbClr val="DCE1E6"/>
-            </a:solidFill>
-          </a:ln>
-          <a:effectLst/>
-        </p:spPr>
-        <p:style>
-          <a:lnRef idx="1">
-            <a:schemeClr val="accent1"/>
-          </a:lnRef>
-          <a:fillRef idx="3">
-            <a:schemeClr val="accent1"/>
-          </a:fillRef>
-          <a:effectRef idx="2">
-            <a:schemeClr val="accent1"/>
-          </a:effectRef>
-          <a:fontRef idx="minor">
-            <a:schemeClr val="lt1"/>
-          </a:fontRef>
-        </p:style>
-        <p:txBody>
-          <a:bodyPr rtlCol="0" anchor="ctr"/>
-          <a:lstStyle/>
-          <a:p>
-            <a:pPr algn="ctr"/>
-          </a:p>
-        </p:txBody>
-      </p:sp>
+              <a:t>De kleuren: twee tekens per kaart</a:t>
+            </a:r>
+          </a:p>
+        </p:txBody>
+      </p:sp>
+      <p:pic>
+        <p:nvPicPr>
+          <p:cNvPr id="4" name="Picture 3" descr="kleuren.png"/>
+          <p:cNvPicPr>
+            <a:picLocks noChangeAspect="1"/>
+          </p:cNvPicPr>
+          <p:nvPr/>
+        </p:nvPicPr>
+        <p:blipFill>
+          <a:blip r:embed="rId2"/>
+          <a:stretch>
+            <a:fillRect/>
+          </a:stretch>
+        </p:blipFill>
+        <p:spPr>
+          <a:xfrm>
+            <a:off x="746607" y="1554480"/>
+            <a:ext cx="10698480" cy="3059963"/>
+          </a:xfrm>
+          <a:prstGeom prst="rect">
+            <a:avLst/>
+          </a:prstGeom>
+        </p:spPr>
+      </p:pic>
       <p:sp>
         <p:nvSpPr>
           <p:cNvPr id="5" name="TextBox 4"/>
@@ -3387,8 +3376,8 @@
         </p:nvSpPr>
         <p:spPr>
           <a:xfrm>
-            <a:off x="1005840" y="1828800"/>
-            <a:ext cx="10149840" cy="2011680"/>
+            <a:off x="1005840" y="5852160"/>
+            <a:ext cx="10149840" cy="777240"/>
           </a:xfrm>
           <a:prstGeom prst="rect">
             <a:avLst/>
@@ -3402,127 +3391,14 @@
           <a:lstStyle/>
           <a:p>
             <a:pPr>
-              <a:defRPr sz="1400" b="0">
+              <a:defRPr sz="1250" b="0">
                 <a:solidFill>
                   <a:srgbClr val="121E31"/>
                 </a:solidFill>
               </a:defRPr>
             </a:pPr>
             <a:r>
-              <a:t>•  Laat de helper een paar handen beoordelen en kijk of je de uitkomst had voorspeld.</a:t>
-            </a:r>
-          </a:p>
-          <a:p>
-            <a:pPr>
-              <a:spcBef>
-                <a:spcPts val="1200"/>
-              </a:spcBef>
-              <a:defRPr sz="1400" b="0">
-                <a:solidFill>
-                  <a:srgbClr val="121E31"/>
-                </a:solidFill>
-              </a:defRPr>
-            </a:pPr>
-            <a:r>
-              <a:t>•  Let op: de helper klaagt niet als je dezelfde kaart twee keer gebruikt.</a:t>
-            </a:r>
-          </a:p>
-        </p:txBody>
-      </p:sp>
-      <p:sp>
-        <p:nvSpPr>
-          <p:cNvPr id="6" name="Rounded Rectangle 5"/>
-          <p:cNvSpPr/>
-          <p:nvPr/>
-        </p:nvSpPr>
-        <p:spPr>
-          <a:xfrm>
-            <a:off x="731520" y="4343400"/>
-            <a:ext cx="10698480" cy="1371600"/>
-          </a:xfrm>
-          <a:prstGeom prst="roundRect">
-            <a:avLst>
-              <a:gd name="adj" fmla="val 3000"/>
-            </a:avLst>
-          </a:prstGeom>
-          <a:solidFill>
-            <a:srgbClr val="F0F6F3"/>
-          </a:solidFill>
-          <a:ln w="9525">
-            <a:solidFill>
-              <a:srgbClr val="1B4D3E"/>
-            </a:solidFill>
-          </a:ln>
-          <a:effectLst/>
-        </p:spPr>
-        <p:style>
-          <a:lnRef idx="1">
-            <a:schemeClr val="accent1"/>
-          </a:lnRef>
-          <a:fillRef idx="3">
-            <a:schemeClr val="accent1"/>
-          </a:fillRef>
-          <a:effectRef idx="2">
-            <a:schemeClr val="accent1"/>
-          </a:effectRef>
-          <a:fontRef idx="minor">
-            <a:schemeClr val="lt1"/>
-          </a:fontRef>
-        </p:style>
-        <p:txBody>
-          <a:bodyPr rtlCol="0" anchor="ctr"/>
-          <a:lstStyle/>
-          <a:p>
-            <a:pPr algn="ctr"/>
-          </a:p>
-        </p:txBody>
-      </p:sp>
-      <p:sp>
-        <p:nvSpPr>
-          <p:cNvPr id="7" name="TextBox 6"/>
-          <p:cNvSpPr txBox="1"/>
-          <p:nvPr/>
-        </p:nvSpPr>
-        <p:spPr>
-          <a:xfrm>
-            <a:off x="1005840" y="4526280"/>
-            <a:ext cx="10149840" cy="1005840"/>
-          </a:xfrm>
-          <a:prstGeom prst="rect">
-            <a:avLst/>
-          </a:prstGeom>
-          <a:noFill/>
-        </p:spPr>
-        <p:txBody>
-          <a:bodyPr wrap="square">
-            <a:spAutoFit/>
-          </a:bodyPr>
-          <a:lstStyle/>
-          <a:p>
-            <a:pPr>
-              <a:defRPr sz="1000" b="1">
-                <a:solidFill>
-                  <a:srgbClr val="1B4D3E"/>
-                </a:solidFill>
-              </a:defRPr>
-            </a:pPr>
-            <a:r>
-              <a:t>WAT JE HIERVAN INLEVERT</a:t>
-            </a:r>
-          </a:p>
-          <a:p>
-            <a:pPr>
-              <a:spcBef>
-                <a:spcPts val="500"/>
-              </a:spcBef>
-              <a:defRPr sz="1500" b="1">
-                <a:solidFill>
-                  <a:srgbClr val="121E31"/>
-                </a:solidFill>
-              </a:defRPr>
-            </a:pPr>
-            <a:r>
-              <a:t>Niets — maar zonder dit is Deel 5 een black box.</a:t>
+              <a:t>Eerst de kleur, dan de rang. SA is schoppen aas. Let op de tien: in de hulpfuncties heet die T, in je eigen bot "10".</a:t>
             </a:r>
           </a:p>
         </p:txBody>
@@ -3619,7 +3495,7 @@
               </a:defRPr>
             </a:pPr>
             <a:r>
-              <a:t>DEEL 5 · 32 MIN · DE THEORIE</a:t>
+              <a:t>DEEL 2 · DE SPELREGELS</a:t>
             </a:r>
           </a:p>
           <a:p>
@@ -3634,202 +3510,14 @@
               </a:defRPr>
             </a:pPr>
             <a:r>
-              <a:t>Winkans: wat je ECHT hebt</a:t>
-            </a:r>
-          </a:p>
-        </p:txBody>
-      </p:sp>
-      <p:sp>
-        <p:nvSpPr>
-          <p:cNvPr id="4" name="Rounded Rectangle 3"/>
-          <p:cNvSpPr/>
-          <p:nvPr/>
-        </p:nvSpPr>
-        <p:spPr>
-          <a:xfrm>
-            <a:off x="731520" y="1600200"/>
-            <a:ext cx="6035040" cy="4480560"/>
-          </a:xfrm>
-          <a:prstGeom prst="roundRect">
-            <a:avLst>
-              <a:gd name="adj" fmla="val 3000"/>
-            </a:avLst>
-          </a:prstGeom>
-          <a:solidFill>
-            <a:srgbClr val="FFFFFF"/>
-          </a:solidFill>
-          <a:ln w="9525">
-            <a:solidFill>
-              <a:srgbClr val="DCE1E6"/>
-            </a:solidFill>
-          </a:ln>
-          <a:effectLst/>
-        </p:spPr>
-        <p:style>
-          <a:lnRef idx="1">
-            <a:schemeClr val="accent1"/>
-          </a:lnRef>
-          <a:fillRef idx="3">
-            <a:schemeClr val="accent1"/>
-          </a:fillRef>
-          <a:effectRef idx="2">
-            <a:schemeClr val="accent1"/>
-          </a:effectRef>
-          <a:fontRef idx="minor">
-            <a:schemeClr val="lt1"/>
-          </a:fontRef>
-        </p:style>
-        <p:txBody>
-          <a:bodyPr rtlCol="0" anchor="ctr"/>
-          <a:lstStyle/>
-          <a:p>
-            <a:pPr algn="ctr"/>
-          </a:p>
-        </p:txBody>
-      </p:sp>
-      <p:sp>
-        <p:nvSpPr>
-          <p:cNvPr id="5" name="TextBox 4"/>
-          <p:cNvSpPr txBox="1"/>
-          <p:nvPr/>
-        </p:nvSpPr>
-        <p:spPr>
-          <a:xfrm>
-            <a:off x="1005840" y="1828800"/>
-            <a:ext cx="5486400" cy="4023360"/>
-          </a:xfrm>
-          <a:prstGeom prst="rect">
-            <a:avLst/>
-          </a:prstGeom>
-          <a:noFill/>
-        </p:spPr>
-        <p:txBody>
-          <a:bodyPr wrap="square">
-            <a:spAutoFit/>
-          </a:bodyPr>
-          <a:lstStyle/>
-          <a:p>
-            <a:pPr>
-              <a:defRPr sz="1400" b="1">
-                <a:solidFill>
-                  <a:srgbClr val="1B4D3E"/>
-                </a:solidFill>
-              </a:defRPr>
-            </a:pPr>
-            <a:r>
-              <a:t>Monte Carlo</a:t>
-            </a:r>
-          </a:p>
-          <a:p>
-            <a:pPr>
-              <a:spcBef>
-                <a:spcPts val="300"/>
-              </a:spcBef>
-              <a:defRPr sz="1150" b="0">
-                <a:solidFill>
-                  <a:srgbClr val="121E31"/>
-                </a:solidFill>
-              </a:defRPr>
-            </a:pPr>
-            <a:r>
-              <a:t>Speel je hand duizenden keren uit tegen willekeurige tegenstanders en een willekeurig bord, en tel hoe vaak je wint. Dezelfde aanpak als n_simulaties in het toernooi.</a:t>
-            </a:r>
-          </a:p>
-          <a:p>
-            <a:pPr>
-              <a:spcBef>
-                <a:spcPts val="1400"/>
-              </a:spcBef>
-              <a:defRPr sz="1400" b="1">
-                <a:solidFill>
-                  <a:srgbClr val="1B4D3E"/>
-                </a:solidFill>
-              </a:defRPr>
-            </a:pPr>
-            <a:r>
-              <a:t>Tegen hoeveel mensen?</a:t>
-            </a:r>
-          </a:p>
-          <a:p>
-            <a:pPr>
-              <a:spcBef>
-                <a:spcPts val="300"/>
-              </a:spcBef>
-              <a:defRPr sz="1150" b="0">
-                <a:solidFill>
-                  <a:srgbClr val="121E31"/>
-                </a:solidFill>
-              </a:defRPr>
-            </a:pPr>
-            <a:r>
-              <a:t>Dit is het belangrijkste argument. De standaardwaarde is 1, maar je zit aan een tafel van zes.</a:t>
-            </a:r>
-          </a:p>
-          <a:p>
-            <a:pPr>
-              <a:spcBef>
-                <a:spcPts val="1400"/>
-              </a:spcBef>
-              <a:defRPr sz="1400" b="1">
-                <a:solidFill>
-                  <a:srgbClr val="1B4D3E"/>
-                </a:solidFill>
-              </a:defRPr>
-            </a:pPr>
-            <a:r>
-              <a:t>Gemeten verschil</a:t>
-            </a:r>
-          </a:p>
-          <a:p>
-            <a:pPr>
-              <a:spcBef>
-                <a:spcPts val="300"/>
-              </a:spcBef>
-              <a:defRPr sz="1150" b="0">
-                <a:solidFill>
-                  <a:srgbClr val="121E31"/>
-                </a:solidFill>
-              </a:defRPr>
-            </a:pPr>
-            <a:r>
-              <a:t>A-A gaat van 85,3% naar 50,2% als je van vijf mensen moet winnen in plaats van één. 7-2 zakt van 33,9% naar 9,3%.</a:t>
-            </a:r>
-          </a:p>
-          <a:p>
-            <a:pPr>
-              <a:spcBef>
-                <a:spcPts val="1400"/>
-              </a:spcBef>
-              <a:defRPr sz="1400" b="1">
-                <a:solidFill>
-                  <a:srgbClr val="1B4D3E"/>
-                </a:solidFill>
-              </a:defRPr>
-            </a:pPr>
-            <a:r>
-              <a:t>Advies</a:t>
-            </a:r>
-          </a:p>
-          <a:p>
-            <a:pPr>
-              <a:spcBef>
-                <a:spcPts val="300"/>
-              </a:spcBef>
-              <a:defRPr sz="1150" b="0">
-                <a:solidFill>
-                  <a:srgbClr val="121E31"/>
-                </a:solidFill>
-              </a:defRPr>
-            </a:pPr>
-            <a:r>
-              <a:t>Ga uit van 5 tegenstanders, tenzij je weet dat het er minder zijn.</a:t>
+              <a:t>Wat je bot per beslissing binnenkrijgt</a:t>
             </a:r>
           </a:p>
         </p:txBody>
       </p:sp>
       <p:pic>
         <p:nvPicPr>
-          <p:cNvPr id="6" name="Picture 5" descr="winkans.png"/>
+          <p:cNvPr id="4" name="Picture 3" descr="flowchart.png"/>
           <p:cNvPicPr>
             <a:picLocks noChangeAspect="1"/>
           </p:cNvPicPr>
@@ -3843,14 +3531,49 @@
         </p:blipFill>
         <p:spPr>
           <a:xfrm>
-            <a:off x="7040880" y="2103120"/>
-            <a:ext cx="4389120" cy="2160560"/>
+            <a:off x="1509564" y="1554480"/>
+            <a:ext cx="9172566" cy="4069080"/>
           </a:xfrm>
           <a:prstGeom prst="rect">
             <a:avLst/>
           </a:prstGeom>
         </p:spPr>
       </p:pic>
+      <p:sp>
+        <p:nvSpPr>
+          <p:cNvPr id="5" name="TextBox 4"/>
+          <p:cNvSpPr txBox="1"/>
+          <p:nvPr/>
+        </p:nvSpPr>
+        <p:spPr>
+          <a:xfrm>
+            <a:off x="1005840" y="5852160"/>
+            <a:ext cx="10149840" cy="777240"/>
+          </a:xfrm>
+          <a:prstGeom prst="rect">
+            <a:avLst/>
+          </a:prstGeom>
+          <a:noFill/>
+        </p:spPr>
+        <p:txBody>
+          <a:bodyPr wrap="square">
+            <a:spAutoFit/>
+          </a:bodyPr>
+          <a:lstStyle/>
+          <a:p>
+            <a:pPr>
+              <a:defRPr sz="1250" b="0">
+                <a:solidFill>
+                  <a:srgbClr val="121E31"/>
+                </a:solidFill>
+              </a:defRPr>
+            </a:pPr>
+            <a:r>
+              <a:t>Dit is de hele upgrade van deze week: je kies_actie wordt vier keer per hand aangeroepen, elke keer met een andere ronde.</a:t>
+            </a:r>
+          </a:p>
+        </p:txBody>
+      </p:sp>
     </p:spTree>
   </p:cSld>
   <p:clrMapOvr>
@@ -3943,7 +3666,7 @@
               </a:defRPr>
             </a:pPr>
             <a:r>
-              <a:t>DEEL 5 · 32 MIN · WAT JIJ DOET</a:t>
+              <a:t>DEEL 2 · DE SPELREGELS</a:t>
             </a:r>
           </a:p>
           <a:p>
@@ -3958,59 +3681,35 @@
               </a:defRPr>
             </a:pPr>
             <a:r>
-              <a:t>Winkans: wat je ECHT hebt</a:t>
-            </a:r>
-          </a:p>
-        </p:txBody>
-      </p:sp>
-      <p:sp>
-        <p:nvSpPr>
-          <p:cNvPr id="4" name="Rounded Rectangle 3"/>
-          <p:cNvSpPr/>
-          <p:nvPr/>
-        </p:nvSpPr>
-        <p:spPr>
-          <a:xfrm>
-            <a:off x="731520" y="1600200"/>
-            <a:ext cx="10698480" cy="2468880"/>
-          </a:xfrm>
-          <a:prstGeom prst="roundRect">
-            <a:avLst>
-              <a:gd name="adj" fmla="val 3000"/>
-            </a:avLst>
-          </a:prstGeom>
-          <a:solidFill>
-            <a:srgbClr val="FFFFFF"/>
-          </a:solidFill>
-          <a:ln w="9525">
-            <a:solidFill>
-              <a:srgbClr val="DCE1E6"/>
-            </a:solidFill>
-          </a:ln>
-          <a:effectLst/>
-        </p:spPr>
-        <p:style>
-          <a:lnRef idx="1">
-            <a:schemeClr val="accent1"/>
-          </a:lnRef>
-          <a:fillRef idx="3">
-            <a:schemeClr val="accent1"/>
-          </a:fillRef>
-          <a:effectRef idx="2">
-            <a:schemeClr val="accent1"/>
-          </a:effectRef>
-          <a:fontRef idx="minor">
-            <a:schemeClr val="lt1"/>
-          </a:fontRef>
-        </p:style>
-        <p:txBody>
-          <a:bodyPr rtlCol="0" anchor="ctr"/>
-          <a:lstStyle/>
-          <a:p>
-            <a:pPr algn="ctr"/>
-          </a:p>
-        </p:txBody>
-      </p:sp>
+              <a:t>Wat kost een raise eigenlijk?</a:t>
+            </a:r>
+          </a:p>
+        </p:txBody>
+      </p:sp>
+      <p:pic>
+        <p:nvPicPr>
+          <p:cNvPr id="4" name="Picture 3" descr="raiseladder.png"/>
+          <p:cNvPicPr>
+            <a:picLocks noChangeAspect="1"/>
+          </p:cNvPicPr>
+          <p:nvPr/>
+        </p:nvPicPr>
+        <p:blipFill>
+          <a:blip r:embed="rId2"/>
+          <a:stretch>
+            <a:fillRect/>
+          </a:stretch>
+        </p:blipFill>
+        <p:spPr>
+          <a:xfrm>
+            <a:off x="746607" y="1554480"/>
+            <a:ext cx="10698480" cy="3995214"/>
+          </a:xfrm>
+          <a:prstGeom prst="rect">
+            <a:avLst/>
+          </a:prstGeom>
+        </p:spPr>
+      </p:pic>
       <p:sp>
         <p:nvSpPr>
           <p:cNvPr id="5" name="TextBox 4"/>
@@ -4019,8 +3718,8 @@
         </p:nvSpPr>
         <p:spPr>
           <a:xfrm>
-            <a:off x="1005840" y="1828800"/>
-            <a:ext cx="10149840" cy="2011680"/>
+            <a:off x="1005840" y="5852160"/>
+            <a:ext cx="10149840" cy="777240"/>
           </a:xfrm>
           <a:prstGeom prst="rect">
             <a:avLst/>
@@ -4034,127 +3733,14 @@
           <a:lstStyle/>
           <a:p>
             <a:pPr>
-              <a:defRPr sz="1400" b="0">
+              <a:defRPr sz="1250" b="0">
                 <a:solidFill>
                   <a:srgbClr val="121E31"/>
                 </a:solidFill>
               </a:defRPr>
             </a:pPr>
             <a:r>
-              <a:t>•  Test schat_winkans op bekende sterke en zwakke starthanden.</a:t>
-            </a:r>
-          </a:p>
-          <a:p>
-            <a:pPr>
-              <a:spcBef>
-                <a:spcPts val="1200"/>
-              </a:spcBef>
-              <a:defRPr sz="1400" b="0">
-                <a:solidFill>
-                  <a:srgbClr val="121E31"/>
-                </a:solidFill>
-              </a:defRPr>
-            </a:pPr>
-            <a:r>
-              <a:t>•  Draai dezelfde hand met tegenstanders=1 en tegenstanders=5 en leg het verschil uit.</a:t>
-            </a:r>
-          </a:p>
-        </p:txBody>
-      </p:sp>
-      <p:sp>
-        <p:nvSpPr>
-          <p:cNvPr id="6" name="Rounded Rectangle 5"/>
-          <p:cNvSpPr/>
-          <p:nvPr/>
-        </p:nvSpPr>
-        <p:spPr>
-          <a:xfrm>
-            <a:off x="731520" y="4343400"/>
-            <a:ext cx="10698480" cy="1371600"/>
-          </a:xfrm>
-          <a:prstGeom prst="roundRect">
-            <a:avLst>
-              <a:gd name="adj" fmla="val 3000"/>
-            </a:avLst>
-          </a:prstGeom>
-          <a:solidFill>
-            <a:srgbClr val="F0F6F3"/>
-          </a:solidFill>
-          <a:ln w="9525">
-            <a:solidFill>
-              <a:srgbClr val="1B4D3E"/>
-            </a:solidFill>
-          </a:ln>
-          <a:effectLst/>
-        </p:spPr>
-        <p:style>
-          <a:lnRef idx="1">
-            <a:schemeClr val="accent1"/>
-          </a:lnRef>
-          <a:fillRef idx="3">
-            <a:schemeClr val="accent1"/>
-          </a:fillRef>
-          <a:effectRef idx="2">
-            <a:schemeClr val="accent1"/>
-          </a:effectRef>
-          <a:fontRef idx="minor">
-            <a:schemeClr val="lt1"/>
-          </a:fontRef>
-        </p:style>
-        <p:txBody>
-          <a:bodyPr rtlCol="0" anchor="ctr"/>
-          <a:lstStyle/>
-          <a:p>
-            <a:pPr algn="ctr"/>
-          </a:p>
-        </p:txBody>
-      </p:sp>
-      <p:sp>
-        <p:nvSpPr>
-          <p:cNvPr id="7" name="TextBox 6"/>
-          <p:cNvSpPr txBox="1"/>
-          <p:nvPr/>
-        </p:nvSpPr>
-        <p:spPr>
-          <a:xfrm>
-            <a:off x="1005840" y="4526280"/>
-            <a:ext cx="10149840" cy="1005840"/>
-          </a:xfrm>
-          <a:prstGeom prst="rect">
-            <a:avLst/>
-          </a:prstGeom>
-          <a:noFill/>
-        </p:spPr>
-        <p:txBody>
-          <a:bodyPr wrap="square">
-            <a:spAutoFit/>
-          </a:bodyPr>
-          <a:lstStyle/>
-          <a:p>
-            <a:pPr>
-              <a:defRPr sz="1000" b="1">
-                <a:solidFill>
-                  <a:srgbClr val="1B4D3E"/>
-                </a:solidFill>
-              </a:defRPr>
-            </a:pPr>
-            <a:r>
-              <a:t>WAT JE HIERVAN INLEVERT</a:t>
-            </a:r>
-          </a:p>
-          <a:p>
-            <a:pPr>
-              <a:spcBef>
-                <a:spcPts val="500"/>
-              </a:spcBef>
-              <a:defRPr sz="1500" b="1">
-                <a:solidFill>
-                  <a:srgbClr val="121E31"/>
-                </a:solidFill>
-              </a:defRPr>
-            </a:pPr>
-            <a:r>
-              <a:t>Je bot gebruikt schat_winkans() met tegenstanders=5.</a:t>
+              <a:t>Geen verdubbeling: het bod gaat naar het volgende veelvoud van de big blind. grote_raise is iets anders — die zet in één keer naar 200.</a:t>
             </a:r>
           </a:p>
         </p:txBody>
@@ -4251,7 +3837,7 @@
               </a:defRPr>
             </a:pPr>
             <a:r>
-              <a:t>DEEL 6 · 16 MIN · DE THEORIE</a:t>
+              <a:t>DEEL 2 · 16 MIN · WAT JIJ DOET</a:t>
             </a:r>
           </a:p>
           <a:p>
@@ -4266,7 +3852,7 @@
               </a:defRPr>
             </a:pPr>
             <a:r>
-              <a:t>Pot odds × winkans: een echte beslisregel</a:t>
+              <a:t>Pokerbot Upgrade: hoe het spel écht werkt</a:t>
             </a:r>
           </a:p>
         </p:txBody>
@@ -4280,7 +3866,7 @@
         <p:spPr>
           <a:xfrm>
             <a:off x="731520" y="1600200"/>
-            <a:ext cx="6035040" cy="4480560"/>
+            <a:ext cx="10698480" cy="2468880"/>
           </a:xfrm>
           <a:prstGeom prst="roundRect">
             <a:avLst>
@@ -4328,7 +3914,7 @@
         <p:spPr>
           <a:xfrm>
             <a:off x="1005840" y="1828800"/>
-            <a:ext cx="5486400" cy="4023360"/>
+            <a:ext cx="10149840" cy="2011680"/>
           </a:xfrm>
           <a:prstGeom prst="rect">
             <a:avLst/>
@@ -4342,147 +3928,131 @@
           <a:lstStyle/>
           <a:p>
             <a:pPr>
-              <a:defRPr sz="1400" b="1">
+              <a:defRPr sz="1400" b="0">
+                <a:solidFill>
+                  <a:srgbClr val="121E31"/>
+                </a:solidFill>
+              </a:defRPr>
+            </a:pPr>
+            <a:r>
+              <a:t>•  Live demo van één hand, en daarna bouw je zelf een rondje op in code.</a:t>
+            </a:r>
+          </a:p>
+          <a:p>
+            <a:pPr>
+              <a:spcBef>
+                <a:spcPts val="1200"/>
+              </a:spcBef>
+              <a:defRPr sz="1400" b="0">
+                <a:solidFill>
+                  <a:srgbClr val="121E31"/>
+                </a:solidFill>
+              </a:defRPr>
+            </a:pPr>
+            <a:r>
+              <a:t>•  Let op de raise-regel: maximaal twee raises per straat — een derde wordt een call.</a:t>
+            </a:r>
+          </a:p>
+        </p:txBody>
+      </p:sp>
+      <p:sp>
+        <p:nvSpPr>
+          <p:cNvPr id="6" name="Rounded Rectangle 5"/>
+          <p:cNvSpPr/>
+          <p:nvPr/>
+        </p:nvSpPr>
+        <p:spPr>
+          <a:xfrm>
+            <a:off x="731520" y="4343400"/>
+            <a:ext cx="10698480" cy="1371600"/>
+          </a:xfrm>
+          <a:prstGeom prst="roundRect">
+            <a:avLst>
+              <a:gd name="adj" fmla="val 3000"/>
+            </a:avLst>
+          </a:prstGeom>
+          <a:solidFill>
+            <a:srgbClr val="F0F6F3"/>
+          </a:solidFill>
+          <a:ln w="9525">
+            <a:solidFill>
+              <a:srgbClr val="1B4D3E"/>
+            </a:solidFill>
+          </a:ln>
+          <a:effectLst/>
+        </p:spPr>
+        <p:style>
+          <a:lnRef idx="1">
+            <a:schemeClr val="accent1"/>
+          </a:lnRef>
+          <a:fillRef idx="3">
+            <a:schemeClr val="accent1"/>
+          </a:fillRef>
+          <a:effectRef idx="2">
+            <a:schemeClr val="accent1"/>
+          </a:effectRef>
+          <a:fontRef idx="minor">
+            <a:schemeClr val="lt1"/>
+          </a:fontRef>
+        </p:style>
+        <p:txBody>
+          <a:bodyPr rtlCol="0" anchor="ctr"/>
+          <a:lstStyle/>
+          <a:p>
+            <a:pPr algn="ctr"/>
+          </a:p>
+        </p:txBody>
+      </p:sp>
+      <p:sp>
+        <p:nvSpPr>
+          <p:cNvPr id="7" name="TextBox 6"/>
+          <p:cNvSpPr txBox="1"/>
+          <p:nvPr/>
+        </p:nvSpPr>
+        <p:spPr>
+          <a:xfrm>
+            <a:off x="1005840" y="4526280"/>
+            <a:ext cx="10149840" cy="1005840"/>
+          </a:xfrm>
+          <a:prstGeom prst="rect">
+            <a:avLst/>
+          </a:prstGeom>
+          <a:noFill/>
+        </p:spPr>
+        <p:txBody>
+          <a:bodyPr wrap="square">
+            <a:spAutoFit/>
+          </a:bodyPr>
+          <a:lstStyle/>
+          <a:p>
+            <a:pPr>
+              <a:defRPr sz="1000" b="1">
                 <a:solidFill>
                   <a:srgbClr val="1B4D3E"/>
                 </a:solidFill>
               </a:defRPr>
             </a:pPr>
             <a:r>
-              <a:t>De twee helften</a:t>
-            </a:r>
-          </a:p>
-          <a:p>
-            <a:pPr>
-              <a:spcBef>
-                <a:spcPts val="300"/>
-              </a:spcBef>
-              <a:defRPr sz="1150" b="0">
+              <a:t>WAT JE HIERVAN INLEVERT</a:t>
+            </a:r>
+          </a:p>
+          <a:p>
+            <a:pPr>
+              <a:spcBef>
+                <a:spcPts val="500"/>
+              </a:spcBef>
+              <a:defRPr sz="1500" b="1">
                 <a:solidFill>
                   <a:srgbClr val="121E31"/>
                 </a:solidFill>
               </a:defRPr>
             </a:pPr>
             <a:r>
-              <a:t>bereken_pot_odds(pot, inzet) zegt wat je MINIMAAL moet winnen. schat_winkans zegt wat je NAAR VERWACHTING wint.</a:t>
-            </a:r>
-          </a:p>
-          <a:p>
-            <a:pPr>
-              <a:spcBef>
-                <a:spcPts val="1400"/>
-              </a:spcBef>
-              <a:defRPr sz="1400" b="1">
-                <a:solidFill>
-                  <a:srgbClr val="1B4D3E"/>
-                </a:solidFill>
-              </a:defRPr>
-            </a:pPr>
-            <a:r>
-              <a:t>Rekenen, geen vuistregel</a:t>
-            </a:r>
-          </a:p>
-          <a:p>
-            <a:pPr>
-              <a:spcBef>
-                <a:spcPts val="300"/>
-              </a:spcBef>
-              <a:defRPr sz="1150" b="0">
-                <a:solidFill>
-                  <a:srgbClr val="121E31"/>
-                </a:solidFill>
-              </a:defRPr>
-            </a:pPr>
-            <a:r>
-              <a:t>Pot 100, je moet 20 bijleggen: 20/(100+20) ≈ 17% nodig.</a:t>
-            </a:r>
-          </a:p>
-          <a:p>
-            <a:pPr>
-              <a:spcBef>
-                <a:spcPts val="1400"/>
-              </a:spcBef>
-              <a:defRPr sz="1400" b="1">
-                <a:solidFill>
-                  <a:srgbClr val="1B4D3E"/>
-                </a:solidFill>
-              </a:defRPr>
-            </a:pPr>
-            <a:r>
-              <a:t>Waar het stil fout gaat</a:t>
-            </a:r>
-          </a:p>
-          <a:p>
-            <a:pPr>
-              <a:spcBef>
-                <a:spcPts val="300"/>
-              </a:spcBef>
-              <a:defRPr sz="1150" b="0">
-                <a:solidFill>
-                  <a:srgbClr val="121E31"/>
-                </a:solidFill>
-              </a:defRPr>
-            </a:pPr>
-            <a:r>
-              <a:t>Vergelijk je een kop-op-kop-winkans met de prijs aan een tafel van zes, dan lijkt bijna elke hand de moeite waard. Je bot crasht niet — hij verliest alleen chips.</a:t>
-            </a:r>
-          </a:p>
-          <a:p>
-            <a:pPr>
-              <a:spcBef>
-                <a:spcPts val="1400"/>
-              </a:spcBef>
-              <a:defRPr sz="1400" b="1">
-                <a:solidFill>
-                  <a:srgbClr val="1B4D3E"/>
-                </a:solidFill>
-              </a:defRPr>
-            </a:pPr>
-            <a:r>
-              <a:t>Zelfde regel, ander advies</a:t>
-            </a:r>
-          </a:p>
-          <a:p>
-            <a:pPr>
-              <a:spcBef>
-                <a:spcPts val="300"/>
-              </a:spcBef>
-              <a:defRPr sz="1150" b="0">
-                <a:solidFill>
-                  <a:srgbClr val="121E31"/>
-                </a:solidFill>
-              </a:defRPr>
-            </a:pPr>
-            <a:r>
-              <a:t>Met 7-2: bij 1 tegenstander zegt de regel CALL, bij 5 tegenstanders FOLD.</a:t>
-            </a:r>
-          </a:p>
-        </p:txBody>
-      </p:sp>
-      <p:pic>
-        <p:nvPicPr>
-          <p:cNvPr id="6" name="Picture 5" descr="potodds.png"/>
-          <p:cNvPicPr>
-            <a:picLocks noChangeAspect="1"/>
-          </p:cNvPicPr>
-          <p:nvPr/>
-        </p:nvPicPr>
-        <p:blipFill>
-          <a:blip r:embed="rId2"/>
-          <a:stretch>
-            <a:fillRect/>
-          </a:stretch>
-        </p:blipFill>
-        <p:spPr>
-          <a:xfrm>
-            <a:off x="7040880" y="2103120"/>
-            <a:ext cx="4389120" cy="2163651"/>
-          </a:xfrm>
-          <a:prstGeom prst="rect">
-            <a:avLst/>
-          </a:prstGeom>
-        </p:spPr>
-      </p:pic>
+              <a:t>Niets — dit is de uitleg waar Deel 3 op verder bouwt.</a:t>
+            </a:r>
+          </a:p>
+        </p:txBody>
+      </p:sp>
     </p:spTree>
   </p:cSld>
   <p:clrMapOvr>
@@ -4575,7 +4145,7 @@
               </a:defRPr>
             </a:pPr>
             <a:r>
-              <a:t>DEEL 6 · 16 MIN · WAT JIJ DOET</a:t>
+              <a:t>DEEL 3 · 12 MIN · DE THEORIE</a:t>
             </a:r>
           </a:p>
           <a:p>
@@ -4590,7 +4160,7 @@
               </a:defRPr>
             </a:pPr>
             <a:r>
-              <a:t>Pot odds × winkans: een echte beslisregel</a:t>
+              <a:t>Zelf starten: Bot v2 skeleton</a:t>
             </a:r>
           </a:p>
         </p:txBody>
@@ -4604,7 +4174,7 @@
         <p:spPr>
           <a:xfrm>
             <a:off x="731520" y="1600200"/>
-            <a:ext cx="10698480" cy="2468880"/>
+            <a:ext cx="10698480" cy="4480560"/>
           </a:xfrm>
           <a:prstGeom prst="roundRect">
             <a:avLst>
@@ -4652,7 +4222,7 @@
         <p:spPr>
           <a:xfrm>
             <a:off x="1005840" y="1828800"/>
-            <a:ext cx="10149840" cy="2011680"/>
+            <a:ext cx="10149840" cy="4023360"/>
           </a:xfrm>
           <a:prstGeom prst="rect">
             <a:avLst/>
@@ -4666,127 +4236,89 @@
           <a:lstStyle/>
           <a:p>
             <a:pPr>
-              <a:defRPr sz="1400" b="0">
+              <a:defRPr sz="1400" b="1">
+                <a:solidFill>
+                  <a:srgbClr val="1B4D3E"/>
+                </a:solidFill>
+              </a:defRPr>
+            </a:pPr>
+            <a:r>
+              <a:t>Van één naar twee parameters</a:t>
+            </a:r>
+          </a:p>
+          <a:p>
+            <a:pPr>
+              <a:spcBef>
+                <a:spcPts val="300"/>
+              </a:spcBef>
+              <a:defRPr sz="1150" b="0">
                 <a:solidFill>
                   <a:srgbClr val="121E31"/>
                 </a:solidFill>
               </a:defRPr>
             </a:pPr>
             <a:r>
-              <a:t>•  Reken de regel twee keer uit: met tegenstanders=1 en met tegenstanders=5.</a:t>
-            </a:r>
-          </a:p>
-          <a:p>
-            <a:pPr>
-              <a:spcBef>
-                <a:spcPts val="1200"/>
-              </a:spcBef>
-              <a:defRPr sz="1400" b="0">
+              <a:t>Bot v1 kende alleen je hand. Bot v2 krijgt je stack erbij: hoeveel risico kun je je veroorloven?</a:t>
+            </a:r>
+          </a:p>
+          <a:p>
+            <a:pPr>
+              <a:spcBef>
+                <a:spcPts val="1400"/>
+              </a:spcBef>
+              <a:defRPr sz="1400" b="1">
+                <a:solidFill>
+                  <a:srgbClr val="1B4D3E"/>
+                </a:solidFill>
+              </a:defRPr>
+            </a:pPr>
+            <a:r>
+              <a:t>Een patroon, geen voorschrift</a:t>
+            </a:r>
+          </a:p>
+          <a:p>
+            <a:pPr>
+              <a:spcBef>
+                <a:spcPts val="300"/>
+              </a:spcBef>
+              <a:defRPr sz="1150" b="0">
                 <a:solidFill>
                   <a:srgbClr val="121E31"/>
                 </a:solidFill>
               </a:defRPr>
             </a:pPr>
             <a:r>
-              <a:t>•  Kies daarna je eigen drempel en verdedig hem.</a:t>
-            </a:r>
-          </a:p>
-        </p:txBody>
-      </p:sp>
-      <p:sp>
-        <p:nvSpPr>
-          <p:cNvPr id="6" name="Rounded Rectangle 5"/>
-          <p:cNvSpPr/>
-          <p:nvPr/>
-        </p:nvSpPr>
-        <p:spPr>
-          <a:xfrm>
-            <a:off x="731520" y="4343400"/>
-            <a:ext cx="10698480" cy="1371600"/>
-          </a:xfrm>
-          <a:prstGeom prst="roundRect">
-            <a:avLst>
-              <a:gd name="adj" fmla="val 3000"/>
-            </a:avLst>
-          </a:prstGeom>
-          <a:solidFill>
-            <a:srgbClr val="F0F6F3"/>
-          </a:solidFill>
-          <a:ln w="9525">
-            <a:solidFill>
-              <a:srgbClr val="1B4D3E"/>
-            </a:solidFill>
-          </a:ln>
-          <a:effectLst/>
-        </p:spPr>
-        <p:style>
-          <a:lnRef idx="1">
-            <a:schemeClr val="accent1"/>
-          </a:lnRef>
-          <a:fillRef idx="3">
-            <a:schemeClr val="accent1"/>
-          </a:fillRef>
-          <a:effectRef idx="2">
-            <a:schemeClr val="accent1"/>
-          </a:effectRef>
-          <a:fontRef idx="minor">
-            <a:schemeClr val="lt1"/>
-          </a:fontRef>
-        </p:style>
-        <p:txBody>
-          <a:bodyPr rtlCol="0" anchor="ctr"/>
-          <a:lstStyle/>
-          <a:p>
-            <a:pPr algn="ctr"/>
-          </a:p>
-        </p:txBody>
-      </p:sp>
-      <p:sp>
-        <p:nvSpPr>
-          <p:cNvPr id="7" name="TextBox 6"/>
-          <p:cNvSpPr txBox="1"/>
-          <p:nvPr/>
-        </p:nvSpPr>
-        <p:spPr>
-          <a:xfrm>
-            <a:off x="1005840" y="4526280"/>
-            <a:ext cx="10149840" cy="1005840"/>
-          </a:xfrm>
-          <a:prstGeom prst="rect">
-            <a:avLst/>
-          </a:prstGeom>
-          <a:noFill/>
-        </p:spPr>
-        <p:txBody>
-          <a:bodyPr wrap="square">
-            <a:spAutoFit/>
-          </a:bodyPr>
-          <a:lstStyle/>
-          <a:p>
-            <a:pPr>
-              <a:defRPr sz="1000" b="1">
+              <a:t>stack &gt; 700 kun je wachten of druk zetten; 300–700 normaal spelen; onder 300 korte-stack-modus. Bedenk je eigen getallen.</a:t>
+            </a:r>
+          </a:p>
+          <a:p>
+            <a:pPr>
+              <a:spcBef>
+                <a:spcPts val="1400"/>
+              </a:spcBef>
+              <a:defRPr sz="1400" b="1">
                 <a:solidFill>
                   <a:srgbClr val="1B4D3E"/>
                 </a:solidFill>
               </a:defRPr>
             </a:pPr>
             <a:r>
-              <a:t>WAT JE HIERVAN INLEVERT</a:t>
-            </a:r>
-          </a:p>
-          <a:p>
-            <a:pPr>
-              <a:spcBef>
-                <a:spcPts val="500"/>
-              </a:spcBef>
-              <a:defRPr sz="1500" b="1">
+              <a:t>Vier acties</a:t>
+            </a:r>
+          </a:p>
+          <a:p>
+            <a:pPr>
+              <a:spcBef>
+                <a:spcPts val="300"/>
+              </a:spcBef>
+              <a:defRPr sz="1150" b="0">
                 <a:solidFill>
                   <a:srgbClr val="121E31"/>
                 </a:solidFill>
               </a:defRPr>
             </a:pPr>
             <a:r>
-              <a:t>Een beslisregel in je bot die beide getallen vergelijkt.</a:t>
+              <a:t>fold, call, raise, all_in. Wat elke actie doet staat in Deel 2.</a:t>
             </a:r>
           </a:p>
         </p:txBody>
@@ -4883,7 +4415,7 @@
               </a:defRPr>
             </a:pPr>
             <a:r>
-              <a:t>DEEL 7 · HUISWERK · DE THEORIE</a:t>
+              <a:t>DEEL 3 · 12 MIN · WAT JIJ DOET</a:t>
             </a:r>
           </a:p>
           <a:p>
@@ -4898,7 +4430,7 @@
               </a:defRPr>
             </a:pPr>
             <a:r>
-              <a:t>Bot v2 afmaken en verbeteren</a:t>
+              <a:t>Zelf starten: Bot v2 skeleton</a:t>
             </a:r>
           </a:p>
         </p:txBody>
@@ -4912,7 +4444,7 @@
         <p:spPr>
           <a:xfrm>
             <a:off x="731520" y="1600200"/>
-            <a:ext cx="10698480" cy="4480560"/>
+            <a:ext cx="10698480" cy="2468880"/>
           </a:xfrm>
           <a:prstGeom prst="roundRect">
             <a:avLst>
@@ -4960,7 +4492,7 @@
         <p:spPr>
           <a:xfrm>
             <a:off x="1005840" y="1828800"/>
-            <a:ext cx="10149840" cy="4023360"/>
+            <a:ext cx="10149840" cy="2011680"/>
           </a:xfrm>
           <a:prstGeom prst="rect">
             <a:avLst/>
@@ -4974,89 +4506,127 @@
           <a:lstStyle/>
           <a:p>
             <a:pPr>
-              <a:defRPr sz="1400" b="1">
+              <a:defRPr sz="1400" b="0">
+                <a:solidFill>
+                  <a:srgbClr val="121E31"/>
+                </a:solidFill>
+              </a:defRPr>
+            </a:pPr>
+            <a:r>
+              <a:t>•  Schrijf kies_actie(hand, stack) in mijn_bot_week3.py.</a:t>
+            </a:r>
+          </a:p>
+          <a:p>
+            <a:pPr>
+              <a:spcBef>
+                <a:spcPts val="1200"/>
+              </a:spcBef>
+              <a:defRPr sz="1400" b="0">
+                <a:solidFill>
+                  <a:srgbClr val="121E31"/>
+                </a:solidFill>
+              </a:defRPr>
+            </a:pPr>
+            <a:r>
+              <a:t>•  Bouw hem stap voor stap op: eerst de hand, dan de stack erbij.</a:t>
+            </a:r>
+          </a:p>
+        </p:txBody>
+      </p:sp>
+      <p:sp>
+        <p:nvSpPr>
+          <p:cNvPr id="6" name="Rounded Rectangle 5"/>
+          <p:cNvSpPr/>
+          <p:nvPr/>
+        </p:nvSpPr>
+        <p:spPr>
+          <a:xfrm>
+            <a:off x="731520" y="4343400"/>
+            <a:ext cx="10698480" cy="1371600"/>
+          </a:xfrm>
+          <a:prstGeom prst="roundRect">
+            <a:avLst>
+              <a:gd name="adj" fmla="val 3000"/>
+            </a:avLst>
+          </a:prstGeom>
+          <a:solidFill>
+            <a:srgbClr val="F0F6F3"/>
+          </a:solidFill>
+          <a:ln w="9525">
+            <a:solidFill>
+              <a:srgbClr val="1B4D3E"/>
+            </a:solidFill>
+          </a:ln>
+          <a:effectLst/>
+        </p:spPr>
+        <p:style>
+          <a:lnRef idx="1">
+            <a:schemeClr val="accent1"/>
+          </a:lnRef>
+          <a:fillRef idx="3">
+            <a:schemeClr val="accent1"/>
+          </a:fillRef>
+          <a:effectRef idx="2">
+            <a:schemeClr val="accent1"/>
+          </a:effectRef>
+          <a:fontRef idx="minor">
+            <a:schemeClr val="lt1"/>
+          </a:fontRef>
+        </p:style>
+        <p:txBody>
+          <a:bodyPr rtlCol="0" anchor="ctr"/>
+          <a:lstStyle/>
+          <a:p>
+            <a:pPr algn="ctr"/>
+          </a:p>
+        </p:txBody>
+      </p:sp>
+      <p:sp>
+        <p:nvSpPr>
+          <p:cNvPr id="7" name="TextBox 6"/>
+          <p:cNvSpPr txBox="1"/>
+          <p:nvPr/>
+        </p:nvSpPr>
+        <p:spPr>
+          <a:xfrm>
+            <a:off x="1005840" y="4526280"/>
+            <a:ext cx="10149840" cy="1005840"/>
+          </a:xfrm>
+          <a:prstGeom prst="rect">
+            <a:avLst/>
+          </a:prstGeom>
+          <a:noFill/>
+        </p:spPr>
+        <p:txBody>
+          <a:bodyPr wrap="square">
+            <a:spAutoFit/>
+          </a:bodyPr>
+          <a:lstStyle/>
+          <a:p>
+            <a:pPr>
+              <a:defRPr sz="1000" b="1">
                 <a:solidFill>
                   <a:srgbClr val="1B4D3E"/>
                 </a:solidFill>
               </a:defRPr>
             </a:pPr>
             <a:r>
-              <a:t>Geen invuloefening</a:t>
-            </a:r>
-          </a:p>
-          <a:p>
-            <a:pPr>
-              <a:spcBef>
-                <a:spcPts val="300"/>
-              </a:spcBef>
-              <a:defRPr sz="1150" b="0">
+              <a:t>WAT JE HIERVAN INLEVERT</a:t>
+            </a:r>
+          </a:p>
+          <a:p>
+            <a:pPr>
+              <a:spcBef>
+                <a:spcPts val="500"/>
+              </a:spcBef>
+              <a:defRPr sz="1500" b="1">
                 <a:solidFill>
                   <a:srgbClr val="121E31"/>
                 </a:solidFill>
               </a:defRPr>
             </a:pPr>
             <a:r>
-              <a:t>Er is geen goed antwoord dat wij achter de hand houden. Hier zit je zelf aan het stuur.</a:t>
-            </a:r>
-          </a:p>
-          <a:p>
-            <a:pPr>
-              <a:spcBef>
-                <a:spcPts val="1400"/>
-              </a:spcBef>
-              <a:defRPr sz="1400" b="1">
-                <a:solidFill>
-                  <a:srgbClr val="1B4D3E"/>
-                </a:solidFill>
-              </a:defRPr>
-            </a:pPr>
-            <a:r>
-              <a:t>Waar je tijd in gaat zitten</a:t>
-            </a:r>
-          </a:p>
-          <a:p>
-            <a:pPr>
-              <a:spcBef>
-                <a:spcPts val="300"/>
-              </a:spcBef>
-              <a:defRPr sz="1150" b="0">
-                <a:solidFill>
-                  <a:srgbClr val="121E31"/>
-                </a:solidFill>
-              </a:defRPr>
-            </a:pPr>
-            <a:r>
-              <a:t>kies_actie uitbreiden met ronde, pot en inzet_om_te_callen: 1–2 uur. De winkans-regel inbouwen en drempels afstemmen: 1–2 uur. Een eigen testset bouwen: 1–2 uur. Reageren op de uitslag: 1–2 uur.</a:t>
-            </a:r>
-          </a:p>
-          <a:p>
-            <a:pPr>
-              <a:spcBef>
-                <a:spcPts val="1400"/>
-              </a:spcBef>
-              <a:defRPr sz="1400" b="1">
-                <a:solidFill>
-                  <a:srgbClr val="1B4D3E"/>
-                </a:solidFill>
-              </a:defRPr>
-            </a:pPr>
-            <a:r>
-              <a:t>Twee momenten</a:t>
-            </a:r>
-          </a:p>
-          <a:p>
-            <a:pPr>
-              <a:spcBef>
-                <a:spcPts val="300"/>
-              </a:spcBef>
-              <a:defRPr sz="1150" b="0">
-                <a:solidFill>
-                  <a:srgbClr val="121E31"/>
-                </a:solidFill>
-              </a:defRPr>
-            </a:pPr>
-            <a:r>
-              <a:t>Woensdag 09:00 een werkende bot voor het toernooi. Donderdag 18:00 je verbeterde versie.</a:t>
+              <a:t>Een werkend skeleton — de rest van de week maak je hem beter.</a:t>
             </a:r>
           </a:p>
         </p:txBody>
@@ -5153,7 +4723,7 @@
               </a:defRPr>
             </a:pPr>
             <a:r>
-              <a:t>DEEL 7 · 4 TOT 8 UUR · WAT JIJ DOET</a:t>
+              <a:t>DEEL 4 · 14 MIN · DE THEORIE</a:t>
             </a:r>
           </a:p>
           <a:p>
@@ -5168,7 +4738,7 @@
               </a:defRPr>
             </a:pPr>
             <a:r>
-              <a:t>Bot v2 afmaken en verbeteren</a:t>
+              <a:t>Handsterkte: wat wint er eigenlijk?</a:t>
             </a:r>
           </a:p>
         </p:txBody>
@@ -5182,7 +4752,7 @@
         <p:spPr>
           <a:xfrm>
             <a:off x="731520" y="1600200"/>
-            <a:ext cx="10698480" cy="2468880"/>
+            <a:ext cx="10698480" cy="4480560"/>
           </a:xfrm>
           <a:prstGeom prst="roundRect">
             <a:avLst>
@@ -5230,7 +4800,7 @@
         <p:spPr>
           <a:xfrm>
             <a:off x="1005840" y="1828800"/>
-            <a:ext cx="10149840" cy="2011680"/>
+            <a:ext cx="10149840" cy="4023360"/>
           </a:xfrm>
           <a:prstGeom prst="rect">
             <a:avLst/>
@@ -5244,127 +4814,89 @@
           <a:lstStyle/>
           <a:p>
             <a:pPr>
-              <a:defRPr sz="1400" b="0">
+              <a:defRPr sz="1400" b="1">
+                <a:solidFill>
+                  <a:srgbClr val="1B4D3E"/>
+                </a:solidFill>
+              </a:defRPr>
+            </a:pPr>
+            <a:r>
+              <a:t>Negen soorten</a:t>
+            </a:r>
+          </a:p>
+          <a:p>
+            <a:pPr>
+              <a:spcBef>
+                <a:spcPts val="300"/>
+              </a:spcBef>
+              <a:defRPr sz="1150" b="0">
                 <a:solidFill>
                   <a:srgbClr val="121E31"/>
                 </a:solidFill>
               </a:defRPr>
             </a:pPr>
             <a:r>
-              <a:t>•  Bouw verder op je skeleton uit Deel 3.</a:t>
-            </a:r>
-          </a:p>
-          <a:p>
-            <a:pPr>
-              <a:spcBef>
-                <a:spcPts val="1200"/>
-              </a:spcBef>
-              <a:defRPr sz="1400" b="0">
+              <a:t>hoge kaart · één paar · twee paar · three of a kind · straat · flush · full house · four of a kind · straight flush.</a:t>
+            </a:r>
+          </a:p>
+          <a:p>
+            <a:pPr>
+              <a:spcBef>
+                <a:spcPts val="1400"/>
+              </a:spcBef>
+              <a:defRPr sz="1400" b="1">
+                <a:solidFill>
+                  <a:srgbClr val="1B4D3E"/>
+                </a:solidFill>
+              </a:defRPr>
+            </a:pPr>
+            <a:r>
+              <a:t>Vijf uit zeven</a:t>
+            </a:r>
+          </a:p>
+          <a:p>
+            <a:pPr>
+              <a:spcBef>
+                <a:spcPts val="300"/>
+              </a:spcBef>
+              <a:defRPr sz="1150" b="0">
                 <a:solidFill>
                   <a:srgbClr val="121E31"/>
                 </a:solidFill>
               </a:defRPr>
             </a:pPr>
             <a:r>
-              <a:t>•  Test met je eigen situaties, niet alleen met de gegeven voorbeelden.</a:t>
-            </a:r>
-          </a:p>
-        </p:txBody>
-      </p:sp>
-      <p:sp>
-        <p:nvSpPr>
-          <p:cNvPr id="6" name="Rounded Rectangle 5"/>
-          <p:cNvSpPr/>
-          <p:nvPr/>
-        </p:nvSpPr>
-        <p:spPr>
-          <a:xfrm>
-            <a:off x="731520" y="4343400"/>
-            <a:ext cx="10698480" cy="1371600"/>
-          </a:xfrm>
-          <a:prstGeom prst="roundRect">
-            <a:avLst>
-              <a:gd name="adj" fmla="val 3000"/>
-            </a:avLst>
-          </a:prstGeom>
-          <a:solidFill>
-            <a:srgbClr val="F0F6F3"/>
-          </a:solidFill>
-          <a:ln w="9525">
-            <a:solidFill>
-              <a:srgbClr val="1B4D3E"/>
-            </a:solidFill>
-          </a:ln>
-          <a:effectLst/>
-        </p:spPr>
-        <p:style>
-          <a:lnRef idx="1">
-            <a:schemeClr val="accent1"/>
-          </a:lnRef>
-          <a:fillRef idx="3">
-            <a:schemeClr val="accent1"/>
-          </a:fillRef>
-          <a:effectRef idx="2">
-            <a:schemeClr val="accent1"/>
-          </a:effectRef>
-          <a:fontRef idx="minor">
-            <a:schemeClr val="lt1"/>
-          </a:fontRef>
-        </p:style>
-        <p:txBody>
-          <a:bodyPr rtlCol="0" anchor="ctr"/>
-          <a:lstStyle/>
-          <a:p>
-            <a:pPr algn="ctr"/>
-          </a:p>
-        </p:txBody>
-      </p:sp>
-      <p:sp>
-        <p:nvSpPr>
-          <p:cNvPr id="7" name="TextBox 6"/>
-          <p:cNvSpPr txBox="1"/>
-          <p:nvPr/>
-        </p:nvSpPr>
-        <p:spPr>
-          <a:xfrm>
-            <a:off x="1005840" y="4526280"/>
-            <a:ext cx="10149840" cy="1005840"/>
-          </a:xfrm>
-          <a:prstGeom prst="rect">
-            <a:avLst/>
-          </a:prstGeom>
-          <a:noFill/>
-        </p:spPr>
-        <p:txBody>
-          <a:bodyPr wrap="square">
-            <a:spAutoFit/>
-          </a:bodyPr>
-          <a:lstStyle/>
-          <a:p>
-            <a:pPr>
-              <a:defRPr sz="1000" b="1">
+              <a:t>Elke speler maakt de beste 5-kaartshand uit zijn 2 hole cards plus de 5 gedeelde kaarten.</a:t>
+            </a:r>
+          </a:p>
+          <a:p>
+            <a:pPr>
+              <a:spcBef>
+                <a:spcPts val="1400"/>
+              </a:spcBef>
+              <a:defRPr sz="1400" b="1">
                 <a:solidFill>
                   <a:srgbClr val="1B4D3E"/>
                 </a:solidFill>
               </a:defRPr>
             </a:pPr>
             <a:r>
-              <a:t>WAT JE HIERVAN INLEVERT</a:t>
-            </a:r>
-          </a:p>
-          <a:p>
-            <a:pPr>
-              <a:spcBef>
-                <a:spcPts val="500"/>
-              </a:spcBef>
-              <a:defRPr sz="1500" b="1">
+              <a:t>Kleur telt hier wél</a:t>
+            </a:r>
+          </a:p>
+          <a:p>
+            <a:pPr>
+              <a:spcBef>
+                <a:spcPts val="300"/>
+              </a:spcBef>
+              <a:defRPr sz="1150" b="0">
                 <a:solidFill>
                   <a:srgbClr val="121E31"/>
                 </a:solidFill>
               </a:defRPr>
             </a:pPr>
             <a:r>
-              <a:t>wo 09:00 een werkende Bot v2 · do 18:00 je verbeterde versie.</a:t>
+              <a:t>Twee tekens: eerst de kleur, dan de rang. SA is schoppen aas, HK harten heer, DQ ruiten vrouw, CJ klaveren boer. Zonder kleur kun je geen flush herkennen.</a:t>
             </a:r>
           </a:p>
         </p:txBody>
@@ -5461,7 +4993,7 @@
               </a:defRPr>
             </a:pPr>
             <a:r>
-              <a:t>DEEL 8 · 10 MIN · HUISWERK · DE THEORIE</a:t>
+              <a:t>DEEL 4 · DE SPELREGELS</a:t>
             </a:r>
           </a:p>
           <a:p>
@@ -5476,59 +5008,35 @@
               </a:defRPr>
             </a:pPr>
             <a:r>
-              <a:t>Lokaal testen tegen je eigen Week 1-bot</a:t>
-            </a:r>
-          </a:p>
-        </p:txBody>
-      </p:sp>
-      <p:sp>
-        <p:nvSpPr>
-          <p:cNvPr id="4" name="Rounded Rectangle 3"/>
-          <p:cNvSpPr/>
-          <p:nvPr/>
-        </p:nvSpPr>
-        <p:spPr>
-          <a:xfrm>
-            <a:off x="731520" y="1600200"/>
-            <a:ext cx="10698480" cy="4480560"/>
-          </a:xfrm>
-          <a:prstGeom prst="roundRect">
-            <a:avLst>
-              <a:gd name="adj" fmla="val 3000"/>
-            </a:avLst>
-          </a:prstGeom>
-          <a:solidFill>
-            <a:srgbClr val="FFFFFF"/>
-          </a:solidFill>
-          <a:ln w="9525">
-            <a:solidFill>
-              <a:srgbClr val="DCE1E6"/>
-            </a:solidFill>
-          </a:ln>
-          <a:effectLst/>
-        </p:spPr>
-        <p:style>
-          <a:lnRef idx="1">
-            <a:schemeClr val="accent1"/>
-          </a:lnRef>
-          <a:fillRef idx="3">
-            <a:schemeClr val="accent1"/>
-          </a:fillRef>
-          <a:effectRef idx="2">
-            <a:schemeClr val="accent1"/>
-          </a:effectRef>
-          <a:fontRef idx="minor">
-            <a:schemeClr val="lt1"/>
-          </a:fontRef>
-        </p:style>
-        <p:txBody>
-          <a:bodyPr rtlCol="0" anchor="ctr"/>
-          <a:lstStyle/>
-          <a:p>
-            <a:pPr algn="ctr"/>
-          </a:p>
-        </p:txBody>
-      </p:sp>
+              <a:t>De negen handsoorten, zwakste bovenaan</a:t>
+            </a:r>
+          </a:p>
+        </p:txBody>
+      </p:sp>
+      <p:pic>
+        <p:nvPicPr>
+          <p:cNvPr id="4" name="Picture 3" descr="handsterkte.png"/>
+          <p:cNvPicPr>
+            <a:picLocks noChangeAspect="1"/>
+          </p:cNvPicPr>
+          <p:nvPr/>
+        </p:nvPicPr>
+        <p:blipFill>
+          <a:blip r:embed="rId2"/>
+          <a:stretch>
+            <a:fillRect/>
+          </a:stretch>
+        </p:blipFill>
+        <p:spPr>
+          <a:xfrm>
+            <a:off x="1417041" y="1554480"/>
+            <a:ext cx="9357613" cy="4069080"/>
+          </a:xfrm>
+          <a:prstGeom prst="rect">
+            <a:avLst/>
+          </a:prstGeom>
+        </p:spPr>
+      </p:pic>
       <p:sp>
         <p:nvSpPr>
           <p:cNvPr id="5" name="TextBox 4"/>
@@ -5537,8 +5045,8 @@
         </p:nvSpPr>
         <p:spPr>
           <a:xfrm>
-            <a:off x="1005840" y="1828800"/>
-            <a:ext cx="10149840" cy="4023360"/>
+            <a:off x="1005840" y="5852160"/>
+            <a:ext cx="10149840" cy="777240"/>
           </a:xfrm>
           <a:prstGeom prst="rect">
             <a:avLst/>
@@ -5552,59 +5060,14 @@
           <a:lstStyle/>
           <a:p>
             <a:pPr>
-              <a:defRPr sz="1400" b="1">
-                <a:solidFill>
-                  <a:srgbClr val="1B4D3E"/>
-                </a:solidFill>
-              </a:defRPr>
-            </a:pPr>
-            <a:r>
-              <a:t>Zelfde handen, twee bots</a:t>
-            </a:r>
-          </a:p>
-          <a:p>
-            <a:pPr>
-              <a:spcBef>
-                <a:spcPts val="300"/>
-              </a:spcBef>
-              <a:defRPr sz="1150" b="0">
+              <a:defRPr sz="1250" b="0">
                 <a:solidFill>
                   <a:srgbClr val="121E31"/>
                 </a:solidFill>
               </a:defRPr>
             </a:pPr>
             <a:r>
-              <a:t>Laat Bot v2 en Bot v1 dezelfde testhanden zien en vergelijk wat ze kiezen.</a:t>
-            </a:r>
-          </a:p>
-          <a:p>
-            <a:pPr>
-              <a:spcBef>
-                <a:spcPts val="1400"/>
-              </a:spcBef>
-              <a:defRPr sz="1400" b="1">
-                <a:solidFill>
-                  <a:srgbClr val="1B4D3E"/>
-                </a:solidFill>
-              </a:defRPr>
-            </a:pPr>
-            <a:r>
-              <a:t>De vraag erachter</a:t>
-            </a:r>
-          </a:p>
-          <a:p>
-            <a:pPr>
-              <a:spcBef>
-                <a:spcPts val="300"/>
-              </a:spcBef>
-              <a:defRPr sz="1150" b="0">
-                <a:solidFill>
-                  <a:srgbClr val="121E31"/>
-                </a:solidFill>
-              </a:defRPr>
-            </a:pPr>
-            <a:r>
-              <a:t>Verwacht je dat v2 slimmer speelt? Waarom wel of niet, gegeven dat v2 nu ook de stack meeweegt?</a:t>
+              <a:t>Elke rij is een echte vijfkaartshand. Let op het verschil tussen straat (waardes op volgorde) en flush (dezelfde kleur) — en straight flush, die allebei tegelijk is.</a:t>
             </a:r>
           </a:p>
         </p:txBody>
@@ -5701,7 +5164,7 @@
               </a:defRPr>
             </a:pPr>
             <a:r>
-              <a:t>DEEL 8 · 10 MIN · WAT JIJ DOET</a:t>
+              <a:t>DEEL 4 · 14 MIN · WAT JIJ DOET</a:t>
             </a:r>
           </a:p>
           <a:p>
@@ -5716,7 +5179,7 @@
               </a:defRPr>
             </a:pPr>
             <a:r>
-              <a:t>Lokaal testen tegen je eigen Week 1-bot</a:t>
+              <a:t>Handsterkte: wat wint er eigenlijk?</a:t>
             </a:r>
           </a:p>
         </p:txBody>
@@ -5799,7 +5262,22 @@
               </a:defRPr>
             </a:pPr>
             <a:r>
-              <a:t>•  Bedenk minstens vier testhanden waar je vermoedt dat ze het oneens zijn.</a:t>
+              <a:t>•  Laat de helper een paar handen beoordelen en kijk of je de uitkomst had voorspeld.</a:t>
+            </a:r>
+          </a:p>
+          <a:p>
+            <a:pPr>
+              <a:spcBef>
+                <a:spcPts val="1200"/>
+              </a:spcBef>
+              <a:defRPr sz="1400" b="0">
+                <a:solidFill>
+                  <a:srgbClr val="121E31"/>
+                </a:solidFill>
+              </a:defRPr>
+            </a:pPr>
+            <a:r>
+              <a:t>•  Let op: de helper klaagt niet als je dezelfde kaart twee keer gebruikt.</a:t>
             </a:r>
           </a:p>
         </p:txBody>
@@ -5897,7 +5375,7 @@
               </a:defRPr>
             </a:pPr>
             <a:r>
-              <a:t>Niets apart — maar het is je laatste check vóór je inlevert.</a:t>
+              <a:t>Niets — maar zonder dit is Deel 5 een black box.</a:t>
             </a:r>
           </a:p>
         </p:txBody>
@@ -5994,7 +5472,7 @@
               </a:defRPr>
             </a:pPr>
             <a:r>
-              <a:t>DEEL 9 · 15 MIN · HUISWERK · DE THEORIE</a:t>
+              <a:t>DEEL 5 · 32 MIN · DE THEORIE</a:t>
             </a:r>
           </a:p>
           <a:p>
@@ -6009,7 +5487,7 @@
               </a:defRPr>
             </a:pPr>
             <a:r>
-              <a:t>Plotly-grafiek van het Week 1-toernooi</a:t>
+              <a:t>Winkans: wat je ECHT hebt</a:t>
             </a:r>
           </a:p>
         </p:txBody>
@@ -6023,7 +5501,7 @@
         <p:spPr>
           <a:xfrm>
             <a:off x="731520" y="1600200"/>
-            <a:ext cx="10698480" cy="4480560"/>
+            <a:ext cx="6035040" cy="4480560"/>
           </a:xfrm>
           <a:prstGeom prst="roundRect">
             <a:avLst>
@@ -6071,7 +5549,7 @@
         <p:spPr>
           <a:xfrm>
             <a:off x="1005840" y="1828800"/>
-            <a:ext cx="10149840" cy="4023360"/>
+            <a:ext cx="5486400" cy="4023360"/>
           </a:xfrm>
           <a:prstGeom prst="rect">
             <a:avLst/>
@@ -6092,7 +5570,7 @@
               </a:defRPr>
             </a:pPr>
             <a:r>
-              <a:t>Kleur per bot</a:t>
+              <a:t>Monte Carlo</a:t>
             </a:r>
           </a:p>
           <a:p>
@@ -6107,7 +5585,7 @@
               </a:defRPr>
             </a:pPr>
             <a:r>
-              <a:t>Eén lijn per bot, kleur als onderscheid.</a:t>
+              <a:t>Speel je hand duizenden keren uit tegen willekeurige tegenstanders en een willekeurig bord, en tel hoe vaak je wint. Dezelfde aanpak als n_simulaties in het toernooi.</a:t>
             </a:r>
           </a:p>
           <a:p>
@@ -6122,7 +5600,7 @@
               </a:defRPr>
             </a:pPr>
             <a:r>
-              <a:t>Beperk je scope</a:t>
+              <a:t>Tegen hoeveel mensen?</a:t>
             </a:r>
           </a:p>
           <a:p>
@@ -6137,7 +5615,7 @@
               </a:defRPr>
             </a:pPr>
             <a:r>
-              <a:t>Eén tafel en één simulatie, anders krijg je een spaghetti-grafiek — daar ga je in Werkcollege 6 mee aan de slag.</a:t>
+              <a:t>Dit is het belangrijkste argument. De standaardwaarde is 1, maar je zit aan een tafel van zes.</a:t>
             </a:r>
           </a:p>
           <a:p>
@@ -6152,7 +5630,7 @@
               </a:defRPr>
             </a:pPr>
             <a:r>
-              <a:t>De vraag om te onthouden</a:t>
+              <a:t>Gemeten verschil</a:t>
             </a:r>
           </a:p>
           <a:p>
@@ -6167,11 +5645,65 @@
               </a:defRPr>
             </a:pPr>
             <a:r>
-              <a:t>Kun je zónder de legenda af te lezen zien wie er wint? Bewaar dat gevoel voor Werkcollege 6.</a:t>
-            </a:r>
-          </a:p>
-        </p:txBody>
-      </p:sp>
+              <a:t>A-A gaat van 85,3% naar 50,2% als je van vijf mensen moet winnen in plaats van één. 7-2 zakt van 33,9% naar 9,3%.</a:t>
+            </a:r>
+          </a:p>
+          <a:p>
+            <a:pPr>
+              <a:spcBef>
+                <a:spcPts val="1400"/>
+              </a:spcBef>
+              <a:defRPr sz="1400" b="1">
+                <a:solidFill>
+                  <a:srgbClr val="1B4D3E"/>
+                </a:solidFill>
+              </a:defRPr>
+            </a:pPr>
+            <a:r>
+              <a:t>Advies</a:t>
+            </a:r>
+          </a:p>
+          <a:p>
+            <a:pPr>
+              <a:spcBef>
+                <a:spcPts val="300"/>
+              </a:spcBef>
+              <a:defRPr sz="1150" b="0">
+                <a:solidFill>
+                  <a:srgbClr val="121E31"/>
+                </a:solidFill>
+              </a:defRPr>
+            </a:pPr>
+            <a:r>
+              <a:t>Ga uit van 5 tegenstanders, tenzij je weet dat het er minder zijn.</a:t>
+            </a:r>
+          </a:p>
+        </p:txBody>
+      </p:sp>
+      <p:pic>
+        <p:nvPicPr>
+          <p:cNvPr id="6" name="Picture 5" descr="winkans.png"/>
+          <p:cNvPicPr>
+            <a:picLocks noChangeAspect="1"/>
+          </p:cNvPicPr>
+          <p:nvPr/>
+        </p:nvPicPr>
+        <p:blipFill>
+          <a:blip r:embed="rId2"/>
+          <a:stretch>
+            <a:fillRect/>
+          </a:stretch>
+        </p:blipFill>
+        <p:spPr>
+          <a:xfrm>
+            <a:off x="7040880" y="2103120"/>
+            <a:ext cx="4389120" cy="2160560"/>
+          </a:xfrm>
+          <a:prstGeom prst="rect">
+            <a:avLst/>
+          </a:prstGeom>
+        </p:spPr>
+      </p:pic>
     </p:spTree>
   </p:cSld>
   <p:clrMapOvr>
@@ -6880,7 +6412,7 @@
               </a:defRPr>
             </a:pPr>
             <a:r>
-              <a:t>DEEL 9 · 15 MIN · WAT JIJ DOET</a:t>
+              <a:t>DEEL 5 · DE SPELREGELS</a:t>
             </a:r>
           </a:p>
           <a:p>
@@ -6895,59 +6427,35 @@
               </a:defRPr>
             </a:pPr>
             <a:r>
-              <a:t>Plotly-grafiek van het Week 1-toernooi</a:t>
-            </a:r>
-          </a:p>
-        </p:txBody>
-      </p:sp>
-      <p:sp>
-        <p:nvSpPr>
-          <p:cNvPr id="4" name="Rounded Rectangle 3"/>
-          <p:cNvSpPr/>
-          <p:nvPr/>
-        </p:nvSpPr>
-        <p:spPr>
-          <a:xfrm>
-            <a:off x="731520" y="1600200"/>
-            <a:ext cx="10698480" cy="2468880"/>
-          </a:xfrm>
-          <a:prstGeom prst="roundRect">
-            <a:avLst>
-              <a:gd name="adj" fmla="val 3000"/>
-            </a:avLst>
-          </a:prstGeom>
-          <a:solidFill>
-            <a:srgbClr val="FFFFFF"/>
-          </a:solidFill>
-          <a:ln w="9525">
-            <a:solidFill>
-              <a:srgbClr val="DCE1E6"/>
-            </a:solidFill>
-          </a:ln>
-          <a:effectLst/>
-        </p:spPr>
-        <p:style>
-          <a:lnRef idx="1">
-            <a:schemeClr val="accent1"/>
-          </a:lnRef>
-          <a:fillRef idx="3">
-            <a:schemeClr val="accent1"/>
-          </a:fillRef>
-          <a:effectRef idx="2">
-            <a:schemeClr val="accent1"/>
-          </a:effectRef>
-          <a:fontRef idx="minor">
-            <a:schemeClr val="lt1"/>
-          </a:fontRef>
-        </p:style>
-        <p:txBody>
-          <a:bodyPr rtlCol="0" anchor="ctr"/>
-          <a:lstStyle/>
-          <a:p>
-            <a:pPr algn="ctr"/>
-          </a:p>
-        </p:txBody>
-      </p:sp>
+              <a:t>Monte Carlo: wat is dat eigenlijk?</a:t>
+            </a:r>
+          </a:p>
+        </p:txBody>
+      </p:sp>
+      <p:pic>
+        <p:nvPicPr>
+          <p:cNvPr id="4" name="Picture 3" descr="montecarlo.png"/>
+          <p:cNvPicPr>
+            <a:picLocks noChangeAspect="1"/>
+          </p:cNvPicPr>
+          <p:nvPr/>
+        </p:nvPicPr>
+        <p:blipFill>
+          <a:blip r:embed="rId2"/>
+          <a:stretch>
+            <a:fillRect/>
+          </a:stretch>
+        </p:blipFill>
+        <p:spPr>
+          <a:xfrm>
+            <a:off x="1330741" y="1554480"/>
+            <a:ext cx="9530213" cy="4069080"/>
+          </a:xfrm>
+          <a:prstGeom prst="rect">
+            <a:avLst/>
+          </a:prstGeom>
+        </p:spPr>
+      </p:pic>
       <p:sp>
         <p:nvSpPr>
           <p:cNvPr id="5" name="TextBox 4"/>
@@ -6956,8 +6464,8 @@
         </p:nvSpPr>
         <p:spPr>
           <a:xfrm>
-            <a:off x="1005840" y="1828800"/>
-            <a:ext cx="10149840" cy="2011680"/>
+            <a:off x="1005840" y="5852160"/>
+            <a:ext cx="10149840" cy="777240"/>
           </a:xfrm>
           <a:prstGeom prst="rect">
             <a:avLst/>
@@ -6971,112 +6479,14 @@
           <a:lstStyle/>
           <a:p>
             <a:pPr>
-              <a:defRPr sz="1400" b="0">
+              <a:defRPr sz="1250" b="0">
                 <a:solidFill>
                   <a:srgbClr val="121E31"/>
                 </a:solidFill>
               </a:defRPr>
             </a:pPr>
             <a:r>
-              <a:t>•  Bouw de grafiek in Plotly express en geef hem een echte actietitel.</a:t>
-            </a:r>
-          </a:p>
-        </p:txBody>
-      </p:sp>
-      <p:sp>
-        <p:nvSpPr>
-          <p:cNvPr id="6" name="Rounded Rectangle 5"/>
-          <p:cNvSpPr/>
-          <p:nvPr/>
-        </p:nvSpPr>
-        <p:spPr>
-          <a:xfrm>
-            <a:off x="731520" y="4343400"/>
-            <a:ext cx="10698480" cy="1371600"/>
-          </a:xfrm>
-          <a:prstGeom prst="roundRect">
-            <a:avLst>
-              <a:gd name="adj" fmla="val 3000"/>
-            </a:avLst>
-          </a:prstGeom>
-          <a:solidFill>
-            <a:srgbClr val="F0F6F3"/>
-          </a:solidFill>
-          <a:ln w="9525">
-            <a:solidFill>
-              <a:srgbClr val="1B4D3E"/>
-            </a:solidFill>
-          </a:ln>
-          <a:effectLst/>
-        </p:spPr>
-        <p:style>
-          <a:lnRef idx="1">
-            <a:schemeClr val="accent1"/>
-          </a:lnRef>
-          <a:fillRef idx="3">
-            <a:schemeClr val="accent1"/>
-          </a:fillRef>
-          <a:effectRef idx="2">
-            <a:schemeClr val="accent1"/>
-          </a:effectRef>
-          <a:fontRef idx="minor">
-            <a:schemeClr val="lt1"/>
-          </a:fontRef>
-        </p:style>
-        <p:txBody>
-          <a:bodyPr rtlCol="0" anchor="ctr"/>
-          <a:lstStyle/>
-          <a:p>
-            <a:pPr algn="ctr"/>
-          </a:p>
-        </p:txBody>
-      </p:sp>
-      <p:sp>
-        <p:nvSpPr>
-          <p:cNvPr id="7" name="TextBox 6"/>
-          <p:cNvSpPr txBox="1"/>
-          <p:nvPr/>
-        </p:nvSpPr>
-        <p:spPr>
-          <a:xfrm>
-            <a:off x="1005840" y="4526280"/>
-            <a:ext cx="10149840" cy="1005840"/>
-          </a:xfrm>
-          <a:prstGeom prst="rect">
-            <a:avLst/>
-          </a:prstGeom>
-          <a:noFill/>
-        </p:spPr>
-        <p:txBody>
-          <a:bodyPr wrap="square">
-            <a:spAutoFit/>
-          </a:bodyPr>
-          <a:lstStyle/>
-          <a:p>
-            <a:pPr>
-              <a:defRPr sz="1000" b="1">
-                <a:solidFill>
-                  <a:srgbClr val="1B4D3E"/>
-                </a:solidFill>
-              </a:defRPr>
-            </a:pPr>
-            <a:r>
-              <a:t>WAT JE HIERVAN INLEVERT</a:t>
-            </a:r>
-          </a:p>
-          <a:p>
-            <a:pPr>
-              <a:spcBef>
-                <a:spcPts val="500"/>
-              </a:spcBef>
-              <a:defRPr sz="1500" b="1">
-                <a:solidFill>
-                  <a:srgbClr val="121E31"/>
-                </a:solidFill>
-              </a:defRPr>
-            </a:pPr>
-            <a:r>
-              <a:t>Een Plotly-grafiek met titel, x_label en y_label.</a:t>
+              <a:t>Als je een kans niet kunt uitrekenen, probeer je hem gewoon heel vaak. Tien worpen zeggen niets, duizend worpen komen dicht bij de waarheid. Meer proberen maakt het antwoord preciezer, nooit anders.</a:t>
             </a:r>
           </a:p>
         </p:txBody>
@@ -7173,7 +6583,7 @@
               </a:defRPr>
             </a:pPr>
             <a:r>
-              <a:t>DEEL 10 · 10 MIN · HUISWERK · DE THEORIE</a:t>
+              <a:t>DEEL 5 · DE SPELREGELS</a:t>
             </a:r>
           </a:p>
           <a:p>
@@ -7188,59 +6598,35 @@
               </a:defRPr>
             </a:pPr>
             <a:r>
-              <a:t>Inleveren via de API</a:t>
-            </a:r>
-          </a:p>
-        </p:txBody>
-      </p:sp>
-      <p:sp>
-        <p:nvSpPr>
-          <p:cNvPr id="4" name="Rounded Rectangle 3"/>
-          <p:cNvSpPr/>
-          <p:nvPr/>
-        </p:nvSpPr>
-        <p:spPr>
-          <a:xfrm>
-            <a:off x="731520" y="1600200"/>
-            <a:ext cx="10698480" cy="4480560"/>
-          </a:xfrm>
-          <a:prstGeom prst="roundRect">
-            <a:avLst>
-              <a:gd name="adj" fmla="val 3000"/>
-            </a:avLst>
-          </a:prstGeom>
-          <a:solidFill>
-            <a:srgbClr val="FFFFFF"/>
-          </a:solidFill>
-          <a:ln w="9525">
-            <a:solidFill>
-              <a:srgbClr val="DCE1E6"/>
-            </a:solidFill>
-          </a:ln>
-          <a:effectLst/>
-        </p:spPr>
-        <p:style>
-          <a:lnRef idx="1">
-            <a:schemeClr val="accent1"/>
-          </a:lnRef>
-          <a:fillRef idx="3">
-            <a:schemeClr val="accent1"/>
-          </a:fillRef>
-          <a:effectRef idx="2">
-            <a:schemeClr val="accent1"/>
-          </a:effectRef>
-          <a:fontRef idx="minor">
-            <a:schemeClr val="lt1"/>
-          </a:fontRef>
-        </p:style>
-        <p:txBody>
-          <a:bodyPr rtlCol="0" anchor="ctr"/>
-          <a:lstStyle/>
-          <a:p>
-            <a:pPr algn="ctr"/>
-          </a:p>
-        </p:txBody>
-      </p:sp>
+              <a:t>Zo komt je winkans tot stand</a:t>
+            </a:r>
+          </a:p>
+        </p:txBody>
+      </p:sp>
+      <p:pic>
+        <p:nvPicPr>
+          <p:cNvPr id="4" name="Picture 3" descr="montecarlo_poker.png"/>
+          <p:cNvPicPr>
+            <a:picLocks noChangeAspect="1"/>
+          </p:cNvPicPr>
+          <p:nvPr/>
+        </p:nvPicPr>
+        <p:blipFill>
+          <a:blip r:embed="rId2"/>
+          <a:stretch>
+            <a:fillRect/>
+          </a:stretch>
+        </p:blipFill>
+        <p:spPr>
+          <a:xfrm>
+            <a:off x="746607" y="1554480"/>
+            <a:ext cx="10698480" cy="3911551"/>
+          </a:xfrm>
+          <a:prstGeom prst="rect">
+            <a:avLst/>
+          </a:prstGeom>
+        </p:spPr>
+      </p:pic>
       <p:sp>
         <p:nvSpPr>
           <p:cNvPr id="5" name="TextBox 4"/>
@@ -7249,8 +6635,8 @@
         </p:nvSpPr>
         <p:spPr>
           <a:xfrm>
-            <a:off x="1005840" y="1828800"/>
-            <a:ext cx="10149840" cy="4023360"/>
+            <a:off x="1005840" y="5852160"/>
+            <a:ext cx="10149840" cy="777240"/>
           </a:xfrm>
           <a:prstGeom prst="rect">
             <a:avLst/>
@@ -7264,119 +6650,14 @@
           <a:lstStyle/>
           <a:p>
             <a:pPr>
-              <a:defRPr sz="1400" b="1">
-                <a:solidFill>
-                  <a:srgbClr val="1B4D3E"/>
-                </a:solidFill>
-              </a:defRPr>
-            </a:pPr>
-            <a:r>
-              <a:t>Drie stappen</a:t>
-            </a:r>
-          </a:p>
-          <a:p>
-            <a:pPr>
-              <a:spcBef>
-                <a:spcPts val="300"/>
-              </a:spcBef>
-              <a:defRPr sz="1150" b="0">
+              <a:defRPr sz="1250" b="0">
                 <a:solidFill>
                   <a:srgbClr val="121E31"/>
                 </a:solidFill>
               </a:defRPr>
             </a:pPr>
             <a:r>
-              <a:t>Je bot-bestand inlezen, je grafiek klaarzetten met export_chart_info(), en versturen met lever_in().</a:t>
-            </a:r>
-          </a:p>
-          <a:p>
-            <a:pPr>
-              <a:spcBef>
-                <a:spcPts val="1400"/>
-              </a:spcBef>
-              <a:defRPr sz="1400" b="1">
-                <a:solidFill>
-                  <a:srgbClr val="1B4D3E"/>
-                </a:solidFill>
-              </a:defRPr>
-            </a:pPr>
-            <a:r>
-              <a:t>Wat er verandert</a:t>
-            </a:r>
-          </a:p>
-          <a:p>
-            <a:pPr>
-              <a:spcBef>
-                <a:spcPts val="300"/>
-              </a:spcBef>
-              <a:defRPr sz="1150" b="0">
-                <a:solidFill>
-                  <a:srgbClr val="121E31"/>
-                </a:solidFill>
-              </a:defRPr>
-            </a:pPr>
-            <a:r>
-              <a:t>Je bot-functie heeft nu 2 parameters in plaats van 1. Verder verandert er niets. Vanaf Week 5 komen strategie en bluf_kans erbij.</a:t>
-            </a:r>
-          </a:p>
-          <a:p>
-            <a:pPr>
-              <a:spcBef>
-                <a:spcPts val="1400"/>
-              </a:spcBef>
-              <a:defRPr sz="1400" b="1">
-                <a:solidFill>
-                  <a:srgbClr val="1B4D3E"/>
-                </a:solidFill>
-              </a:defRPr>
-            </a:pPr>
-            <a:r>
-              <a:t>geldig: False?</a:t>
-            </a:r>
-          </a:p>
-          <a:p>
-            <a:pPr>
-              <a:spcBef>
-                <a:spcPts val="300"/>
-              </a:spcBef>
-              <a:defRPr sz="1150" b="0">
-                <a:solidFill>
-                  <a:srgbClr val="121E31"/>
-                </a:solidFill>
-              </a:defRPr>
-            </a:pPr>
-            <a:r>
-              <a:t>Lees resultaat['bot_check'] en resultaat['chart_check'] — daar staat in het Nederlands wat er mis is.</a:t>
-            </a:r>
-          </a:p>
-          <a:p>
-            <a:pPr>
-              <a:spcBef>
-                <a:spcPts val="1400"/>
-              </a:spcBef>
-              <a:defRPr sz="1400" b="1">
-                <a:solidFill>
-                  <a:srgbClr val="1B4D3E"/>
-                </a:solidFill>
-              </a:defRPr>
-            </a:pPr>
-            <a:r>
-              <a:t>Zo vaak als je wil</a:t>
-            </a:r>
-          </a:p>
-          <a:p>
-            <a:pPr>
-              <a:spcBef>
-                <a:spcPts val="300"/>
-              </a:spcBef>
-              <a:defRPr sz="1150" b="0">
-                <a:solidFill>
-                  <a:srgbClr val="121E31"/>
-                </a:solidFill>
-              </a:defRPr>
-            </a:pPr>
-            <a:r>
-              <a:t>Het systeem gebruikt altijd je laatste geldige inzending.</a:t>
+              <a:t>Precies wat schat_winkans() doet. Je hoeft het niet te bouwen — je moet weten wat het getal betekent en tegen hoeveel mensen het gerekend is. Hetzelfde idee als n_simulaties in het toernooi.</a:t>
             </a:r>
           </a:p>
         </p:txBody>
@@ -7473,7 +6754,7 @@
               </a:defRPr>
             </a:pPr>
             <a:r>
-              <a:t>DEEL 10 · 10 MIN · WAT JIJ DOET</a:t>
+              <a:t>DEEL 5 · 32 MIN · WAT JIJ DOET</a:t>
             </a:r>
           </a:p>
           <a:p>
@@ -7488,7 +6769,7 @@
               </a:defRPr>
             </a:pPr>
             <a:r>
-              <a:t>Inleveren via de API</a:t>
+              <a:t>Winkans: wat je ECHT hebt</a:t>
             </a:r>
           </a:p>
         </p:txBody>
@@ -7571,7 +6852,22 @@
               </a:defRPr>
             </a:pPr>
             <a:r>
-              <a:t>•  Lever in, lees het antwoord, en los op wat er nog niet klopt.</a:t>
+              <a:t>•  Test schat_winkans op bekende sterke en zwakke starthanden.</a:t>
+            </a:r>
+          </a:p>
+          <a:p>
+            <a:pPr>
+              <a:spcBef>
+                <a:spcPts val="1200"/>
+              </a:spcBef>
+              <a:defRPr sz="1400" b="0">
+                <a:solidFill>
+                  <a:srgbClr val="121E31"/>
+                </a:solidFill>
+              </a:defRPr>
+            </a:pPr>
+            <a:r>
+              <a:t>•  Draai dezelfde hand met tegenstanders=1 en tegenstanders=5 en leg het verschil uit.</a:t>
             </a:r>
           </a:p>
         </p:txBody>
@@ -7669,7 +6965,7 @@
               </a:defRPr>
             </a:pPr>
             <a:r>
-              <a:t>Een inzending met geldig: True.</a:t>
+              <a:t>Je bot gebruikt schat_winkans() met tegenstanders=5.</a:t>
             </a:r>
           </a:p>
         </p:txBody>
@@ -7766,7 +7062,7 @@
               </a:defRPr>
             </a:pPr>
             <a:r>
-              <a:t>WERKCOLLEGE 4 · SLOT</a:t>
+              <a:t>DEEL 6 · 16 MIN · DE THEORIE</a:t>
             </a:r>
           </a:p>
           <a:p>
@@ -7781,7 +7077,7 @@
               </a:defRPr>
             </a:pPr>
             <a:r>
-              <a:t>Wat lever je in, en wanneer?</a:t>
+              <a:t>Pot odds × winkans: een echte beslisregel</a:t>
             </a:r>
           </a:p>
         </p:txBody>
@@ -7795,7 +7091,7 @@
         <p:spPr>
           <a:xfrm>
             <a:off x="731520" y="1600200"/>
-            <a:ext cx="10698480" cy="2743200"/>
+            <a:ext cx="6035040" cy="4480560"/>
           </a:xfrm>
           <a:prstGeom prst="roundRect">
             <a:avLst>
@@ -7843,7 +7139,7 @@
         <p:spPr>
           <a:xfrm>
             <a:off x="1005840" y="1828800"/>
-            <a:ext cx="10149840" cy="2286000"/>
+            <a:ext cx="5486400" cy="4023360"/>
           </a:xfrm>
           <a:prstGeom prst="rect">
             <a:avLst/>
@@ -7857,14 +7153,14 @@
           <a:lstStyle/>
           <a:p>
             <a:pPr>
-              <a:defRPr sz="1600" b="1">
+              <a:defRPr sz="1400" b="1">
                 <a:solidFill>
                   <a:srgbClr val="1B4D3E"/>
                 </a:solidFill>
               </a:defRPr>
             </a:pPr>
             <a:r>
-              <a:t>wo 09:00</a:t>
+              <a:t>De twee helften</a:t>
             </a:r>
           </a:p>
           <a:p>
@@ -7872,29 +7168,29 @@
               <a:spcBef>
                 <a:spcPts val="300"/>
               </a:spcBef>
-              <a:defRPr sz="1300" b="0">
+              <a:defRPr sz="1150" b="0">
                 <a:solidFill>
                   <a:srgbClr val="121E31"/>
                 </a:solidFill>
               </a:defRPr>
             </a:pPr>
             <a:r>
-              <a:t>Een werkende Bot v2 — anders speel je niet mee in het toernooi van woensdag</a:t>
-            </a:r>
-          </a:p>
-          <a:p>
-            <a:pPr>
-              <a:spcBef>
-                <a:spcPts val="1600"/>
-              </a:spcBef>
-              <a:defRPr sz="1600" b="1">
+              <a:t>bereken_pot_odds(pot, inzet) zegt wat je MINIMAAL moet winnen. schat_winkans zegt wat je NAAR VERWACHTING wint.</a:t>
+            </a:r>
+          </a:p>
+          <a:p>
+            <a:pPr>
+              <a:spcBef>
+                <a:spcPts val="1400"/>
+              </a:spcBef>
+              <a:defRPr sz="1400" b="1">
                 <a:solidFill>
                   <a:srgbClr val="1B4D3E"/>
                 </a:solidFill>
               </a:defRPr>
             </a:pPr>
             <a:r>
-              <a:t>wo werkcollege</a:t>
+              <a:t>Rekenen, geen vuistregel</a:t>
             </a:r>
           </a:p>
           <a:p>
@@ -7902,29 +7198,29 @@
               <a:spcBef>
                 <a:spcPts val="300"/>
               </a:spcBef>
-              <a:defRPr sz="1300" b="0">
+              <a:defRPr sz="1150" b="0">
                 <a:solidFill>
                   <a:srgbClr val="121E31"/>
                 </a:solidFill>
               </a:defRPr>
             </a:pPr>
             <a:r>
-              <a:t>Je ziet de uitslag terug in Werkcollege 5</a:t>
-            </a:r>
-          </a:p>
-          <a:p>
-            <a:pPr>
-              <a:spcBef>
-                <a:spcPts val="1600"/>
-              </a:spcBef>
-              <a:defRPr sz="1600" b="1">
+              <a:t>Pot 100, je moet 20 bijleggen: 20/(100+20) ≈ 17% nodig.</a:t>
+            </a:r>
+          </a:p>
+          <a:p>
+            <a:pPr>
+              <a:spcBef>
+                <a:spcPts val="1400"/>
+              </a:spcBef>
+              <a:defRPr sz="1400" b="1">
                 <a:solidFill>
                   <a:srgbClr val="1B4D3E"/>
                 </a:solidFill>
               </a:defRPr>
             </a:pPr>
             <a:r>
-              <a:t>do 18:00</a:t>
+              <a:t>Waar het stil fout gaat</a:t>
             </a:r>
           </a:p>
           <a:p>
@@ -7932,41 +7228,109 @@
               <a:spcBef>
                 <a:spcPts val="300"/>
               </a:spcBef>
-              <a:defRPr sz="1300" b="0">
+              <a:defRPr sz="1150" b="0">
                 <a:solidFill>
                   <a:srgbClr val="121E31"/>
                 </a:solidFill>
               </a:defRPr>
             </a:pPr>
             <a:r>
-              <a:t>Je verbeterde Bot v2, plus de Plotly-grafiek, plus het onderwerp van Case 2</a:t>
-            </a:r>
-          </a:p>
-        </p:txBody>
-      </p:sp>
-      <p:sp>
-        <p:nvSpPr>
-          <p:cNvPr id="6" name="Rounded Rectangle 5"/>
+              <a:t>Vergelijk je een kop-op-kop-winkans met de prijs aan een tafel van zes, dan lijkt bijna elke hand de moeite waard. Je bot crasht niet — hij verliest alleen chips.</a:t>
+            </a:r>
+          </a:p>
+          <a:p>
+            <a:pPr>
+              <a:spcBef>
+                <a:spcPts val="1400"/>
+              </a:spcBef>
+              <a:defRPr sz="1400" b="1">
+                <a:solidFill>
+                  <a:srgbClr val="1B4D3E"/>
+                </a:solidFill>
+              </a:defRPr>
+            </a:pPr>
+            <a:r>
+              <a:t>Zelfde regel, ander advies</a:t>
+            </a:r>
+          </a:p>
+          <a:p>
+            <a:pPr>
+              <a:spcBef>
+                <a:spcPts val="300"/>
+              </a:spcBef>
+              <a:defRPr sz="1150" b="0">
+                <a:solidFill>
+                  <a:srgbClr val="121E31"/>
+                </a:solidFill>
+              </a:defRPr>
+            </a:pPr>
+            <a:r>
+              <a:t>Met 7-2: bij 1 tegenstander zegt de regel CALL, bij 5 tegenstanders FOLD.</a:t>
+            </a:r>
+          </a:p>
+        </p:txBody>
+      </p:sp>
+      <p:pic>
+        <p:nvPicPr>
+          <p:cNvPr id="6" name="Picture 5" descr="potodds.png"/>
+          <p:cNvPicPr>
+            <a:picLocks noChangeAspect="1"/>
+          </p:cNvPicPr>
+          <p:nvPr/>
+        </p:nvPicPr>
+        <p:blipFill>
+          <a:blip r:embed="rId2"/>
+          <a:stretch>
+            <a:fillRect/>
+          </a:stretch>
+        </p:blipFill>
+        <p:spPr>
+          <a:xfrm>
+            <a:off x="7040880" y="2103120"/>
+            <a:ext cx="4389120" cy="2163651"/>
+          </a:xfrm>
+          <a:prstGeom prst="rect">
+            <a:avLst/>
+          </a:prstGeom>
+        </p:spPr>
+      </p:pic>
+    </p:spTree>
+  </p:cSld>
+  <p:clrMapOvr>
+    <a:masterClrMapping/>
+  </p:clrMapOvr>
+</p:sld>
+</file>
+
+<file path=ppt/slides/slide24.xml><?xml version="1.0" encoding="utf-8"?>
+<p:sld xmlns:a="http://schemas.openxmlformats.org/drawingml/2006/main" xmlns:p="http://schemas.openxmlformats.org/presentationml/2006/main" xmlns:r="http://schemas.openxmlformats.org/officeDocument/2006/relationships">
+  <p:cSld>
+    <p:spTree>
+      <p:nvGrpSpPr>
+        <p:cNvPr id="1" name=""/>
+        <p:cNvGrpSpPr/>
+        <p:nvPr/>
+      </p:nvGrpSpPr>
+      <p:grpSpPr/>
+      <p:sp>
+        <p:nvSpPr>
+          <p:cNvPr id="2" name="Rectangle 1"/>
           <p:cNvSpPr/>
           <p:nvPr/>
         </p:nvSpPr>
         <p:spPr>
           <a:xfrm>
-            <a:off x="731520" y="4617720"/>
-            <a:ext cx="10698480" cy="1188720"/>
-          </a:xfrm>
-          <a:prstGeom prst="roundRect">
-            <a:avLst>
-              <a:gd name="adj" fmla="val 3000"/>
-            </a:avLst>
+            <a:off x="0" y="0"/>
+            <a:ext cx="12191695" cy="6858000"/>
+          </a:xfrm>
+          <a:prstGeom prst="rect">
+            <a:avLst/>
           </a:prstGeom>
           <a:solidFill>
-            <a:srgbClr val="FCF2F1"/>
+            <a:srgbClr val="F8F9FA"/>
           </a:solidFill>
-          <a:ln w="9525">
-            <a:solidFill>
-              <a:srgbClr val="B3261E"/>
-            </a:solidFill>
+          <a:ln>
+            <a:noFill/>
           </a:ln>
           <a:effectLst/>
         </p:spPr>
@@ -7994,14 +7358,14 @@
       </p:sp>
       <p:sp>
         <p:nvSpPr>
-          <p:cNvPr id="7" name="TextBox 6"/>
+          <p:cNvPr id="3" name="TextBox 2"/>
           <p:cNvSpPr txBox="1"/>
           <p:nvPr/>
         </p:nvSpPr>
         <p:spPr>
           <a:xfrm>
-            <a:off x="1005840" y="4800600"/>
-            <a:ext cx="10149840" cy="822960"/>
+            <a:off x="731520" y="384048"/>
+            <a:ext cx="10698480" cy="1005840"/>
           </a:xfrm>
           <a:prstGeom prst="rect">
             <a:avLst/>
@@ -8015,14 +7379,14 @@
           <a:lstStyle/>
           <a:p>
             <a:pPr>
-              <a:defRPr sz="1200" b="1">
-                <a:solidFill>
-                  <a:srgbClr val="B3261E"/>
-                </a:solidFill>
-              </a:defRPr>
-            </a:pPr>
-            <a:r>
-              <a:t>De deadline handhaaft zichzelf</a:t>
+              <a:defRPr sz="1000" b="1">
+                <a:solidFill>
+                  <a:srgbClr val="1B4D3E"/>
+                </a:solidFill>
+              </a:defRPr>
+            </a:pPr>
+            <a:r>
+              <a:t>DEEL 6 · 16 MIN · WAT JIJ DOET</a:t>
             </a:r>
           </a:p>
           <a:p>
@@ -8030,6 +7394,983 @@
               <a:spcBef>
                 <a:spcPts val="400"/>
               </a:spcBef>
+              <a:defRPr sz="2400" b="1">
+                <a:solidFill>
+                  <a:srgbClr val="121E31"/>
+                </a:solidFill>
+              </a:defRPr>
+            </a:pPr>
+            <a:r>
+              <a:t>Pot odds × winkans: een echte beslisregel</a:t>
+            </a:r>
+          </a:p>
+        </p:txBody>
+      </p:sp>
+      <p:sp>
+        <p:nvSpPr>
+          <p:cNvPr id="4" name="Rounded Rectangle 3"/>
+          <p:cNvSpPr/>
+          <p:nvPr/>
+        </p:nvSpPr>
+        <p:spPr>
+          <a:xfrm>
+            <a:off x="731520" y="1600200"/>
+            <a:ext cx="10698480" cy="2468880"/>
+          </a:xfrm>
+          <a:prstGeom prst="roundRect">
+            <a:avLst>
+              <a:gd name="adj" fmla="val 3000"/>
+            </a:avLst>
+          </a:prstGeom>
+          <a:solidFill>
+            <a:srgbClr val="FFFFFF"/>
+          </a:solidFill>
+          <a:ln w="9525">
+            <a:solidFill>
+              <a:srgbClr val="DCE1E6"/>
+            </a:solidFill>
+          </a:ln>
+          <a:effectLst/>
+        </p:spPr>
+        <p:style>
+          <a:lnRef idx="1">
+            <a:schemeClr val="accent1"/>
+          </a:lnRef>
+          <a:fillRef idx="3">
+            <a:schemeClr val="accent1"/>
+          </a:fillRef>
+          <a:effectRef idx="2">
+            <a:schemeClr val="accent1"/>
+          </a:effectRef>
+          <a:fontRef idx="minor">
+            <a:schemeClr val="lt1"/>
+          </a:fontRef>
+        </p:style>
+        <p:txBody>
+          <a:bodyPr rtlCol="0" anchor="ctr"/>
+          <a:lstStyle/>
+          <a:p>
+            <a:pPr algn="ctr"/>
+          </a:p>
+        </p:txBody>
+      </p:sp>
+      <p:sp>
+        <p:nvSpPr>
+          <p:cNvPr id="5" name="TextBox 4"/>
+          <p:cNvSpPr txBox="1"/>
+          <p:nvPr/>
+        </p:nvSpPr>
+        <p:spPr>
+          <a:xfrm>
+            <a:off x="1005840" y="1828800"/>
+            <a:ext cx="10149840" cy="2011680"/>
+          </a:xfrm>
+          <a:prstGeom prst="rect">
+            <a:avLst/>
+          </a:prstGeom>
+          <a:noFill/>
+        </p:spPr>
+        <p:txBody>
+          <a:bodyPr wrap="square">
+            <a:spAutoFit/>
+          </a:bodyPr>
+          <a:lstStyle/>
+          <a:p>
+            <a:pPr>
+              <a:defRPr sz="1400" b="0">
+                <a:solidFill>
+                  <a:srgbClr val="121E31"/>
+                </a:solidFill>
+              </a:defRPr>
+            </a:pPr>
+            <a:r>
+              <a:t>•  Reken de regel twee keer uit: met tegenstanders=1 en met tegenstanders=5.</a:t>
+            </a:r>
+          </a:p>
+          <a:p>
+            <a:pPr>
+              <a:spcBef>
+                <a:spcPts val="1200"/>
+              </a:spcBef>
+              <a:defRPr sz="1400" b="0">
+                <a:solidFill>
+                  <a:srgbClr val="121E31"/>
+                </a:solidFill>
+              </a:defRPr>
+            </a:pPr>
+            <a:r>
+              <a:t>•  Kies daarna je eigen drempel en verdedig hem.</a:t>
+            </a:r>
+          </a:p>
+        </p:txBody>
+      </p:sp>
+      <p:sp>
+        <p:nvSpPr>
+          <p:cNvPr id="6" name="Rounded Rectangle 5"/>
+          <p:cNvSpPr/>
+          <p:nvPr/>
+        </p:nvSpPr>
+        <p:spPr>
+          <a:xfrm>
+            <a:off x="731520" y="4343400"/>
+            <a:ext cx="10698480" cy="1371600"/>
+          </a:xfrm>
+          <a:prstGeom prst="roundRect">
+            <a:avLst>
+              <a:gd name="adj" fmla="val 3000"/>
+            </a:avLst>
+          </a:prstGeom>
+          <a:solidFill>
+            <a:srgbClr val="F0F6F3"/>
+          </a:solidFill>
+          <a:ln w="9525">
+            <a:solidFill>
+              <a:srgbClr val="1B4D3E"/>
+            </a:solidFill>
+          </a:ln>
+          <a:effectLst/>
+        </p:spPr>
+        <p:style>
+          <a:lnRef idx="1">
+            <a:schemeClr val="accent1"/>
+          </a:lnRef>
+          <a:fillRef idx="3">
+            <a:schemeClr val="accent1"/>
+          </a:fillRef>
+          <a:effectRef idx="2">
+            <a:schemeClr val="accent1"/>
+          </a:effectRef>
+          <a:fontRef idx="minor">
+            <a:schemeClr val="lt1"/>
+          </a:fontRef>
+        </p:style>
+        <p:txBody>
+          <a:bodyPr rtlCol="0" anchor="ctr"/>
+          <a:lstStyle/>
+          <a:p>
+            <a:pPr algn="ctr"/>
+          </a:p>
+        </p:txBody>
+      </p:sp>
+      <p:sp>
+        <p:nvSpPr>
+          <p:cNvPr id="7" name="TextBox 6"/>
+          <p:cNvSpPr txBox="1"/>
+          <p:nvPr/>
+        </p:nvSpPr>
+        <p:spPr>
+          <a:xfrm>
+            <a:off x="1005840" y="4526280"/>
+            <a:ext cx="10149840" cy="1005840"/>
+          </a:xfrm>
+          <a:prstGeom prst="rect">
+            <a:avLst/>
+          </a:prstGeom>
+          <a:noFill/>
+        </p:spPr>
+        <p:txBody>
+          <a:bodyPr wrap="square">
+            <a:spAutoFit/>
+          </a:bodyPr>
+          <a:lstStyle/>
+          <a:p>
+            <a:pPr>
+              <a:defRPr sz="1000" b="1">
+                <a:solidFill>
+                  <a:srgbClr val="1B4D3E"/>
+                </a:solidFill>
+              </a:defRPr>
+            </a:pPr>
+            <a:r>
+              <a:t>WAT JE HIERVAN INLEVERT</a:t>
+            </a:r>
+          </a:p>
+          <a:p>
+            <a:pPr>
+              <a:spcBef>
+                <a:spcPts val="500"/>
+              </a:spcBef>
+              <a:defRPr sz="1500" b="1">
+                <a:solidFill>
+                  <a:srgbClr val="121E31"/>
+                </a:solidFill>
+              </a:defRPr>
+            </a:pPr>
+            <a:r>
+              <a:t>Een beslisregel in je bot die beide getallen vergelijkt.</a:t>
+            </a:r>
+          </a:p>
+        </p:txBody>
+      </p:sp>
+    </p:spTree>
+  </p:cSld>
+  <p:clrMapOvr>
+    <a:masterClrMapping/>
+  </p:clrMapOvr>
+</p:sld>
+</file>
+
+<file path=ppt/slides/slide25.xml><?xml version="1.0" encoding="utf-8"?>
+<p:sld xmlns:a="http://schemas.openxmlformats.org/drawingml/2006/main" xmlns:p="http://schemas.openxmlformats.org/presentationml/2006/main" xmlns:r="http://schemas.openxmlformats.org/officeDocument/2006/relationships">
+  <p:cSld>
+    <p:spTree>
+      <p:nvGrpSpPr>
+        <p:cNvPr id="1" name=""/>
+        <p:cNvGrpSpPr/>
+        <p:nvPr/>
+      </p:nvGrpSpPr>
+      <p:grpSpPr/>
+      <p:sp>
+        <p:nvSpPr>
+          <p:cNvPr id="2" name="Rectangle 1"/>
+          <p:cNvSpPr/>
+          <p:nvPr/>
+        </p:nvSpPr>
+        <p:spPr>
+          <a:xfrm>
+            <a:off x="0" y="0"/>
+            <a:ext cx="12191695" cy="6858000"/>
+          </a:xfrm>
+          <a:prstGeom prst="rect">
+            <a:avLst/>
+          </a:prstGeom>
+          <a:solidFill>
+            <a:srgbClr val="F8F9FA"/>
+          </a:solidFill>
+          <a:ln>
+            <a:noFill/>
+          </a:ln>
+          <a:effectLst/>
+        </p:spPr>
+        <p:style>
+          <a:lnRef idx="1">
+            <a:schemeClr val="accent1"/>
+          </a:lnRef>
+          <a:fillRef idx="3">
+            <a:schemeClr val="accent1"/>
+          </a:fillRef>
+          <a:effectRef idx="2">
+            <a:schemeClr val="accent1"/>
+          </a:effectRef>
+          <a:fontRef idx="minor">
+            <a:schemeClr val="lt1"/>
+          </a:fontRef>
+        </p:style>
+        <p:txBody>
+          <a:bodyPr rtlCol="0" anchor="ctr"/>
+          <a:lstStyle/>
+          <a:p>
+            <a:pPr algn="ctr"/>
+          </a:p>
+        </p:txBody>
+      </p:sp>
+      <p:sp>
+        <p:nvSpPr>
+          <p:cNvPr id="3" name="TextBox 2"/>
+          <p:cNvSpPr txBox="1"/>
+          <p:nvPr/>
+        </p:nvSpPr>
+        <p:spPr>
+          <a:xfrm>
+            <a:off x="731520" y="384048"/>
+            <a:ext cx="10698480" cy="1005840"/>
+          </a:xfrm>
+          <a:prstGeom prst="rect">
+            <a:avLst/>
+          </a:prstGeom>
+          <a:noFill/>
+        </p:spPr>
+        <p:txBody>
+          <a:bodyPr wrap="square">
+            <a:spAutoFit/>
+          </a:bodyPr>
+          <a:lstStyle/>
+          <a:p>
+            <a:pPr>
+              <a:defRPr sz="1000" b="1">
+                <a:solidFill>
+                  <a:srgbClr val="1B4D3E"/>
+                </a:solidFill>
+              </a:defRPr>
+            </a:pPr>
+            <a:r>
+              <a:t>DEEL 7 · HUISWERK · DE THEORIE</a:t>
+            </a:r>
+          </a:p>
+          <a:p>
+            <a:pPr>
+              <a:spcBef>
+                <a:spcPts val="400"/>
+              </a:spcBef>
+              <a:defRPr sz="2400" b="1">
+                <a:solidFill>
+                  <a:srgbClr val="121E31"/>
+                </a:solidFill>
+              </a:defRPr>
+            </a:pPr>
+            <a:r>
+              <a:t>Bot v2 afmaken en verbeteren</a:t>
+            </a:r>
+          </a:p>
+        </p:txBody>
+      </p:sp>
+      <p:sp>
+        <p:nvSpPr>
+          <p:cNvPr id="4" name="Rounded Rectangle 3"/>
+          <p:cNvSpPr/>
+          <p:nvPr/>
+        </p:nvSpPr>
+        <p:spPr>
+          <a:xfrm>
+            <a:off x="731520" y="1600200"/>
+            <a:ext cx="10698480" cy="4480560"/>
+          </a:xfrm>
+          <a:prstGeom prst="roundRect">
+            <a:avLst>
+              <a:gd name="adj" fmla="val 3000"/>
+            </a:avLst>
+          </a:prstGeom>
+          <a:solidFill>
+            <a:srgbClr val="FFFFFF"/>
+          </a:solidFill>
+          <a:ln w="9525">
+            <a:solidFill>
+              <a:srgbClr val="DCE1E6"/>
+            </a:solidFill>
+          </a:ln>
+          <a:effectLst/>
+        </p:spPr>
+        <p:style>
+          <a:lnRef idx="1">
+            <a:schemeClr val="accent1"/>
+          </a:lnRef>
+          <a:fillRef idx="3">
+            <a:schemeClr val="accent1"/>
+          </a:fillRef>
+          <a:effectRef idx="2">
+            <a:schemeClr val="accent1"/>
+          </a:effectRef>
+          <a:fontRef idx="minor">
+            <a:schemeClr val="lt1"/>
+          </a:fontRef>
+        </p:style>
+        <p:txBody>
+          <a:bodyPr rtlCol="0" anchor="ctr"/>
+          <a:lstStyle/>
+          <a:p>
+            <a:pPr algn="ctr"/>
+          </a:p>
+        </p:txBody>
+      </p:sp>
+      <p:sp>
+        <p:nvSpPr>
+          <p:cNvPr id="5" name="TextBox 4"/>
+          <p:cNvSpPr txBox="1"/>
+          <p:nvPr/>
+        </p:nvSpPr>
+        <p:spPr>
+          <a:xfrm>
+            <a:off x="1005840" y="1828800"/>
+            <a:ext cx="10149840" cy="4023360"/>
+          </a:xfrm>
+          <a:prstGeom prst="rect">
+            <a:avLst/>
+          </a:prstGeom>
+          <a:noFill/>
+        </p:spPr>
+        <p:txBody>
+          <a:bodyPr wrap="square">
+            <a:spAutoFit/>
+          </a:bodyPr>
+          <a:lstStyle/>
+          <a:p>
+            <a:pPr>
+              <a:defRPr sz="1400" b="1">
+                <a:solidFill>
+                  <a:srgbClr val="1B4D3E"/>
+                </a:solidFill>
+              </a:defRPr>
+            </a:pPr>
+            <a:r>
+              <a:t>Geen invuloefening</a:t>
+            </a:r>
+          </a:p>
+          <a:p>
+            <a:pPr>
+              <a:spcBef>
+                <a:spcPts val="300"/>
+              </a:spcBef>
+              <a:defRPr sz="1150" b="0">
+                <a:solidFill>
+                  <a:srgbClr val="121E31"/>
+                </a:solidFill>
+              </a:defRPr>
+            </a:pPr>
+            <a:r>
+              <a:t>Er is geen goed antwoord dat wij achter de hand houden. Hier zit je zelf aan het stuur.</a:t>
+            </a:r>
+          </a:p>
+          <a:p>
+            <a:pPr>
+              <a:spcBef>
+                <a:spcPts val="1400"/>
+              </a:spcBef>
+              <a:defRPr sz="1400" b="1">
+                <a:solidFill>
+                  <a:srgbClr val="1B4D3E"/>
+                </a:solidFill>
+              </a:defRPr>
+            </a:pPr>
+            <a:r>
+              <a:t>Waar je tijd in gaat zitten</a:t>
+            </a:r>
+          </a:p>
+          <a:p>
+            <a:pPr>
+              <a:spcBef>
+                <a:spcPts val="300"/>
+              </a:spcBef>
+              <a:defRPr sz="1150" b="0">
+                <a:solidFill>
+                  <a:srgbClr val="121E31"/>
+                </a:solidFill>
+              </a:defRPr>
+            </a:pPr>
+            <a:r>
+              <a:t>kies_actie uitbreiden met ronde, pot en inzet_om_te_callen: 1–2 uur. De winkans-regel inbouwen en drempels afstemmen: 1–2 uur. Een eigen testset bouwen: 1–2 uur. Reageren op de uitslag: 1–2 uur.</a:t>
+            </a:r>
+          </a:p>
+          <a:p>
+            <a:pPr>
+              <a:spcBef>
+                <a:spcPts val="1400"/>
+              </a:spcBef>
+              <a:defRPr sz="1400" b="1">
+                <a:solidFill>
+                  <a:srgbClr val="1B4D3E"/>
+                </a:solidFill>
+              </a:defRPr>
+            </a:pPr>
+            <a:r>
+              <a:t>Twee momenten</a:t>
+            </a:r>
+          </a:p>
+          <a:p>
+            <a:pPr>
+              <a:spcBef>
+                <a:spcPts val="300"/>
+              </a:spcBef>
+              <a:defRPr sz="1150" b="0">
+                <a:solidFill>
+                  <a:srgbClr val="121E31"/>
+                </a:solidFill>
+              </a:defRPr>
+            </a:pPr>
+            <a:r>
+              <a:t>Woensdag 09:00 een werkende bot voor het toernooi. Donderdag 18:00 je verbeterde versie.</a:t>
+            </a:r>
+          </a:p>
+        </p:txBody>
+      </p:sp>
+    </p:spTree>
+  </p:cSld>
+  <p:clrMapOvr>
+    <a:masterClrMapping/>
+  </p:clrMapOvr>
+</p:sld>
+</file>
+
+<file path=ppt/slides/slide26.xml><?xml version="1.0" encoding="utf-8"?>
+<p:sld xmlns:a="http://schemas.openxmlformats.org/drawingml/2006/main" xmlns:p="http://schemas.openxmlformats.org/presentationml/2006/main" xmlns:r="http://schemas.openxmlformats.org/officeDocument/2006/relationships">
+  <p:cSld>
+    <p:spTree>
+      <p:nvGrpSpPr>
+        <p:cNvPr id="1" name=""/>
+        <p:cNvGrpSpPr/>
+        <p:nvPr/>
+      </p:nvGrpSpPr>
+      <p:grpSpPr/>
+      <p:sp>
+        <p:nvSpPr>
+          <p:cNvPr id="2" name="Rectangle 1"/>
+          <p:cNvSpPr/>
+          <p:nvPr/>
+        </p:nvSpPr>
+        <p:spPr>
+          <a:xfrm>
+            <a:off x="0" y="0"/>
+            <a:ext cx="12191695" cy="6858000"/>
+          </a:xfrm>
+          <a:prstGeom prst="rect">
+            <a:avLst/>
+          </a:prstGeom>
+          <a:solidFill>
+            <a:srgbClr val="F8F9FA"/>
+          </a:solidFill>
+          <a:ln>
+            <a:noFill/>
+          </a:ln>
+          <a:effectLst/>
+        </p:spPr>
+        <p:style>
+          <a:lnRef idx="1">
+            <a:schemeClr val="accent1"/>
+          </a:lnRef>
+          <a:fillRef idx="3">
+            <a:schemeClr val="accent1"/>
+          </a:fillRef>
+          <a:effectRef idx="2">
+            <a:schemeClr val="accent1"/>
+          </a:effectRef>
+          <a:fontRef idx="minor">
+            <a:schemeClr val="lt1"/>
+          </a:fontRef>
+        </p:style>
+        <p:txBody>
+          <a:bodyPr rtlCol="0" anchor="ctr"/>
+          <a:lstStyle/>
+          <a:p>
+            <a:pPr algn="ctr"/>
+          </a:p>
+        </p:txBody>
+      </p:sp>
+      <p:sp>
+        <p:nvSpPr>
+          <p:cNvPr id="3" name="TextBox 2"/>
+          <p:cNvSpPr txBox="1"/>
+          <p:nvPr/>
+        </p:nvSpPr>
+        <p:spPr>
+          <a:xfrm>
+            <a:off x="731520" y="384048"/>
+            <a:ext cx="10698480" cy="1005840"/>
+          </a:xfrm>
+          <a:prstGeom prst="rect">
+            <a:avLst/>
+          </a:prstGeom>
+          <a:noFill/>
+        </p:spPr>
+        <p:txBody>
+          <a:bodyPr wrap="square">
+            <a:spAutoFit/>
+          </a:bodyPr>
+          <a:lstStyle/>
+          <a:p>
+            <a:pPr>
+              <a:defRPr sz="1000" b="1">
+                <a:solidFill>
+                  <a:srgbClr val="1B4D3E"/>
+                </a:solidFill>
+              </a:defRPr>
+            </a:pPr>
+            <a:r>
+              <a:t>DEEL 7 · 4 TOT 8 UUR</a:t>
+            </a:r>
+          </a:p>
+          <a:p>
+            <a:pPr>
+              <a:spcBef>
+                <a:spcPts val="400"/>
+              </a:spcBef>
+              <a:defRPr sz="2400" b="1">
+                <a:solidFill>
+                  <a:srgbClr val="121E31"/>
+                </a:solidFill>
+              </a:defRPr>
+            </a:pPr>
+            <a:r>
+              <a:t>Wat kun je meenemen in Bot v2?</a:t>
+            </a:r>
+          </a:p>
+        </p:txBody>
+      </p:sp>
+      <p:sp>
+        <p:nvSpPr>
+          <p:cNvPr id="4" name="Rounded Rectangle 3"/>
+          <p:cNvSpPr/>
+          <p:nvPr/>
+        </p:nvSpPr>
+        <p:spPr>
+          <a:xfrm>
+            <a:off x="731520" y="1572768"/>
+            <a:ext cx="5257800" cy="3566160"/>
+          </a:xfrm>
+          <a:prstGeom prst="roundRect">
+            <a:avLst>
+              <a:gd name="adj" fmla="val 3000"/>
+            </a:avLst>
+          </a:prstGeom>
+          <a:solidFill>
+            <a:srgbClr val="FFFFFF"/>
+          </a:solidFill>
+          <a:ln w="9525">
+            <a:solidFill>
+              <a:srgbClr val="DCE1E6"/>
+            </a:solidFill>
+          </a:ln>
+          <a:effectLst/>
+        </p:spPr>
+        <p:style>
+          <a:lnRef idx="1">
+            <a:schemeClr val="accent1"/>
+          </a:lnRef>
+          <a:fillRef idx="3">
+            <a:schemeClr val="accent1"/>
+          </a:fillRef>
+          <a:effectRef idx="2">
+            <a:schemeClr val="accent1"/>
+          </a:effectRef>
+          <a:fontRef idx="minor">
+            <a:schemeClr val="lt1"/>
+          </a:fontRef>
+        </p:style>
+        <p:txBody>
+          <a:bodyPr rtlCol="0" anchor="ctr"/>
+          <a:lstStyle/>
+          <a:p>
+            <a:pPr algn="ctr"/>
+          </a:p>
+        </p:txBody>
+      </p:sp>
+      <p:sp>
+        <p:nvSpPr>
+          <p:cNvPr id="5" name="TextBox 4"/>
+          <p:cNvSpPr txBox="1"/>
+          <p:nvPr/>
+        </p:nvSpPr>
+        <p:spPr>
+          <a:xfrm>
+            <a:off x="1005840" y="1810512"/>
+            <a:ext cx="4709160" cy="3108960"/>
+          </a:xfrm>
+          <a:prstGeom prst="rect">
+            <a:avLst/>
+          </a:prstGeom>
+          <a:noFill/>
+        </p:spPr>
+        <p:txBody>
+          <a:bodyPr wrap="square">
+            <a:spAutoFit/>
+          </a:bodyPr>
+          <a:lstStyle/>
+          <a:p>
+            <a:pPr>
+              <a:defRPr sz="1400" b="1">
+                <a:solidFill>
+                  <a:srgbClr val="1B4D3E"/>
+                </a:solidFill>
+              </a:defRPr>
+            </a:pPr>
+            <a:r>
+              <a:t>1.  Andere drempels per straat</a:t>
+            </a:r>
+          </a:p>
+          <a:p>
+            <a:pPr>
+              <a:spcBef>
+                <a:spcPts val="300"/>
+              </a:spcBef>
+              <a:defRPr sz="1100" b="0">
+                <a:solidFill>
+                  <a:srgbClr val="121E31"/>
+                </a:solidFill>
+              </a:defRPr>
+            </a:pPr>
+            <a:r>
+              <a:t>Preflop weet je alleen je twee kaarten; op de river ligt alles op tafel.</a:t>
+            </a:r>
+          </a:p>
+          <a:p>
+            <a:pPr>
+              <a:spcBef>
+                <a:spcPts val="1600"/>
+              </a:spcBef>
+              <a:defRPr sz="1400" b="1">
+                <a:solidFill>
+                  <a:srgbClr val="1B4D3E"/>
+                </a:solidFill>
+              </a:defRPr>
+            </a:pPr>
+            <a:r>
+              <a:t>2.  Je winkans-grens</a:t>
+            </a:r>
+          </a:p>
+          <a:p>
+            <a:pPr>
+              <a:spcBef>
+                <a:spcPts val="300"/>
+              </a:spcBef>
+              <a:defRPr sz="1100" b="0">
+                <a:solidFill>
+                  <a:srgbClr val="121E31"/>
+                </a:solidFill>
+              </a:defRPr>
+            </a:pPr>
+            <a:r>
+              <a:t>Vanaf welke winkans call je, vanaf welke raise je? Een getal dat je kunt meten.</a:t>
+            </a:r>
+          </a:p>
+          <a:p>
+            <a:pPr>
+              <a:spcBef>
+                <a:spcPts val="1600"/>
+              </a:spcBef>
+              <a:defRPr sz="1400" b="1">
+                <a:solidFill>
+                  <a:srgbClr val="1B4D3E"/>
+                </a:solidFill>
+              </a:defRPr>
+            </a:pPr>
+            <a:r>
+              <a:t>3.  De pot-odds-regel</a:t>
+            </a:r>
+          </a:p>
+          <a:p>
+            <a:pPr>
+              <a:spcBef>
+                <a:spcPts val="300"/>
+              </a:spcBef>
+              <a:defRPr sz="1100" b="0">
+                <a:solidFill>
+                  <a:srgbClr val="121E31"/>
+                </a:solidFill>
+              </a:defRPr>
+            </a:pPr>
+            <a:r>
+              <a:t>Wiskundig correct maar naief: hij foldt bijna nooit preflop. Wil je dat?</a:t>
+            </a:r>
+          </a:p>
+        </p:txBody>
+      </p:sp>
+      <p:sp>
+        <p:nvSpPr>
+          <p:cNvPr id="6" name="Rounded Rectangle 5"/>
+          <p:cNvSpPr/>
+          <p:nvPr/>
+        </p:nvSpPr>
+        <p:spPr>
+          <a:xfrm>
+            <a:off x="6263640" y="1572768"/>
+            <a:ext cx="5257800" cy="3566160"/>
+          </a:xfrm>
+          <a:prstGeom prst="roundRect">
+            <a:avLst>
+              <a:gd name="adj" fmla="val 3000"/>
+            </a:avLst>
+          </a:prstGeom>
+          <a:solidFill>
+            <a:srgbClr val="FFFFFF"/>
+          </a:solidFill>
+          <a:ln w="9525">
+            <a:solidFill>
+              <a:srgbClr val="DCE1E6"/>
+            </a:solidFill>
+          </a:ln>
+          <a:effectLst/>
+        </p:spPr>
+        <p:style>
+          <a:lnRef idx="1">
+            <a:schemeClr val="accent1"/>
+          </a:lnRef>
+          <a:fillRef idx="3">
+            <a:schemeClr val="accent1"/>
+          </a:fillRef>
+          <a:effectRef idx="2">
+            <a:schemeClr val="accent1"/>
+          </a:effectRef>
+          <a:fontRef idx="minor">
+            <a:schemeClr val="lt1"/>
+          </a:fontRef>
+        </p:style>
+        <p:txBody>
+          <a:bodyPr rtlCol="0" anchor="ctr"/>
+          <a:lstStyle/>
+          <a:p>
+            <a:pPr algn="ctr"/>
+          </a:p>
+        </p:txBody>
+      </p:sp>
+      <p:sp>
+        <p:nvSpPr>
+          <p:cNvPr id="7" name="TextBox 6"/>
+          <p:cNvSpPr txBox="1"/>
+          <p:nvPr/>
+        </p:nvSpPr>
+        <p:spPr>
+          <a:xfrm>
+            <a:off x="6537960" y="1810512"/>
+            <a:ext cx="4709160" cy="3108960"/>
+          </a:xfrm>
+          <a:prstGeom prst="rect">
+            <a:avLst/>
+          </a:prstGeom>
+          <a:noFill/>
+        </p:spPr>
+        <p:txBody>
+          <a:bodyPr wrap="square">
+            <a:spAutoFit/>
+          </a:bodyPr>
+          <a:lstStyle/>
+          <a:p>
+            <a:pPr>
+              <a:defRPr sz="1400" b="1">
+                <a:solidFill>
+                  <a:srgbClr val="1B4D3E"/>
+                </a:solidFill>
+              </a:defRPr>
+            </a:pPr>
+            <a:r>
+              <a:t>4.  Stack-bewustzijn</a:t>
+            </a:r>
+          </a:p>
+          <a:p>
+            <a:pPr>
+              <a:spcBef>
+                <a:spcPts val="300"/>
+              </a:spcBef>
+              <a:defRPr sz="1100" b="0">
+                <a:solidFill>
+                  <a:srgbClr val="121E31"/>
+                </a:solidFill>
+              </a:defRPr>
+            </a:pPr>
+            <a:r>
+              <a:t>Met 90 chips speel je anders dan met 900. Wanneer is all_in een plan?</a:t>
+            </a:r>
+          </a:p>
+          <a:p>
+            <a:pPr>
+              <a:spcBef>
+                <a:spcPts val="1600"/>
+              </a:spcBef>
+              <a:defRPr sz="1400" b="1">
+                <a:solidFill>
+                  <a:srgbClr val="1B4D3E"/>
+                </a:solidFill>
+              </a:defRPr>
+            </a:pPr>
+            <a:r>
+              <a:t>5.  Je twee raises per straat</a:t>
+            </a:r>
+          </a:p>
+          <a:p>
+            <a:pPr>
+              <a:spcBef>
+                <a:spcPts val="300"/>
+              </a:spcBef>
+              <a:defRPr sz="1100" b="0">
+                <a:solidFill>
+                  <a:srgbClr val="121E31"/>
+                </a:solidFill>
+              </a:defRPr>
+            </a:pPr>
+            <a:r>
+              <a:t>Meteen druk zetten, of pas als je het bord ziet? En pak je terug?</a:t>
+            </a:r>
+          </a:p>
+          <a:p>
+            <a:pPr>
+              <a:spcBef>
+                <a:spcPts val="1600"/>
+              </a:spcBef>
+              <a:defRPr sz="1400" b="1">
+                <a:solidFill>
+                  <a:srgbClr val="1B4D3E"/>
+                </a:solidFill>
+              </a:defRPr>
+            </a:pPr>
+            <a:r>
+              <a:t>6.  Hoeveel je inzet</a:t>
+            </a:r>
+          </a:p>
+          <a:p>
+            <a:pPr>
+              <a:spcBef>
+                <a:spcPts val="300"/>
+              </a:spcBef>
+              <a:defRPr sz="1100" b="0">
+                <a:solidFill>
+                  <a:srgbClr val="121E31"/>
+                </a:solidFill>
+              </a:defRPr>
+            </a:pPr>
+            <a:r>
+              <a:t>raise is het minimum, grote_raise zet naar 200. Wanneer is dat het waard?</a:t>
+            </a:r>
+          </a:p>
+        </p:txBody>
+      </p:sp>
+      <p:sp>
+        <p:nvSpPr>
+          <p:cNvPr id="8" name="Rounded Rectangle 7"/>
+          <p:cNvSpPr/>
+          <p:nvPr/>
+        </p:nvSpPr>
+        <p:spPr>
+          <a:xfrm>
+            <a:off x="731520" y="5394960"/>
+            <a:ext cx="10698480" cy="868680"/>
+          </a:xfrm>
+          <a:prstGeom prst="roundRect">
+            <a:avLst>
+              <a:gd name="adj" fmla="val 3000"/>
+            </a:avLst>
+          </a:prstGeom>
+          <a:solidFill>
+            <a:srgbClr val="F0F6F3"/>
+          </a:solidFill>
+          <a:ln w="9525">
+            <a:solidFill>
+              <a:srgbClr val="1B4D3E"/>
+            </a:solidFill>
+          </a:ln>
+          <a:effectLst/>
+        </p:spPr>
+        <p:style>
+          <a:lnRef idx="1">
+            <a:schemeClr val="accent1"/>
+          </a:lnRef>
+          <a:fillRef idx="3">
+            <a:schemeClr val="accent1"/>
+          </a:fillRef>
+          <a:effectRef idx="2">
+            <a:schemeClr val="accent1"/>
+          </a:effectRef>
+          <a:fontRef idx="minor">
+            <a:schemeClr val="lt1"/>
+          </a:fontRef>
+        </p:style>
+        <p:txBody>
+          <a:bodyPr rtlCol="0" anchor="ctr"/>
+          <a:lstStyle/>
+          <a:p>
+            <a:pPr algn="ctr"/>
+          </a:p>
+        </p:txBody>
+      </p:sp>
+      <p:sp>
+        <p:nvSpPr>
+          <p:cNvPr id="9" name="TextBox 8"/>
+          <p:cNvSpPr txBox="1"/>
+          <p:nvPr/>
+        </p:nvSpPr>
+        <p:spPr>
+          <a:xfrm>
+            <a:off x="1005840" y="5559552"/>
+            <a:ext cx="10149840" cy="640080"/>
+          </a:xfrm>
+          <a:prstGeom prst="rect">
+            <a:avLst/>
+          </a:prstGeom>
+          <a:noFill/>
+        </p:spPr>
+        <p:txBody>
+          <a:bodyPr wrap="square">
+            <a:spAutoFit/>
+          </a:bodyPr>
+          <a:lstStyle/>
+          <a:p>
+            <a:pPr>
               <a:defRPr sz="1200" b="0">
                 <a:solidFill>
                   <a:srgbClr val="121E31"/>
@@ -8037,7 +8378,1653 @@
               </a:defRPr>
             </a:pPr>
             <a:r>
-              <a:t>Een toernooi speelt met de bots die er op dat moment zijn. Lever je woensdagmiddag in, dan doe je niet mee aan het woensdagtoernooi.</a:t>
+              <a:t>Je hoeft ze niet alle zes te doen. Kies er twee of drie die bij jouw idee van een goede bot passen, en werk die dan ook echt uit.</a:t>
+            </a:r>
+          </a:p>
+        </p:txBody>
+      </p:sp>
+    </p:spTree>
+  </p:cSld>
+  <p:clrMapOvr>
+    <a:masterClrMapping/>
+  </p:clrMapOvr>
+</p:sld>
+</file>
+
+<file path=ppt/slides/slide27.xml><?xml version="1.0" encoding="utf-8"?>
+<p:sld xmlns:a="http://schemas.openxmlformats.org/drawingml/2006/main" xmlns:p="http://schemas.openxmlformats.org/presentationml/2006/main" xmlns:r="http://schemas.openxmlformats.org/officeDocument/2006/relationships">
+  <p:cSld>
+    <p:spTree>
+      <p:nvGrpSpPr>
+        <p:cNvPr id="1" name=""/>
+        <p:cNvGrpSpPr/>
+        <p:nvPr/>
+      </p:nvGrpSpPr>
+      <p:grpSpPr/>
+      <p:sp>
+        <p:nvSpPr>
+          <p:cNvPr id="2" name="Rectangle 1"/>
+          <p:cNvSpPr/>
+          <p:nvPr/>
+        </p:nvSpPr>
+        <p:spPr>
+          <a:xfrm>
+            <a:off x="0" y="0"/>
+            <a:ext cx="12191695" cy="6858000"/>
+          </a:xfrm>
+          <a:prstGeom prst="rect">
+            <a:avLst/>
+          </a:prstGeom>
+          <a:solidFill>
+            <a:srgbClr val="F8F9FA"/>
+          </a:solidFill>
+          <a:ln>
+            <a:noFill/>
+          </a:ln>
+          <a:effectLst/>
+        </p:spPr>
+        <p:style>
+          <a:lnRef idx="1">
+            <a:schemeClr val="accent1"/>
+          </a:lnRef>
+          <a:fillRef idx="3">
+            <a:schemeClr val="accent1"/>
+          </a:fillRef>
+          <a:effectRef idx="2">
+            <a:schemeClr val="accent1"/>
+          </a:effectRef>
+          <a:fontRef idx="minor">
+            <a:schemeClr val="lt1"/>
+          </a:fontRef>
+        </p:style>
+        <p:txBody>
+          <a:bodyPr rtlCol="0" anchor="ctr"/>
+          <a:lstStyle/>
+          <a:p>
+            <a:pPr algn="ctr"/>
+          </a:p>
+        </p:txBody>
+      </p:sp>
+      <p:sp>
+        <p:nvSpPr>
+          <p:cNvPr id="3" name="TextBox 2"/>
+          <p:cNvSpPr txBox="1"/>
+          <p:nvPr/>
+        </p:nvSpPr>
+        <p:spPr>
+          <a:xfrm>
+            <a:off x="731520" y="384048"/>
+            <a:ext cx="10698480" cy="1005840"/>
+          </a:xfrm>
+          <a:prstGeom prst="rect">
+            <a:avLst/>
+          </a:prstGeom>
+          <a:noFill/>
+        </p:spPr>
+        <p:txBody>
+          <a:bodyPr wrap="square">
+            <a:spAutoFit/>
+          </a:bodyPr>
+          <a:lstStyle/>
+          <a:p>
+            <a:pPr>
+              <a:defRPr sz="1000" b="1">
+                <a:solidFill>
+                  <a:srgbClr val="1B4D3E"/>
+                </a:solidFill>
+              </a:defRPr>
+            </a:pPr>
+            <a:r>
+              <a:t>DEEL 7 · IN CODE</a:t>
+            </a:r>
+          </a:p>
+          <a:p>
+            <a:pPr>
+              <a:spcBef>
+                <a:spcPts val="400"/>
+              </a:spcBef>
+              <a:defRPr sz="2400" b="1">
+                <a:solidFill>
+                  <a:srgbClr val="121E31"/>
+                </a:solidFill>
+              </a:defRPr>
+            </a:pPr>
+            <a:r>
+              <a:t>Hoe dat er los in code uitziet</a:t>
+            </a:r>
+          </a:p>
+        </p:txBody>
+      </p:sp>
+      <p:sp>
+        <p:nvSpPr>
+          <p:cNvPr id="4" name="Rounded Rectangle 3"/>
+          <p:cNvSpPr/>
+          <p:nvPr/>
+        </p:nvSpPr>
+        <p:spPr>
+          <a:xfrm>
+            <a:off x="731520" y="1572768"/>
+            <a:ext cx="5257800" cy="1185672"/>
+          </a:xfrm>
+          <a:prstGeom prst="roundRect">
+            <a:avLst>
+              <a:gd name="adj" fmla="val 3000"/>
+            </a:avLst>
+          </a:prstGeom>
+          <a:solidFill>
+            <a:srgbClr val="121E31"/>
+          </a:solidFill>
+          <a:ln w="9525">
+            <a:solidFill>
+              <a:srgbClr val="1B4D3E"/>
+            </a:solidFill>
+          </a:ln>
+          <a:effectLst/>
+        </p:spPr>
+        <p:style>
+          <a:lnRef idx="1">
+            <a:schemeClr val="accent1"/>
+          </a:lnRef>
+          <a:fillRef idx="3">
+            <a:schemeClr val="accent1"/>
+          </a:fillRef>
+          <a:effectRef idx="2">
+            <a:schemeClr val="accent1"/>
+          </a:effectRef>
+          <a:fontRef idx="minor">
+            <a:schemeClr val="lt1"/>
+          </a:fontRef>
+        </p:style>
+        <p:txBody>
+          <a:bodyPr rtlCol="0" anchor="ctr"/>
+          <a:lstStyle/>
+          <a:p>
+            <a:pPr algn="ctr"/>
+          </a:p>
+        </p:txBody>
+      </p:sp>
+      <p:sp>
+        <p:nvSpPr>
+          <p:cNvPr id="5" name="TextBox 4"/>
+          <p:cNvSpPr txBox="1"/>
+          <p:nvPr/>
+        </p:nvSpPr>
+        <p:spPr>
+          <a:xfrm>
+            <a:off x="932688" y="1664208"/>
+            <a:ext cx="4855464" cy="1002792"/>
+          </a:xfrm>
+          <a:prstGeom prst="rect">
+            <a:avLst/>
+          </a:prstGeom>
+          <a:noFill/>
+        </p:spPr>
+        <p:txBody>
+          <a:bodyPr wrap="square">
+            <a:spAutoFit/>
+          </a:bodyPr>
+          <a:lstStyle/>
+          <a:p>
+            <a:pPr>
+              <a:defRPr sz="1000" b="1">
+                <a:solidFill>
+                  <a:srgbClr val="4FC3A1"/>
+                </a:solidFill>
+              </a:defRPr>
+            </a:pPr>
+            <a:r>
+              <a:t>1 · drempel per straat</a:t>
+            </a:r>
+          </a:p>
+          <a:p>
+            <a:pPr>
+              <a:spcBef>
+                <a:spcPts val="500"/>
+              </a:spcBef>
+              <a:defRPr sz="900">
+                <a:solidFill>
+                  <a:srgbClr val="E8EEF4"/>
+                </a:solidFill>
+                <a:latin typeface="Consolas"/>
+              </a:defRPr>
+            </a:pPr>
+            <a:r>
+              <a:t>DREMPELS = {"preflop": 45, "flop": 40,</a:t>
+            </a:r>
+          </a:p>
+          <a:p>
+            <a:pPr>
+              <a:defRPr sz="900">
+                <a:solidFill>
+                  <a:srgbClr val="E8EEF4"/>
+                </a:solidFill>
+                <a:latin typeface="Consolas"/>
+              </a:defRPr>
+            </a:pPr>
+            <a:r>
+              <a:t>            "turn": 35, "river": 30}</a:t>
+            </a:r>
+          </a:p>
+          <a:p>
+            <a:pPr>
+              <a:defRPr sz="900">
+                <a:solidFill>
+                  <a:srgbClr val="E8EEF4"/>
+                </a:solidFill>
+                <a:latin typeface="Consolas"/>
+              </a:defRPr>
+            </a:pPr>
+            <a:r>
+              <a:t>grens = DREMPELS[ronde]</a:t>
+            </a:r>
+          </a:p>
+        </p:txBody>
+      </p:sp>
+      <p:sp>
+        <p:nvSpPr>
+          <p:cNvPr id="6" name="Rounded Rectangle 5"/>
+          <p:cNvSpPr/>
+          <p:nvPr/>
+        </p:nvSpPr>
+        <p:spPr>
+          <a:xfrm>
+            <a:off x="731520" y="2868168"/>
+            <a:ext cx="5257800" cy="1185672"/>
+          </a:xfrm>
+          <a:prstGeom prst="roundRect">
+            <a:avLst>
+              <a:gd name="adj" fmla="val 3000"/>
+            </a:avLst>
+          </a:prstGeom>
+          <a:solidFill>
+            <a:srgbClr val="121E31"/>
+          </a:solidFill>
+          <a:ln w="9525">
+            <a:solidFill>
+              <a:srgbClr val="1B4D3E"/>
+            </a:solidFill>
+          </a:ln>
+          <a:effectLst/>
+        </p:spPr>
+        <p:style>
+          <a:lnRef idx="1">
+            <a:schemeClr val="accent1"/>
+          </a:lnRef>
+          <a:fillRef idx="3">
+            <a:schemeClr val="accent1"/>
+          </a:fillRef>
+          <a:effectRef idx="2">
+            <a:schemeClr val="accent1"/>
+          </a:effectRef>
+          <a:fontRef idx="minor">
+            <a:schemeClr val="lt1"/>
+          </a:fontRef>
+        </p:style>
+        <p:txBody>
+          <a:bodyPr rtlCol="0" anchor="ctr"/>
+          <a:lstStyle/>
+          <a:p>
+            <a:pPr algn="ctr"/>
+          </a:p>
+        </p:txBody>
+      </p:sp>
+      <p:sp>
+        <p:nvSpPr>
+          <p:cNvPr id="7" name="TextBox 6"/>
+          <p:cNvSpPr txBox="1"/>
+          <p:nvPr/>
+        </p:nvSpPr>
+        <p:spPr>
+          <a:xfrm>
+            <a:off x="932688" y="2959608"/>
+            <a:ext cx="4855464" cy="1002792"/>
+          </a:xfrm>
+          <a:prstGeom prst="rect">
+            <a:avLst/>
+          </a:prstGeom>
+          <a:noFill/>
+        </p:spPr>
+        <p:txBody>
+          <a:bodyPr wrap="square">
+            <a:spAutoFit/>
+          </a:bodyPr>
+          <a:lstStyle/>
+          <a:p>
+            <a:pPr>
+              <a:defRPr sz="1000" b="1">
+                <a:solidFill>
+                  <a:srgbClr val="4FC3A1"/>
+                </a:solidFill>
+              </a:defRPr>
+            </a:pPr>
+            <a:r>
+              <a:t>2 · je winkans-grens</a:t>
+            </a:r>
+          </a:p>
+          <a:p>
+            <a:pPr>
+              <a:spcBef>
+                <a:spcPts val="500"/>
+              </a:spcBef>
+              <a:defRPr sz="900">
+                <a:solidFill>
+                  <a:srgbClr val="E8EEF4"/>
+                </a:solidFill>
+                <a:latin typeface="Consolas"/>
+              </a:defRPr>
+            </a:pPr>
+            <a:r>
+              <a:t>winkans = schat_winkans(hand, tegenstanders=5)</a:t>
+            </a:r>
+          </a:p>
+          <a:p>
+            <a:pPr>
+              <a:defRPr sz="900">
+                <a:solidFill>
+                  <a:srgbClr val="E8EEF4"/>
+                </a:solidFill>
+                <a:latin typeface="Consolas"/>
+              </a:defRPr>
+            </a:pPr>
+            <a:r>
+              <a:t>if winkans &gt; grens:</a:t>
+            </a:r>
+          </a:p>
+          <a:p>
+            <a:pPr>
+              <a:defRPr sz="900">
+                <a:solidFill>
+                  <a:srgbClr val="E8EEF4"/>
+                </a:solidFill>
+                <a:latin typeface="Consolas"/>
+              </a:defRPr>
+            </a:pPr>
+            <a:r>
+              <a:t>    return "raise"</a:t>
+            </a:r>
+          </a:p>
+        </p:txBody>
+      </p:sp>
+      <p:sp>
+        <p:nvSpPr>
+          <p:cNvPr id="8" name="Rounded Rectangle 7"/>
+          <p:cNvSpPr/>
+          <p:nvPr/>
+        </p:nvSpPr>
+        <p:spPr>
+          <a:xfrm>
+            <a:off x="731520" y="4163567"/>
+            <a:ext cx="5257800" cy="1185672"/>
+          </a:xfrm>
+          <a:prstGeom prst="roundRect">
+            <a:avLst>
+              <a:gd name="adj" fmla="val 3000"/>
+            </a:avLst>
+          </a:prstGeom>
+          <a:solidFill>
+            <a:srgbClr val="121E31"/>
+          </a:solidFill>
+          <a:ln w="9525">
+            <a:solidFill>
+              <a:srgbClr val="1B4D3E"/>
+            </a:solidFill>
+          </a:ln>
+          <a:effectLst/>
+        </p:spPr>
+        <p:style>
+          <a:lnRef idx="1">
+            <a:schemeClr val="accent1"/>
+          </a:lnRef>
+          <a:fillRef idx="3">
+            <a:schemeClr val="accent1"/>
+          </a:fillRef>
+          <a:effectRef idx="2">
+            <a:schemeClr val="accent1"/>
+          </a:effectRef>
+          <a:fontRef idx="minor">
+            <a:schemeClr val="lt1"/>
+          </a:fontRef>
+        </p:style>
+        <p:txBody>
+          <a:bodyPr rtlCol="0" anchor="ctr"/>
+          <a:lstStyle/>
+          <a:p>
+            <a:pPr algn="ctr"/>
+          </a:p>
+        </p:txBody>
+      </p:sp>
+      <p:sp>
+        <p:nvSpPr>
+          <p:cNvPr id="9" name="TextBox 8"/>
+          <p:cNvSpPr txBox="1"/>
+          <p:nvPr/>
+        </p:nvSpPr>
+        <p:spPr>
+          <a:xfrm>
+            <a:off x="932688" y="4255007"/>
+            <a:ext cx="4855464" cy="1002792"/>
+          </a:xfrm>
+          <a:prstGeom prst="rect">
+            <a:avLst/>
+          </a:prstGeom>
+          <a:noFill/>
+        </p:spPr>
+        <p:txBody>
+          <a:bodyPr wrap="square">
+            <a:spAutoFit/>
+          </a:bodyPr>
+          <a:lstStyle/>
+          <a:p>
+            <a:pPr>
+              <a:defRPr sz="1000" b="1">
+                <a:solidFill>
+                  <a:srgbClr val="4FC3A1"/>
+                </a:solidFill>
+              </a:defRPr>
+            </a:pPr>
+            <a:r>
+              <a:t>3 · de pot-odds-regel</a:t>
+            </a:r>
+          </a:p>
+          <a:p>
+            <a:pPr>
+              <a:spcBef>
+                <a:spcPts val="500"/>
+              </a:spcBef>
+              <a:defRPr sz="900">
+                <a:solidFill>
+                  <a:srgbClr val="E8EEF4"/>
+                </a:solidFill>
+                <a:latin typeface="Consolas"/>
+              </a:defRPr>
+            </a:pPr>
+            <a:r>
+              <a:t>nodig = bereken_pot_odds(pot, inzet_om_te_callen)</a:t>
+            </a:r>
+          </a:p>
+          <a:p>
+            <a:pPr>
+              <a:defRPr sz="900">
+                <a:solidFill>
+                  <a:srgbClr val="E8EEF4"/>
+                </a:solidFill>
+                <a:latin typeface="Consolas"/>
+              </a:defRPr>
+            </a:pPr>
+            <a:r>
+              <a:t>if winkans &lt; nodig:</a:t>
+            </a:r>
+          </a:p>
+          <a:p>
+            <a:pPr>
+              <a:defRPr sz="900">
+                <a:solidFill>
+                  <a:srgbClr val="E8EEF4"/>
+                </a:solidFill>
+                <a:latin typeface="Consolas"/>
+              </a:defRPr>
+            </a:pPr>
+            <a:r>
+              <a:t>    return "fold"</a:t>
+            </a:r>
+          </a:p>
+        </p:txBody>
+      </p:sp>
+      <p:sp>
+        <p:nvSpPr>
+          <p:cNvPr id="10" name="Rounded Rectangle 9"/>
+          <p:cNvSpPr/>
+          <p:nvPr/>
+        </p:nvSpPr>
+        <p:spPr>
+          <a:xfrm>
+            <a:off x="6263640" y="1572768"/>
+            <a:ext cx="5257800" cy="1185672"/>
+          </a:xfrm>
+          <a:prstGeom prst="roundRect">
+            <a:avLst>
+              <a:gd name="adj" fmla="val 3000"/>
+            </a:avLst>
+          </a:prstGeom>
+          <a:solidFill>
+            <a:srgbClr val="121E31"/>
+          </a:solidFill>
+          <a:ln w="9525">
+            <a:solidFill>
+              <a:srgbClr val="1B4D3E"/>
+            </a:solidFill>
+          </a:ln>
+          <a:effectLst/>
+        </p:spPr>
+        <p:style>
+          <a:lnRef idx="1">
+            <a:schemeClr val="accent1"/>
+          </a:lnRef>
+          <a:fillRef idx="3">
+            <a:schemeClr val="accent1"/>
+          </a:fillRef>
+          <a:effectRef idx="2">
+            <a:schemeClr val="accent1"/>
+          </a:effectRef>
+          <a:fontRef idx="minor">
+            <a:schemeClr val="lt1"/>
+          </a:fontRef>
+        </p:style>
+        <p:txBody>
+          <a:bodyPr rtlCol="0" anchor="ctr"/>
+          <a:lstStyle/>
+          <a:p>
+            <a:pPr algn="ctr"/>
+          </a:p>
+        </p:txBody>
+      </p:sp>
+      <p:sp>
+        <p:nvSpPr>
+          <p:cNvPr id="11" name="TextBox 10"/>
+          <p:cNvSpPr txBox="1"/>
+          <p:nvPr/>
+        </p:nvSpPr>
+        <p:spPr>
+          <a:xfrm>
+            <a:off x="6464808" y="1664208"/>
+            <a:ext cx="4855464" cy="1002792"/>
+          </a:xfrm>
+          <a:prstGeom prst="rect">
+            <a:avLst/>
+          </a:prstGeom>
+          <a:noFill/>
+        </p:spPr>
+        <p:txBody>
+          <a:bodyPr wrap="square">
+            <a:spAutoFit/>
+          </a:bodyPr>
+          <a:lstStyle/>
+          <a:p>
+            <a:pPr>
+              <a:defRPr sz="1000" b="1">
+                <a:solidFill>
+                  <a:srgbClr val="4FC3A1"/>
+                </a:solidFill>
+              </a:defRPr>
+            </a:pPr>
+            <a:r>
+              <a:t>4 · stack-bewustzijn</a:t>
+            </a:r>
+          </a:p>
+          <a:p>
+            <a:pPr>
+              <a:spcBef>
+                <a:spcPts val="500"/>
+              </a:spcBef>
+              <a:defRPr sz="900">
+                <a:solidFill>
+                  <a:srgbClr val="E8EEF4"/>
+                </a:solidFill>
+                <a:latin typeface="Consolas"/>
+              </a:defRPr>
+            </a:pPr>
+            <a:r>
+              <a:t>if stack &lt; 200:</a:t>
+            </a:r>
+          </a:p>
+          <a:p>
+            <a:pPr>
+              <a:defRPr sz="900">
+                <a:solidFill>
+                  <a:srgbClr val="E8EEF4"/>
+                </a:solidFill>
+                <a:latin typeface="Consolas"/>
+              </a:defRPr>
+            </a:pPr>
+            <a:r>
+              <a:t>    return "all_in" if winkans &gt; 50 else "fold"</a:t>
+            </a:r>
+          </a:p>
+        </p:txBody>
+      </p:sp>
+      <p:sp>
+        <p:nvSpPr>
+          <p:cNvPr id="12" name="Rounded Rectangle 11"/>
+          <p:cNvSpPr/>
+          <p:nvPr/>
+        </p:nvSpPr>
+        <p:spPr>
+          <a:xfrm>
+            <a:off x="6263640" y="2868168"/>
+            <a:ext cx="5257800" cy="1185672"/>
+          </a:xfrm>
+          <a:prstGeom prst="roundRect">
+            <a:avLst>
+              <a:gd name="adj" fmla="val 3000"/>
+            </a:avLst>
+          </a:prstGeom>
+          <a:solidFill>
+            <a:srgbClr val="121E31"/>
+          </a:solidFill>
+          <a:ln w="9525">
+            <a:solidFill>
+              <a:srgbClr val="1B4D3E"/>
+            </a:solidFill>
+          </a:ln>
+          <a:effectLst/>
+        </p:spPr>
+        <p:style>
+          <a:lnRef idx="1">
+            <a:schemeClr val="accent1"/>
+          </a:lnRef>
+          <a:fillRef idx="3">
+            <a:schemeClr val="accent1"/>
+          </a:fillRef>
+          <a:effectRef idx="2">
+            <a:schemeClr val="accent1"/>
+          </a:effectRef>
+          <a:fontRef idx="minor">
+            <a:schemeClr val="lt1"/>
+          </a:fontRef>
+        </p:style>
+        <p:txBody>
+          <a:bodyPr rtlCol="0" anchor="ctr"/>
+          <a:lstStyle/>
+          <a:p>
+            <a:pPr algn="ctr"/>
+          </a:p>
+        </p:txBody>
+      </p:sp>
+      <p:sp>
+        <p:nvSpPr>
+          <p:cNvPr id="13" name="TextBox 12"/>
+          <p:cNvSpPr txBox="1"/>
+          <p:nvPr/>
+        </p:nvSpPr>
+        <p:spPr>
+          <a:xfrm>
+            <a:off x="6464808" y="2959608"/>
+            <a:ext cx="4855464" cy="1002792"/>
+          </a:xfrm>
+          <a:prstGeom prst="rect">
+            <a:avLst/>
+          </a:prstGeom>
+          <a:noFill/>
+        </p:spPr>
+        <p:txBody>
+          <a:bodyPr wrap="square">
+            <a:spAutoFit/>
+          </a:bodyPr>
+          <a:lstStyle/>
+          <a:p>
+            <a:pPr>
+              <a:defRPr sz="1000" b="1">
+                <a:solidFill>
+                  <a:srgbClr val="4FC3A1"/>
+                </a:solidFill>
+              </a:defRPr>
+            </a:pPr>
+            <a:r>
+              <a:t>5 · heeft iemand al geraised?</a:t>
+            </a:r>
+          </a:p>
+          <a:p>
+            <a:pPr>
+              <a:spcBef>
+                <a:spcPts val="500"/>
+              </a:spcBef>
+              <a:defRPr sz="900">
+                <a:solidFill>
+                  <a:srgbClr val="E8EEF4"/>
+                </a:solidFill>
+                <a:latin typeface="Consolas"/>
+              </a:defRPr>
+            </a:pPr>
+            <a:r>
+              <a:t>geraised = any(a["actie"] == "raise"</a:t>
+            </a:r>
+          </a:p>
+          <a:p>
+            <a:pPr>
+              <a:defRPr sz="900">
+                <a:solidFill>
+                  <a:srgbClr val="E8EEF4"/>
+                </a:solidFill>
+                <a:latin typeface="Consolas"/>
+              </a:defRPr>
+            </a:pPr>
+            <a:r>
+              <a:t>               and a["ronde"] == ronde</a:t>
+            </a:r>
+          </a:p>
+          <a:p>
+            <a:pPr>
+              <a:defRPr sz="900">
+                <a:solidFill>
+                  <a:srgbClr val="E8EEF4"/>
+                </a:solidFill>
+                <a:latin typeface="Consolas"/>
+              </a:defRPr>
+            </a:pPr>
+            <a:r>
+              <a:t>               for a in tegenstander_acties_deze_hand)</a:t>
+            </a:r>
+          </a:p>
+        </p:txBody>
+      </p:sp>
+      <p:sp>
+        <p:nvSpPr>
+          <p:cNvPr id="14" name="Rounded Rectangle 13"/>
+          <p:cNvSpPr/>
+          <p:nvPr/>
+        </p:nvSpPr>
+        <p:spPr>
+          <a:xfrm>
+            <a:off x="6263640" y="4163567"/>
+            <a:ext cx="5257800" cy="1185672"/>
+          </a:xfrm>
+          <a:prstGeom prst="roundRect">
+            <a:avLst>
+              <a:gd name="adj" fmla="val 3000"/>
+            </a:avLst>
+          </a:prstGeom>
+          <a:solidFill>
+            <a:srgbClr val="121E31"/>
+          </a:solidFill>
+          <a:ln w="9525">
+            <a:solidFill>
+              <a:srgbClr val="1B4D3E"/>
+            </a:solidFill>
+          </a:ln>
+          <a:effectLst/>
+        </p:spPr>
+        <p:style>
+          <a:lnRef idx="1">
+            <a:schemeClr val="accent1"/>
+          </a:lnRef>
+          <a:fillRef idx="3">
+            <a:schemeClr val="accent1"/>
+          </a:fillRef>
+          <a:effectRef idx="2">
+            <a:schemeClr val="accent1"/>
+          </a:effectRef>
+          <a:fontRef idx="minor">
+            <a:schemeClr val="lt1"/>
+          </a:fontRef>
+        </p:style>
+        <p:txBody>
+          <a:bodyPr rtlCol="0" anchor="ctr"/>
+          <a:lstStyle/>
+          <a:p>
+            <a:pPr algn="ctr"/>
+          </a:p>
+        </p:txBody>
+      </p:sp>
+      <p:sp>
+        <p:nvSpPr>
+          <p:cNvPr id="15" name="TextBox 14"/>
+          <p:cNvSpPr txBox="1"/>
+          <p:nvPr/>
+        </p:nvSpPr>
+        <p:spPr>
+          <a:xfrm>
+            <a:off x="6464808" y="4255007"/>
+            <a:ext cx="4855464" cy="1002792"/>
+          </a:xfrm>
+          <a:prstGeom prst="rect">
+            <a:avLst/>
+          </a:prstGeom>
+          <a:noFill/>
+        </p:spPr>
+        <p:txBody>
+          <a:bodyPr wrap="square">
+            <a:spAutoFit/>
+          </a:bodyPr>
+          <a:lstStyle/>
+          <a:p>
+            <a:pPr>
+              <a:defRPr sz="1000" b="1">
+                <a:solidFill>
+                  <a:srgbClr val="4FC3A1"/>
+                </a:solidFill>
+              </a:defRPr>
+            </a:pPr>
+            <a:r>
+              <a:t>6 · hoeveel zet je in</a:t>
+            </a:r>
+          </a:p>
+          <a:p>
+            <a:pPr>
+              <a:spcBef>
+                <a:spcPts val="500"/>
+              </a:spcBef>
+              <a:defRPr sz="900">
+                <a:solidFill>
+                  <a:srgbClr val="E8EEF4"/>
+                </a:solidFill>
+                <a:latin typeface="Consolas"/>
+              </a:defRPr>
+            </a:pPr>
+            <a:r>
+              <a:t>return "grote_raise" if winkans &gt; 70 else "raise"</a:t>
+            </a:r>
+          </a:p>
+        </p:txBody>
+      </p:sp>
+      <p:sp>
+        <p:nvSpPr>
+          <p:cNvPr id="16" name="TextBox 15"/>
+          <p:cNvSpPr txBox="1"/>
+          <p:nvPr/>
+        </p:nvSpPr>
+        <p:spPr>
+          <a:xfrm>
+            <a:off x="1005840" y="5715000"/>
+            <a:ext cx="10149840" cy="822960"/>
+          </a:xfrm>
+          <a:prstGeom prst="rect">
+            <a:avLst/>
+          </a:prstGeom>
+          <a:noFill/>
+        </p:spPr>
+        <p:txBody>
+          <a:bodyPr wrap="square">
+            <a:spAutoFit/>
+          </a:bodyPr>
+          <a:lstStyle/>
+          <a:p>
+            <a:pPr>
+              <a:defRPr sz="1200" b="0">
+                <a:solidFill>
+                  <a:srgbClr val="121E31"/>
+                </a:solidFill>
+              </a:defRPr>
+            </a:pPr>
+            <a:r>
+              <a:t>Zes losse stukjes. Geen van alle is af — het zijn de vormen, niet de antwoorden.</a:t>
+            </a:r>
+          </a:p>
+        </p:txBody>
+      </p:sp>
+    </p:spTree>
+  </p:cSld>
+  <p:clrMapOvr>
+    <a:masterClrMapping/>
+  </p:clrMapOvr>
+</p:sld>
+</file>
+
+<file path=ppt/slides/slide28.xml><?xml version="1.0" encoding="utf-8"?>
+<p:sld xmlns:a="http://schemas.openxmlformats.org/drawingml/2006/main" xmlns:p="http://schemas.openxmlformats.org/presentationml/2006/main" xmlns:r="http://schemas.openxmlformats.org/officeDocument/2006/relationships">
+  <p:cSld>
+    <p:spTree>
+      <p:nvGrpSpPr>
+        <p:cNvPr id="1" name=""/>
+        <p:cNvGrpSpPr/>
+        <p:nvPr/>
+      </p:nvGrpSpPr>
+      <p:grpSpPr/>
+      <p:sp>
+        <p:nvSpPr>
+          <p:cNvPr id="2" name="Rectangle 1"/>
+          <p:cNvSpPr/>
+          <p:nvPr/>
+        </p:nvSpPr>
+        <p:spPr>
+          <a:xfrm>
+            <a:off x="0" y="0"/>
+            <a:ext cx="12191695" cy="6858000"/>
+          </a:xfrm>
+          <a:prstGeom prst="rect">
+            <a:avLst/>
+          </a:prstGeom>
+          <a:solidFill>
+            <a:srgbClr val="F8F9FA"/>
+          </a:solidFill>
+          <a:ln>
+            <a:noFill/>
+          </a:ln>
+          <a:effectLst/>
+        </p:spPr>
+        <p:style>
+          <a:lnRef idx="1">
+            <a:schemeClr val="accent1"/>
+          </a:lnRef>
+          <a:fillRef idx="3">
+            <a:schemeClr val="accent1"/>
+          </a:fillRef>
+          <a:effectRef idx="2">
+            <a:schemeClr val="accent1"/>
+          </a:effectRef>
+          <a:fontRef idx="minor">
+            <a:schemeClr val="lt1"/>
+          </a:fontRef>
+        </p:style>
+        <p:txBody>
+          <a:bodyPr rtlCol="0" anchor="ctr"/>
+          <a:lstStyle/>
+          <a:p>
+            <a:pPr algn="ctr"/>
+          </a:p>
+        </p:txBody>
+      </p:sp>
+      <p:sp>
+        <p:nvSpPr>
+          <p:cNvPr id="3" name="TextBox 2"/>
+          <p:cNvSpPr txBox="1"/>
+          <p:nvPr/>
+        </p:nvSpPr>
+        <p:spPr>
+          <a:xfrm>
+            <a:off x="731520" y="384048"/>
+            <a:ext cx="10698480" cy="1005840"/>
+          </a:xfrm>
+          <a:prstGeom prst="rect">
+            <a:avLst/>
+          </a:prstGeom>
+          <a:noFill/>
+        </p:spPr>
+        <p:txBody>
+          <a:bodyPr wrap="square">
+            <a:spAutoFit/>
+          </a:bodyPr>
+          <a:lstStyle/>
+          <a:p>
+            <a:pPr>
+              <a:defRPr sz="1000" b="1">
+                <a:solidFill>
+                  <a:srgbClr val="1B4D3E"/>
+                </a:solidFill>
+              </a:defRPr>
+            </a:pPr>
+            <a:r>
+              <a:t>DEEL 7 · IN CODE</a:t>
+            </a:r>
+          </a:p>
+          <a:p>
+            <a:pPr>
+              <a:spcBef>
+                <a:spcPts val="400"/>
+              </a:spcBef>
+              <a:defRPr sz="2400" b="1">
+                <a:solidFill>
+                  <a:srgbClr val="121E31"/>
+                </a:solidFill>
+              </a:defRPr>
+            </a:pPr>
+            <a:r>
+              <a:t>En hoe je ze samenvoegt</a:t>
+            </a:r>
+          </a:p>
+        </p:txBody>
+      </p:sp>
+      <p:sp>
+        <p:nvSpPr>
+          <p:cNvPr id="4" name="Rounded Rectangle 3"/>
+          <p:cNvSpPr/>
+          <p:nvPr/>
+        </p:nvSpPr>
+        <p:spPr>
+          <a:xfrm>
+            <a:off x="731520" y="1572768"/>
+            <a:ext cx="10698480" cy="3776472"/>
+          </a:xfrm>
+          <a:prstGeom prst="roundRect">
+            <a:avLst>
+              <a:gd name="adj" fmla="val 3000"/>
+            </a:avLst>
+          </a:prstGeom>
+          <a:solidFill>
+            <a:srgbClr val="121E31"/>
+          </a:solidFill>
+          <a:ln w="9525">
+            <a:solidFill>
+              <a:srgbClr val="1B4D3E"/>
+            </a:solidFill>
+          </a:ln>
+          <a:effectLst/>
+        </p:spPr>
+        <p:style>
+          <a:lnRef idx="1">
+            <a:schemeClr val="accent1"/>
+          </a:lnRef>
+          <a:fillRef idx="3">
+            <a:schemeClr val="accent1"/>
+          </a:fillRef>
+          <a:effectRef idx="2">
+            <a:schemeClr val="accent1"/>
+          </a:effectRef>
+          <a:fontRef idx="minor">
+            <a:schemeClr val="lt1"/>
+          </a:fontRef>
+        </p:style>
+        <p:txBody>
+          <a:bodyPr rtlCol="0" anchor="ctr"/>
+          <a:lstStyle/>
+          <a:p>
+            <a:pPr algn="ctr"/>
+          </a:p>
+        </p:txBody>
+      </p:sp>
+      <p:sp>
+        <p:nvSpPr>
+          <p:cNvPr id="5" name="TextBox 4"/>
+          <p:cNvSpPr txBox="1"/>
+          <p:nvPr/>
+        </p:nvSpPr>
+        <p:spPr>
+          <a:xfrm>
+            <a:off x="932688" y="1664208"/>
+            <a:ext cx="10296144" cy="3593592"/>
+          </a:xfrm>
+          <a:prstGeom prst="rect">
+            <a:avLst/>
+          </a:prstGeom>
+          <a:noFill/>
+        </p:spPr>
+        <p:txBody>
+          <a:bodyPr wrap="square">
+            <a:spAutoFit/>
+          </a:bodyPr>
+          <a:lstStyle/>
+          <a:p>
+            <a:pPr>
+              <a:defRPr sz="1000" b="1">
+                <a:solidFill>
+                  <a:srgbClr val="4FC3A1"/>
+                </a:solidFill>
+              </a:defRPr>
+            </a:pPr>
+            <a:r>
+              <a:t>de vorm van je kies_actie</a:t>
+            </a:r>
+          </a:p>
+          <a:p>
+            <a:pPr>
+              <a:spcBef>
+                <a:spcPts val="500"/>
+              </a:spcBef>
+              <a:defRPr sz="1050">
+                <a:solidFill>
+                  <a:srgbClr val="E8EEF4"/>
+                </a:solidFill>
+                <a:latin typeface="Consolas"/>
+              </a:defRPr>
+            </a:pPr>
+            <a:r>
+              <a:t>def kies_actie(hand, stack, ronde="preflop",</a:t>
+            </a:r>
+          </a:p>
+          <a:p>
+            <a:pPr>
+              <a:defRPr sz="1050">
+                <a:solidFill>
+                  <a:srgbClr val="E8EEF4"/>
+                </a:solidFill>
+                <a:latin typeface="Consolas"/>
+              </a:defRPr>
+            </a:pPr>
+            <a:r>
+              <a:t>               pot=0, inzet_om_te_callen=0):</a:t>
+            </a:r>
+          </a:p>
+          <a:p>
+            <a:pPr>
+              <a:defRPr sz="1050">
+                <a:solidFill>
+                  <a:srgbClr val="E8EEF4"/>
+                </a:solidFill>
+                <a:latin typeface="Consolas"/>
+              </a:defRPr>
+            </a:pPr>
+            <a:r>
+              <a:t> </a:t>
+            </a:r>
+          </a:p>
+          <a:p>
+            <a:pPr>
+              <a:defRPr sz="1050">
+                <a:solidFill>
+                  <a:srgbClr val="E8EEF4"/>
+                </a:solidFill>
+                <a:latin typeface="Consolas"/>
+              </a:defRPr>
+            </a:pPr>
+            <a:r>
+              <a:t>    winkans = schat_winkans(hand, tegenstanders=5)</a:t>
+            </a:r>
+          </a:p>
+          <a:p>
+            <a:pPr>
+              <a:defRPr sz="1050">
+                <a:solidFill>
+                  <a:srgbClr val="E8EEF4"/>
+                </a:solidFill>
+                <a:latin typeface="Consolas"/>
+              </a:defRPr>
+            </a:pPr>
+            <a:r>
+              <a:t>    nodig   = bereken_pot_odds(pot, inzet_om_te_callen)</a:t>
+            </a:r>
+          </a:p>
+          <a:p>
+            <a:pPr>
+              <a:defRPr sz="1050">
+                <a:solidFill>
+                  <a:srgbClr val="E8EEF4"/>
+                </a:solidFill>
+                <a:latin typeface="Consolas"/>
+              </a:defRPr>
+            </a:pPr>
+            <a:r>
+              <a:t>    grens   = DREMPELS[ronde]</a:t>
+            </a:r>
+          </a:p>
+          <a:p>
+            <a:pPr>
+              <a:defRPr sz="1050">
+                <a:solidFill>
+                  <a:srgbClr val="E8EEF4"/>
+                </a:solidFill>
+                <a:latin typeface="Consolas"/>
+              </a:defRPr>
+            </a:pPr>
+            <a:r>
+              <a:t> </a:t>
+            </a:r>
+          </a:p>
+          <a:p>
+            <a:pPr>
+              <a:defRPr sz="1050">
+                <a:solidFill>
+                  <a:srgbClr val="E8EEF4"/>
+                </a:solidFill>
+                <a:latin typeface="Consolas"/>
+              </a:defRPr>
+            </a:pPr>
+            <a:r>
+              <a:t>    # eerst wat alles overschrijft</a:t>
+            </a:r>
+          </a:p>
+          <a:p>
+            <a:pPr>
+              <a:defRPr sz="1050">
+                <a:solidFill>
+                  <a:srgbClr val="E8EEF4"/>
+                </a:solidFill>
+                <a:latin typeface="Consolas"/>
+              </a:defRPr>
+            </a:pPr>
+            <a:r>
+              <a:t>    if stack &lt; 200:</a:t>
+            </a:r>
+          </a:p>
+          <a:p>
+            <a:pPr>
+              <a:defRPr sz="1050">
+                <a:solidFill>
+                  <a:srgbClr val="E8EEF4"/>
+                </a:solidFill>
+                <a:latin typeface="Consolas"/>
+              </a:defRPr>
+            </a:pPr>
+            <a:r>
+              <a:t>        return "all_in" if winkans &gt; 50 else "fold"</a:t>
+            </a:r>
+          </a:p>
+          <a:p>
+            <a:pPr>
+              <a:defRPr sz="1050">
+                <a:solidFill>
+                  <a:srgbClr val="E8EEF4"/>
+                </a:solidFill>
+                <a:latin typeface="Consolas"/>
+              </a:defRPr>
+            </a:pPr>
+            <a:r>
+              <a:t> </a:t>
+            </a:r>
+          </a:p>
+          <a:p>
+            <a:pPr>
+              <a:defRPr sz="1050">
+                <a:solidFill>
+                  <a:srgbClr val="E8EEF4"/>
+                </a:solidFill>
+                <a:latin typeface="Consolas"/>
+              </a:defRPr>
+            </a:pPr>
+            <a:r>
+              <a:t>    # dan: is deze call de prijs waard?</a:t>
+            </a:r>
+          </a:p>
+          <a:p>
+            <a:pPr>
+              <a:defRPr sz="1050">
+                <a:solidFill>
+                  <a:srgbClr val="E8EEF4"/>
+                </a:solidFill>
+                <a:latin typeface="Consolas"/>
+              </a:defRPr>
+            </a:pPr>
+            <a:r>
+              <a:t>    if winkans &lt; nodig:</a:t>
+            </a:r>
+          </a:p>
+          <a:p>
+            <a:pPr>
+              <a:defRPr sz="1050">
+                <a:solidFill>
+                  <a:srgbClr val="E8EEF4"/>
+                </a:solidFill>
+                <a:latin typeface="Consolas"/>
+              </a:defRPr>
+            </a:pPr>
+            <a:r>
+              <a:t>        return "fold"</a:t>
+            </a:r>
+          </a:p>
+          <a:p>
+            <a:pPr>
+              <a:defRPr sz="1050">
+                <a:solidFill>
+                  <a:srgbClr val="E8EEF4"/>
+                </a:solidFill>
+                <a:latin typeface="Consolas"/>
+              </a:defRPr>
+            </a:pPr>
+            <a:r>
+              <a:t> </a:t>
+            </a:r>
+          </a:p>
+          <a:p>
+            <a:pPr>
+              <a:defRPr sz="1050">
+                <a:solidFill>
+                  <a:srgbClr val="E8EEF4"/>
+                </a:solidFill>
+                <a:latin typeface="Consolas"/>
+              </a:defRPr>
+            </a:pPr>
+            <a:r>
+              <a:t>    # en pas dan: hoe sterk sta je?</a:t>
+            </a:r>
+          </a:p>
+          <a:p>
+            <a:pPr>
+              <a:defRPr sz="1050">
+                <a:solidFill>
+                  <a:srgbClr val="E8EEF4"/>
+                </a:solidFill>
+                <a:latin typeface="Consolas"/>
+              </a:defRPr>
+            </a:pPr>
+            <a:r>
+              <a:t>    if winkans &gt; grens:</a:t>
+            </a:r>
+          </a:p>
+          <a:p>
+            <a:pPr>
+              <a:defRPr sz="1050">
+                <a:solidFill>
+                  <a:srgbClr val="E8EEF4"/>
+                </a:solidFill>
+                <a:latin typeface="Consolas"/>
+              </a:defRPr>
+            </a:pPr>
+            <a:r>
+              <a:t>        return "raise"</a:t>
+            </a:r>
+          </a:p>
+          <a:p>
+            <a:pPr>
+              <a:defRPr sz="1050">
+                <a:solidFill>
+                  <a:srgbClr val="E8EEF4"/>
+                </a:solidFill>
+                <a:latin typeface="Consolas"/>
+              </a:defRPr>
+            </a:pPr>
+            <a:r>
+              <a:t>    return "call"</a:t>
+            </a:r>
+          </a:p>
+        </p:txBody>
+      </p:sp>
+      <p:sp>
+        <p:nvSpPr>
+          <p:cNvPr id="6" name="TextBox 5"/>
+          <p:cNvSpPr txBox="1"/>
+          <p:nvPr/>
+        </p:nvSpPr>
+        <p:spPr>
+          <a:xfrm>
+            <a:off x="1005840" y="5715000"/>
+            <a:ext cx="10149840" cy="822960"/>
+          </a:xfrm>
+          <a:prstGeom prst="rect">
+            <a:avLst/>
+          </a:prstGeom>
+          <a:noFill/>
+        </p:spPr>
+        <p:txBody>
+          <a:bodyPr wrap="square">
+            <a:spAutoFit/>
+          </a:bodyPr>
+          <a:lstStyle/>
+          <a:p>
+            <a:pPr>
+              <a:defRPr sz="1200" b="0">
+                <a:solidFill>
+                  <a:srgbClr val="121E31"/>
+                </a:solidFill>
+              </a:defRPr>
+            </a:pPr>
+            <a:r>
+              <a:t>De volgorde is de hele truc: wat je eerst controleert, overschrijft de rest. Dit is het skelet — de getallen erin zijn van jou.</a:t>
+            </a:r>
+          </a:p>
+        </p:txBody>
+      </p:sp>
+    </p:spTree>
+  </p:cSld>
+  <p:clrMapOvr>
+    <a:masterClrMapping/>
+  </p:clrMapOvr>
+</p:sld>
+</file>
+
+<file path=ppt/slides/slide29.xml><?xml version="1.0" encoding="utf-8"?>
+<p:sld xmlns:a="http://schemas.openxmlformats.org/drawingml/2006/main" xmlns:p="http://schemas.openxmlformats.org/presentationml/2006/main" xmlns:r="http://schemas.openxmlformats.org/officeDocument/2006/relationships">
+  <p:cSld>
+    <p:spTree>
+      <p:nvGrpSpPr>
+        <p:cNvPr id="1" name=""/>
+        <p:cNvGrpSpPr/>
+        <p:nvPr/>
+      </p:nvGrpSpPr>
+      <p:grpSpPr/>
+      <p:sp>
+        <p:nvSpPr>
+          <p:cNvPr id="2" name="Rectangle 1"/>
+          <p:cNvSpPr/>
+          <p:nvPr/>
+        </p:nvSpPr>
+        <p:spPr>
+          <a:xfrm>
+            <a:off x="0" y="0"/>
+            <a:ext cx="12191695" cy="6858000"/>
+          </a:xfrm>
+          <a:prstGeom prst="rect">
+            <a:avLst/>
+          </a:prstGeom>
+          <a:solidFill>
+            <a:srgbClr val="F8F9FA"/>
+          </a:solidFill>
+          <a:ln>
+            <a:noFill/>
+          </a:ln>
+          <a:effectLst/>
+        </p:spPr>
+        <p:style>
+          <a:lnRef idx="1">
+            <a:schemeClr val="accent1"/>
+          </a:lnRef>
+          <a:fillRef idx="3">
+            <a:schemeClr val="accent1"/>
+          </a:fillRef>
+          <a:effectRef idx="2">
+            <a:schemeClr val="accent1"/>
+          </a:effectRef>
+          <a:fontRef idx="minor">
+            <a:schemeClr val="lt1"/>
+          </a:fontRef>
+        </p:style>
+        <p:txBody>
+          <a:bodyPr rtlCol="0" anchor="ctr"/>
+          <a:lstStyle/>
+          <a:p>
+            <a:pPr algn="ctr"/>
+          </a:p>
+        </p:txBody>
+      </p:sp>
+      <p:sp>
+        <p:nvSpPr>
+          <p:cNvPr id="3" name="TextBox 2"/>
+          <p:cNvSpPr txBox="1"/>
+          <p:nvPr/>
+        </p:nvSpPr>
+        <p:spPr>
+          <a:xfrm>
+            <a:off x="731520" y="384048"/>
+            <a:ext cx="10698480" cy="1005840"/>
+          </a:xfrm>
+          <a:prstGeom prst="rect">
+            <a:avLst/>
+          </a:prstGeom>
+          <a:noFill/>
+        </p:spPr>
+        <p:txBody>
+          <a:bodyPr wrap="square">
+            <a:spAutoFit/>
+          </a:bodyPr>
+          <a:lstStyle/>
+          <a:p>
+            <a:pPr>
+              <a:defRPr sz="1000" b="1">
+                <a:solidFill>
+                  <a:srgbClr val="1B4D3E"/>
+                </a:solidFill>
+              </a:defRPr>
+            </a:pPr>
+            <a:r>
+              <a:t>DEEL 7 · 4 TOT 8 UUR · WAT JIJ DOET</a:t>
+            </a:r>
+          </a:p>
+          <a:p>
+            <a:pPr>
+              <a:spcBef>
+                <a:spcPts val="400"/>
+              </a:spcBef>
+              <a:defRPr sz="2400" b="1">
+                <a:solidFill>
+                  <a:srgbClr val="121E31"/>
+                </a:solidFill>
+              </a:defRPr>
+            </a:pPr>
+            <a:r>
+              <a:t>Bot v2 afmaken en verbeteren</a:t>
+            </a:r>
+          </a:p>
+        </p:txBody>
+      </p:sp>
+      <p:sp>
+        <p:nvSpPr>
+          <p:cNvPr id="4" name="Rounded Rectangle 3"/>
+          <p:cNvSpPr/>
+          <p:nvPr/>
+        </p:nvSpPr>
+        <p:spPr>
+          <a:xfrm>
+            <a:off x="731520" y="1600200"/>
+            <a:ext cx="10698480" cy="2468880"/>
+          </a:xfrm>
+          <a:prstGeom prst="roundRect">
+            <a:avLst>
+              <a:gd name="adj" fmla="val 3000"/>
+            </a:avLst>
+          </a:prstGeom>
+          <a:solidFill>
+            <a:srgbClr val="FFFFFF"/>
+          </a:solidFill>
+          <a:ln w="9525">
+            <a:solidFill>
+              <a:srgbClr val="DCE1E6"/>
+            </a:solidFill>
+          </a:ln>
+          <a:effectLst/>
+        </p:spPr>
+        <p:style>
+          <a:lnRef idx="1">
+            <a:schemeClr val="accent1"/>
+          </a:lnRef>
+          <a:fillRef idx="3">
+            <a:schemeClr val="accent1"/>
+          </a:fillRef>
+          <a:effectRef idx="2">
+            <a:schemeClr val="accent1"/>
+          </a:effectRef>
+          <a:fontRef idx="minor">
+            <a:schemeClr val="lt1"/>
+          </a:fontRef>
+        </p:style>
+        <p:txBody>
+          <a:bodyPr rtlCol="0" anchor="ctr"/>
+          <a:lstStyle/>
+          <a:p>
+            <a:pPr algn="ctr"/>
+          </a:p>
+        </p:txBody>
+      </p:sp>
+      <p:sp>
+        <p:nvSpPr>
+          <p:cNvPr id="5" name="TextBox 4"/>
+          <p:cNvSpPr txBox="1"/>
+          <p:nvPr/>
+        </p:nvSpPr>
+        <p:spPr>
+          <a:xfrm>
+            <a:off x="1005840" y="1828800"/>
+            <a:ext cx="10149840" cy="2011680"/>
+          </a:xfrm>
+          <a:prstGeom prst="rect">
+            <a:avLst/>
+          </a:prstGeom>
+          <a:noFill/>
+        </p:spPr>
+        <p:txBody>
+          <a:bodyPr wrap="square">
+            <a:spAutoFit/>
+          </a:bodyPr>
+          <a:lstStyle/>
+          <a:p>
+            <a:pPr>
+              <a:defRPr sz="1400" b="0">
+                <a:solidFill>
+                  <a:srgbClr val="121E31"/>
+                </a:solidFill>
+              </a:defRPr>
+            </a:pPr>
+            <a:r>
+              <a:t>•  Bouw verder op je skeleton uit Deel 3.</a:t>
+            </a:r>
+          </a:p>
+          <a:p>
+            <a:pPr>
+              <a:spcBef>
+                <a:spcPts val="1200"/>
+              </a:spcBef>
+              <a:defRPr sz="1400" b="0">
+                <a:solidFill>
+                  <a:srgbClr val="121E31"/>
+                </a:solidFill>
+              </a:defRPr>
+            </a:pPr>
+            <a:r>
+              <a:t>•  Test met je eigen situaties, niet alleen met de gegeven voorbeelden.</a:t>
+            </a:r>
+          </a:p>
+        </p:txBody>
+      </p:sp>
+      <p:sp>
+        <p:nvSpPr>
+          <p:cNvPr id="6" name="Rounded Rectangle 5"/>
+          <p:cNvSpPr/>
+          <p:nvPr/>
+        </p:nvSpPr>
+        <p:spPr>
+          <a:xfrm>
+            <a:off x="731520" y="4343400"/>
+            <a:ext cx="10698480" cy="1371600"/>
+          </a:xfrm>
+          <a:prstGeom prst="roundRect">
+            <a:avLst>
+              <a:gd name="adj" fmla="val 3000"/>
+            </a:avLst>
+          </a:prstGeom>
+          <a:solidFill>
+            <a:srgbClr val="F0F6F3"/>
+          </a:solidFill>
+          <a:ln w="9525">
+            <a:solidFill>
+              <a:srgbClr val="1B4D3E"/>
+            </a:solidFill>
+          </a:ln>
+          <a:effectLst/>
+        </p:spPr>
+        <p:style>
+          <a:lnRef idx="1">
+            <a:schemeClr val="accent1"/>
+          </a:lnRef>
+          <a:fillRef idx="3">
+            <a:schemeClr val="accent1"/>
+          </a:fillRef>
+          <a:effectRef idx="2">
+            <a:schemeClr val="accent1"/>
+          </a:effectRef>
+          <a:fontRef idx="minor">
+            <a:schemeClr val="lt1"/>
+          </a:fontRef>
+        </p:style>
+        <p:txBody>
+          <a:bodyPr rtlCol="0" anchor="ctr"/>
+          <a:lstStyle/>
+          <a:p>
+            <a:pPr algn="ctr"/>
+          </a:p>
+        </p:txBody>
+      </p:sp>
+      <p:sp>
+        <p:nvSpPr>
+          <p:cNvPr id="7" name="TextBox 6"/>
+          <p:cNvSpPr txBox="1"/>
+          <p:nvPr/>
+        </p:nvSpPr>
+        <p:spPr>
+          <a:xfrm>
+            <a:off x="1005840" y="4526280"/>
+            <a:ext cx="10149840" cy="1005840"/>
+          </a:xfrm>
+          <a:prstGeom prst="rect">
+            <a:avLst/>
+          </a:prstGeom>
+          <a:noFill/>
+        </p:spPr>
+        <p:txBody>
+          <a:bodyPr wrap="square">
+            <a:spAutoFit/>
+          </a:bodyPr>
+          <a:lstStyle/>
+          <a:p>
+            <a:pPr>
+              <a:defRPr sz="1000" b="1">
+                <a:solidFill>
+                  <a:srgbClr val="1B4D3E"/>
+                </a:solidFill>
+              </a:defRPr>
+            </a:pPr>
+            <a:r>
+              <a:t>WAT JE HIERVAN INLEVERT</a:t>
+            </a:r>
+          </a:p>
+          <a:p>
+            <a:pPr>
+              <a:spcBef>
+                <a:spcPts val="500"/>
+              </a:spcBef>
+              <a:defRPr sz="1500" b="1">
+                <a:solidFill>
+                  <a:srgbClr val="121E31"/>
+                </a:solidFill>
+              </a:defRPr>
+            </a:pPr>
+            <a:r>
+              <a:t>wo 09:00 een werkende Bot v2 · do 18:00 je verbeterde versie.</a:t>
             </a:r>
           </a:p>
         </p:txBody>
@@ -8350,6 +10337,2063 @@
 </p:sld>
 </file>
 
+<file path=ppt/slides/slide30.xml><?xml version="1.0" encoding="utf-8"?>
+<p:sld xmlns:a="http://schemas.openxmlformats.org/drawingml/2006/main" xmlns:p="http://schemas.openxmlformats.org/presentationml/2006/main" xmlns:r="http://schemas.openxmlformats.org/officeDocument/2006/relationships">
+  <p:cSld>
+    <p:spTree>
+      <p:nvGrpSpPr>
+        <p:cNvPr id="1" name=""/>
+        <p:cNvGrpSpPr/>
+        <p:nvPr/>
+      </p:nvGrpSpPr>
+      <p:grpSpPr/>
+      <p:sp>
+        <p:nvSpPr>
+          <p:cNvPr id="2" name="Rectangle 1"/>
+          <p:cNvSpPr/>
+          <p:nvPr/>
+        </p:nvSpPr>
+        <p:spPr>
+          <a:xfrm>
+            <a:off x="0" y="0"/>
+            <a:ext cx="12191695" cy="6858000"/>
+          </a:xfrm>
+          <a:prstGeom prst="rect">
+            <a:avLst/>
+          </a:prstGeom>
+          <a:solidFill>
+            <a:srgbClr val="F8F9FA"/>
+          </a:solidFill>
+          <a:ln>
+            <a:noFill/>
+          </a:ln>
+          <a:effectLst/>
+        </p:spPr>
+        <p:style>
+          <a:lnRef idx="1">
+            <a:schemeClr val="accent1"/>
+          </a:lnRef>
+          <a:fillRef idx="3">
+            <a:schemeClr val="accent1"/>
+          </a:fillRef>
+          <a:effectRef idx="2">
+            <a:schemeClr val="accent1"/>
+          </a:effectRef>
+          <a:fontRef idx="minor">
+            <a:schemeClr val="lt1"/>
+          </a:fontRef>
+        </p:style>
+        <p:txBody>
+          <a:bodyPr rtlCol="0" anchor="ctr"/>
+          <a:lstStyle/>
+          <a:p>
+            <a:pPr algn="ctr"/>
+          </a:p>
+        </p:txBody>
+      </p:sp>
+      <p:sp>
+        <p:nvSpPr>
+          <p:cNvPr id="3" name="TextBox 2"/>
+          <p:cNvSpPr txBox="1"/>
+          <p:nvPr/>
+        </p:nvSpPr>
+        <p:spPr>
+          <a:xfrm>
+            <a:off x="731520" y="384048"/>
+            <a:ext cx="10698480" cy="1005840"/>
+          </a:xfrm>
+          <a:prstGeom prst="rect">
+            <a:avLst/>
+          </a:prstGeom>
+          <a:noFill/>
+        </p:spPr>
+        <p:txBody>
+          <a:bodyPr wrap="square">
+            <a:spAutoFit/>
+          </a:bodyPr>
+          <a:lstStyle/>
+          <a:p>
+            <a:pPr>
+              <a:defRPr sz="1000" b="1">
+                <a:solidFill>
+                  <a:srgbClr val="1B4D3E"/>
+                </a:solidFill>
+              </a:defRPr>
+            </a:pPr>
+            <a:r>
+              <a:t>DEEL 8 · 10 MIN · HUISWERK · DE THEORIE</a:t>
+            </a:r>
+          </a:p>
+          <a:p>
+            <a:pPr>
+              <a:spcBef>
+                <a:spcPts val="400"/>
+              </a:spcBef>
+              <a:defRPr sz="2400" b="1">
+                <a:solidFill>
+                  <a:srgbClr val="121E31"/>
+                </a:solidFill>
+              </a:defRPr>
+            </a:pPr>
+            <a:r>
+              <a:t>Lokaal testen tegen je eigen Week 1-bot</a:t>
+            </a:r>
+          </a:p>
+        </p:txBody>
+      </p:sp>
+      <p:sp>
+        <p:nvSpPr>
+          <p:cNvPr id="4" name="Rounded Rectangle 3"/>
+          <p:cNvSpPr/>
+          <p:nvPr/>
+        </p:nvSpPr>
+        <p:spPr>
+          <a:xfrm>
+            <a:off x="731520" y="1600200"/>
+            <a:ext cx="10698480" cy="4480560"/>
+          </a:xfrm>
+          <a:prstGeom prst="roundRect">
+            <a:avLst>
+              <a:gd name="adj" fmla="val 3000"/>
+            </a:avLst>
+          </a:prstGeom>
+          <a:solidFill>
+            <a:srgbClr val="FFFFFF"/>
+          </a:solidFill>
+          <a:ln w="9525">
+            <a:solidFill>
+              <a:srgbClr val="DCE1E6"/>
+            </a:solidFill>
+          </a:ln>
+          <a:effectLst/>
+        </p:spPr>
+        <p:style>
+          <a:lnRef idx="1">
+            <a:schemeClr val="accent1"/>
+          </a:lnRef>
+          <a:fillRef idx="3">
+            <a:schemeClr val="accent1"/>
+          </a:fillRef>
+          <a:effectRef idx="2">
+            <a:schemeClr val="accent1"/>
+          </a:effectRef>
+          <a:fontRef idx="minor">
+            <a:schemeClr val="lt1"/>
+          </a:fontRef>
+        </p:style>
+        <p:txBody>
+          <a:bodyPr rtlCol="0" anchor="ctr"/>
+          <a:lstStyle/>
+          <a:p>
+            <a:pPr algn="ctr"/>
+          </a:p>
+        </p:txBody>
+      </p:sp>
+      <p:sp>
+        <p:nvSpPr>
+          <p:cNvPr id="5" name="TextBox 4"/>
+          <p:cNvSpPr txBox="1"/>
+          <p:nvPr/>
+        </p:nvSpPr>
+        <p:spPr>
+          <a:xfrm>
+            <a:off x="1005840" y="1828800"/>
+            <a:ext cx="10149840" cy="4023360"/>
+          </a:xfrm>
+          <a:prstGeom prst="rect">
+            <a:avLst/>
+          </a:prstGeom>
+          <a:noFill/>
+        </p:spPr>
+        <p:txBody>
+          <a:bodyPr wrap="square">
+            <a:spAutoFit/>
+          </a:bodyPr>
+          <a:lstStyle/>
+          <a:p>
+            <a:pPr>
+              <a:defRPr sz="1400" b="1">
+                <a:solidFill>
+                  <a:srgbClr val="1B4D3E"/>
+                </a:solidFill>
+              </a:defRPr>
+            </a:pPr>
+            <a:r>
+              <a:t>Zelfde handen, twee bots</a:t>
+            </a:r>
+          </a:p>
+          <a:p>
+            <a:pPr>
+              <a:spcBef>
+                <a:spcPts val="300"/>
+              </a:spcBef>
+              <a:defRPr sz="1150" b="0">
+                <a:solidFill>
+                  <a:srgbClr val="121E31"/>
+                </a:solidFill>
+              </a:defRPr>
+            </a:pPr>
+            <a:r>
+              <a:t>Laat Bot v2 en Bot v1 dezelfde testhanden zien en vergelijk wat ze kiezen.</a:t>
+            </a:r>
+          </a:p>
+          <a:p>
+            <a:pPr>
+              <a:spcBef>
+                <a:spcPts val="1400"/>
+              </a:spcBef>
+              <a:defRPr sz="1400" b="1">
+                <a:solidFill>
+                  <a:srgbClr val="1B4D3E"/>
+                </a:solidFill>
+              </a:defRPr>
+            </a:pPr>
+            <a:r>
+              <a:t>De vraag erachter</a:t>
+            </a:r>
+          </a:p>
+          <a:p>
+            <a:pPr>
+              <a:spcBef>
+                <a:spcPts val="300"/>
+              </a:spcBef>
+              <a:defRPr sz="1150" b="0">
+                <a:solidFill>
+                  <a:srgbClr val="121E31"/>
+                </a:solidFill>
+              </a:defRPr>
+            </a:pPr>
+            <a:r>
+              <a:t>Verwacht je dat v2 slimmer speelt? Waarom wel of niet, gegeven dat v2 nu ook de stack meeweegt?</a:t>
+            </a:r>
+          </a:p>
+        </p:txBody>
+      </p:sp>
+    </p:spTree>
+  </p:cSld>
+  <p:clrMapOvr>
+    <a:masterClrMapping/>
+  </p:clrMapOvr>
+</p:sld>
+</file>
+
+<file path=ppt/slides/slide31.xml><?xml version="1.0" encoding="utf-8"?>
+<p:sld xmlns:a="http://schemas.openxmlformats.org/drawingml/2006/main" xmlns:p="http://schemas.openxmlformats.org/presentationml/2006/main" xmlns:r="http://schemas.openxmlformats.org/officeDocument/2006/relationships">
+  <p:cSld>
+    <p:spTree>
+      <p:nvGrpSpPr>
+        <p:cNvPr id="1" name=""/>
+        <p:cNvGrpSpPr/>
+        <p:nvPr/>
+      </p:nvGrpSpPr>
+      <p:grpSpPr/>
+      <p:sp>
+        <p:nvSpPr>
+          <p:cNvPr id="2" name="Rectangle 1"/>
+          <p:cNvSpPr/>
+          <p:nvPr/>
+        </p:nvSpPr>
+        <p:spPr>
+          <a:xfrm>
+            <a:off x="0" y="0"/>
+            <a:ext cx="12191695" cy="6858000"/>
+          </a:xfrm>
+          <a:prstGeom prst="rect">
+            <a:avLst/>
+          </a:prstGeom>
+          <a:solidFill>
+            <a:srgbClr val="F8F9FA"/>
+          </a:solidFill>
+          <a:ln>
+            <a:noFill/>
+          </a:ln>
+          <a:effectLst/>
+        </p:spPr>
+        <p:style>
+          <a:lnRef idx="1">
+            <a:schemeClr val="accent1"/>
+          </a:lnRef>
+          <a:fillRef idx="3">
+            <a:schemeClr val="accent1"/>
+          </a:fillRef>
+          <a:effectRef idx="2">
+            <a:schemeClr val="accent1"/>
+          </a:effectRef>
+          <a:fontRef idx="minor">
+            <a:schemeClr val="lt1"/>
+          </a:fontRef>
+        </p:style>
+        <p:txBody>
+          <a:bodyPr rtlCol="0" anchor="ctr"/>
+          <a:lstStyle/>
+          <a:p>
+            <a:pPr algn="ctr"/>
+          </a:p>
+        </p:txBody>
+      </p:sp>
+      <p:sp>
+        <p:nvSpPr>
+          <p:cNvPr id="3" name="TextBox 2"/>
+          <p:cNvSpPr txBox="1"/>
+          <p:nvPr/>
+        </p:nvSpPr>
+        <p:spPr>
+          <a:xfrm>
+            <a:off x="731520" y="384048"/>
+            <a:ext cx="10698480" cy="1005840"/>
+          </a:xfrm>
+          <a:prstGeom prst="rect">
+            <a:avLst/>
+          </a:prstGeom>
+          <a:noFill/>
+        </p:spPr>
+        <p:txBody>
+          <a:bodyPr wrap="square">
+            <a:spAutoFit/>
+          </a:bodyPr>
+          <a:lstStyle/>
+          <a:p>
+            <a:pPr>
+              <a:defRPr sz="1000" b="1">
+                <a:solidFill>
+                  <a:srgbClr val="1B4D3E"/>
+                </a:solidFill>
+              </a:defRPr>
+            </a:pPr>
+            <a:r>
+              <a:t>DEEL 8 · 10 MIN · WAT JIJ DOET</a:t>
+            </a:r>
+          </a:p>
+          <a:p>
+            <a:pPr>
+              <a:spcBef>
+                <a:spcPts val="400"/>
+              </a:spcBef>
+              <a:defRPr sz="2400" b="1">
+                <a:solidFill>
+                  <a:srgbClr val="121E31"/>
+                </a:solidFill>
+              </a:defRPr>
+            </a:pPr>
+            <a:r>
+              <a:t>Lokaal testen tegen je eigen Week 1-bot</a:t>
+            </a:r>
+          </a:p>
+        </p:txBody>
+      </p:sp>
+      <p:sp>
+        <p:nvSpPr>
+          <p:cNvPr id="4" name="Rounded Rectangle 3"/>
+          <p:cNvSpPr/>
+          <p:nvPr/>
+        </p:nvSpPr>
+        <p:spPr>
+          <a:xfrm>
+            <a:off x="731520" y="1600200"/>
+            <a:ext cx="10698480" cy="2468880"/>
+          </a:xfrm>
+          <a:prstGeom prst="roundRect">
+            <a:avLst>
+              <a:gd name="adj" fmla="val 3000"/>
+            </a:avLst>
+          </a:prstGeom>
+          <a:solidFill>
+            <a:srgbClr val="FFFFFF"/>
+          </a:solidFill>
+          <a:ln w="9525">
+            <a:solidFill>
+              <a:srgbClr val="DCE1E6"/>
+            </a:solidFill>
+          </a:ln>
+          <a:effectLst/>
+        </p:spPr>
+        <p:style>
+          <a:lnRef idx="1">
+            <a:schemeClr val="accent1"/>
+          </a:lnRef>
+          <a:fillRef idx="3">
+            <a:schemeClr val="accent1"/>
+          </a:fillRef>
+          <a:effectRef idx="2">
+            <a:schemeClr val="accent1"/>
+          </a:effectRef>
+          <a:fontRef idx="minor">
+            <a:schemeClr val="lt1"/>
+          </a:fontRef>
+        </p:style>
+        <p:txBody>
+          <a:bodyPr rtlCol="0" anchor="ctr"/>
+          <a:lstStyle/>
+          <a:p>
+            <a:pPr algn="ctr"/>
+          </a:p>
+        </p:txBody>
+      </p:sp>
+      <p:sp>
+        <p:nvSpPr>
+          <p:cNvPr id="5" name="TextBox 4"/>
+          <p:cNvSpPr txBox="1"/>
+          <p:nvPr/>
+        </p:nvSpPr>
+        <p:spPr>
+          <a:xfrm>
+            <a:off x="1005840" y="1828800"/>
+            <a:ext cx="10149840" cy="2011680"/>
+          </a:xfrm>
+          <a:prstGeom prst="rect">
+            <a:avLst/>
+          </a:prstGeom>
+          <a:noFill/>
+        </p:spPr>
+        <p:txBody>
+          <a:bodyPr wrap="square">
+            <a:spAutoFit/>
+          </a:bodyPr>
+          <a:lstStyle/>
+          <a:p>
+            <a:pPr>
+              <a:defRPr sz="1400" b="0">
+                <a:solidFill>
+                  <a:srgbClr val="121E31"/>
+                </a:solidFill>
+              </a:defRPr>
+            </a:pPr>
+            <a:r>
+              <a:t>•  Bedenk minstens vier testhanden waar je vermoedt dat ze het oneens zijn.</a:t>
+            </a:r>
+          </a:p>
+        </p:txBody>
+      </p:sp>
+      <p:sp>
+        <p:nvSpPr>
+          <p:cNvPr id="6" name="Rounded Rectangle 5"/>
+          <p:cNvSpPr/>
+          <p:nvPr/>
+        </p:nvSpPr>
+        <p:spPr>
+          <a:xfrm>
+            <a:off x="731520" y="4343400"/>
+            <a:ext cx="10698480" cy="1371600"/>
+          </a:xfrm>
+          <a:prstGeom prst="roundRect">
+            <a:avLst>
+              <a:gd name="adj" fmla="val 3000"/>
+            </a:avLst>
+          </a:prstGeom>
+          <a:solidFill>
+            <a:srgbClr val="F0F6F3"/>
+          </a:solidFill>
+          <a:ln w="9525">
+            <a:solidFill>
+              <a:srgbClr val="1B4D3E"/>
+            </a:solidFill>
+          </a:ln>
+          <a:effectLst/>
+        </p:spPr>
+        <p:style>
+          <a:lnRef idx="1">
+            <a:schemeClr val="accent1"/>
+          </a:lnRef>
+          <a:fillRef idx="3">
+            <a:schemeClr val="accent1"/>
+          </a:fillRef>
+          <a:effectRef idx="2">
+            <a:schemeClr val="accent1"/>
+          </a:effectRef>
+          <a:fontRef idx="minor">
+            <a:schemeClr val="lt1"/>
+          </a:fontRef>
+        </p:style>
+        <p:txBody>
+          <a:bodyPr rtlCol="0" anchor="ctr"/>
+          <a:lstStyle/>
+          <a:p>
+            <a:pPr algn="ctr"/>
+          </a:p>
+        </p:txBody>
+      </p:sp>
+      <p:sp>
+        <p:nvSpPr>
+          <p:cNvPr id="7" name="TextBox 6"/>
+          <p:cNvSpPr txBox="1"/>
+          <p:nvPr/>
+        </p:nvSpPr>
+        <p:spPr>
+          <a:xfrm>
+            <a:off x="1005840" y="4526280"/>
+            <a:ext cx="10149840" cy="1005840"/>
+          </a:xfrm>
+          <a:prstGeom prst="rect">
+            <a:avLst/>
+          </a:prstGeom>
+          <a:noFill/>
+        </p:spPr>
+        <p:txBody>
+          <a:bodyPr wrap="square">
+            <a:spAutoFit/>
+          </a:bodyPr>
+          <a:lstStyle/>
+          <a:p>
+            <a:pPr>
+              <a:defRPr sz="1000" b="1">
+                <a:solidFill>
+                  <a:srgbClr val="1B4D3E"/>
+                </a:solidFill>
+              </a:defRPr>
+            </a:pPr>
+            <a:r>
+              <a:t>WAT JE HIERVAN INLEVERT</a:t>
+            </a:r>
+          </a:p>
+          <a:p>
+            <a:pPr>
+              <a:spcBef>
+                <a:spcPts val="500"/>
+              </a:spcBef>
+              <a:defRPr sz="1500" b="1">
+                <a:solidFill>
+                  <a:srgbClr val="121E31"/>
+                </a:solidFill>
+              </a:defRPr>
+            </a:pPr>
+            <a:r>
+              <a:t>Niets apart — maar het is je laatste check vóór je inlevert.</a:t>
+            </a:r>
+          </a:p>
+        </p:txBody>
+      </p:sp>
+    </p:spTree>
+  </p:cSld>
+  <p:clrMapOvr>
+    <a:masterClrMapping/>
+  </p:clrMapOvr>
+</p:sld>
+</file>
+
+<file path=ppt/slides/slide32.xml><?xml version="1.0" encoding="utf-8"?>
+<p:sld xmlns:a="http://schemas.openxmlformats.org/drawingml/2006/main" xmlns:p="http://schemas.openxmlformats.org/presentationml/2006/main" xmlns:r="http://schemas.openxmlformats.org/officeDocument/2006/relationships">
+  <p:cSld>
+    <p:spTree>
+      <p:nvGrpSpPr>
+        <p:cNvPr id="1" name=""/>
+        <p:cNvGrpSpPr/>
+        <p:nvPr/>
+      </p:nvGrpSpPr>
+      <p:grpSpPr/>
+      <p:sp>
+        <p:nvSpPr>
+          <p:cNvPr id="2" name="Rectangle 1"/>
+          <p:cNvSpPr/>
+          <p:nvPr/>
+        </p:nvSpPr>
+        <p:spPr>
+          <a:xfrm>
+            <a:off x="0" y="0"/>
+            <a:ext cx="12191695" cy="6858000"/>
+          </a:xfrm>
+          <a:prstGeom prst="rect">
+            <a:avLst/>
+          </a:prstGeom>
+          <a:solidFill>
+            <a:srgbClr val="F8F9FA"/>
+          </a:solidFill>
+          <a:ln>
+            <a:noFill/>
+          </a:ln>
+          <a:effectLst/>
+        </p:spPr>
+        <p:style>
+          <a:lnRef idx="1">
+            <a:schemeClr val="accent1"/>
+          </a:lnRef>
+          <a:fillRef idx="3">
+            <a:schemeClr val="accent1"/>
+          </a:fillRef>
+          <a:effectRef idx="2">
+            <a:schemeClr val="accent1"/>
+          </a:effectRef>
+          <a:fontRef idx="minor">
+            <a:schemeClr val="lt1"/>
+          </a:fontRef>
+        </p:style>
+        <p:txBody>
+          <a:bodyPr rtlCol="0" anchor="ctr"/>
+          <a:lstStyle/>
+          <a:p>
+            <a:pPr algn="ctr"/>
+          </a:p>
+        </p:txBody>
+      </p:sp>
+      <p:sp>
+        <p:nvSpPr>
+          <p:cNvPr id="3" name="TextBox 2"/>
+          <p:cNvSpPr txBox="1"/>
+          <p:nvPr/>
+        </p:nvSpPr>
+        <p:spPr>
+          <a:xfrm>
+            <a:off x="731520" y="384048"/>
+            <a:ext cx="10698480" cy="1005840"/>
+          </a:xfrm>
+          <a:prstGeom prst="rect">
+            <a:avLst/>
+          </a:prstGeom>
+          <a:noFill/>
+        </p:spPr>
+        <p:txBody>
+          <a:bodyPr wrap="square">
+            <a:spAutoFit/>
+          </a:bodyPr>
+          <a:lstStyle/>
+          <a:p>
+            <a:pPr>
+              <a:defRPr sz="1000" b="1">
+                <a:solidFill>
+                  <a:srgbClr val="1B4D3E"/>
+                </a:solidFill>
+              </a:defRPr>
+            </a:pPr>
+            <a:r>
+              <a:t>DEEL 9 · 15 MIN · HUISWERK · DE THEORIE</a:t>
+            </a:r>
+          </a:p>
+          <a:p>
+            <a:pPr>
+              <a:spcBef>
+                <a:spcPts val="400"/>
+              </a:spcBef>
+              <a:defRPr sz="2400" b="1">
+                <a:solidFill>
+                  <a:srgbClr val="121E31"/>
+                </a:solidFill>
+              </a:defRPr>
+            </a:pPr>
+            <a:r>
+              <a:t>Plotly-grafiek van het Week 1-toernooi</a:t>
+            </a:r>
+          </a:p>
+        </p:txBody>
+      </p:sp>
+      <p:sp>
+        <p:nvSpPr>
+          <p:cNvPr id="4" name="Rounded Rectangle 3"/>
+          <p:cNvSpPr/>
+          <p:nvPr/>
+        </p:nvSpPr>
+        <p:spPr>
+          <a:xfrm>
+            <a:off x="731520" y="1600200"/>
+            <a:ext cx="10698480" cy="4480560"/>
+          </a:xfrm>
+          <a:prstGeom prst="roundRect">
+            <a:avLst>
+              <a:gd name="adj" fmla="val 3000"/>
+            </a:avLst>
+          </a:prstGeom>
+          <a:solidFill>
+            <a:srgbClr val="FFFFFF"/>
+          </a:solidFill>
+          <a:ln w="9525">
+            <a:solidFill>
+              <a:srgbClr val="DCE1E6"/>
+            </a:solidFill>
+          </a:ln>
+          <a:effectLst/>
+        </p:spPr>
+        <p:style>
+          <a:lnRef idx="1">
+            <a:schemeClr val="accent1"/>
+          </a:lnRef>
+          <a:fillRef idx="3">
+            <a:schemeClr val="accent1"/>
+          </a:fillRef>
+          <a:effectRef idx="2">
+            <a:schemeClr val="accent1"/>
+          </a:effectRef>
+          <a:fontRef idx="minor">
+            <a:schemeClr val="lt1"/>
+          </a:fontRef>
+        </p:style>
+        <p:txBody>
+          <a:bodyPr rtlCol="0" anchor="ctr"/>
+          <a:lstStyle/>
+          <a:p>
+            <a:pPr algn="ctr"/>
+          </a:p>
+        </p:txBody>
+      </p:sp>
+      <p:sp>
+        <p:nvSpPr>
+          <p:cNvPr id="5" name="TextBox 4"/>
+          <p:cNvSpPr txBox="1"/>
+          <p:nvPr/>
+        </p:nvSpPr>
+        <p:spPr>
+          <a:xfrm>
+            <a:off x="1005840" y="1828800"/>
+            <a:ext cx="10149840" cy="4023360"/>
+          </a:xfrm>
+          <a:prstGeom prst="rect">
+            <a:avLst/>
+          </a:prstGeom>
+          <a:noFill/>
+        </p:spPr>
+        <p:txBody>
+          <a:bodyPr wrap="square">
+            <a:spAutoFit/>
+          </a:bodyPr>
+          <a:lstStyle/>
+          <a:p>
+            <a:pPr>
+              <a:defRPr sz="1400" b="1">
+                <a:solidFill>
+                  <a:srgbClr val="1B4D3E"/>
+                </a:solidFill>
+              </a:defRPr>
+            </a:pPr>
+            <a:r>
+              <a:t>Kleur per bot</a:t>
+            </a:r>
+          </a:p>
+          <a:p>
+            <a:pPr>
+              <a:spcBef>
+                <a:spcPts val="300"/>
+              </a:spcBef>
+              <a:defRPr sz="1150" b="0">
+                <a:solidFill>
+                  <a:srgbClr val="121E31"/>
+                </a:solidFill>
+              </a:defRPr>
+            </a:pPr>
+            <a:r>
+              <a:t>Eén lijn per bot, kleur als onderscheid.</a:t>
+            </a:r>
+          </a:p>
+          <a:p>
+            <a:pPr>
+              <a:spcBef>
+                <a:spcPts val="1400"/>
+              </a:spcBef>
+              <a:defRPr sz="1400" b="1">
+                <a:solidFill>
+                  <a:srgbClr val="1B4D3E"/>
+                </a:solidFill>
+              </a:defRPr>
+            </a:pPr>
+            <a:r>
+              <a:t>Beperk je scope</a:t>
+            </a:r>
+          </a:p>
+          <a:p>
+            <a:pPr>
+              <a:spcBef>
+                <a:spcPts val="300"/>
+              </a:spcBef>
+              <a:defRPr sz="1150" b="0">
+                <a:solidFill>
+                  <a:srgbClr val="121E31"/>
+                </a:solidFill>
+              </a:defRPr>
+            </a:pPr>
+            <a:r>
+              <a:t>Eén tafel en één simulatie, anders krijg je een spaghetti-grafiek — daar ga je in Werkcollege 6 mee aan de slag.</a:t>
+            </a:r>
+          </a:p>
+          <a:p>
+            <a:pPr>
+              <a:spcBef>
+                <a:spcPts val="1400"/>
+              </a:spcBef>
+              <a:defRPr sz="1400" b="1">
+                <a:solidFill>
+                  <a:srgbClr val="1B4D3E"/>
+                </a:solidFill>
+              </a:defRPr>
+            </a:pPr>
+            <a:r>
+              <a:t>De vraag om te onthouden</a:t>
+            </a:r>
+          </a:p>
+          <a:p>
+            <a:pPr>
+              <a:spcBef>
+                <a:spcPts val="300"/>
+              </a:spcBef>
+              <a:defRPr sz="1150" b="0">
+                <a:solidFill>
+                  <a:srgbClr val="121E31"/>
+                </a:solidFill>
+              </a:defRPr>
+            </a:pPr>
+            <a:r>
+              <a:t>Kun je zónder de legenda af te lezen zien wie er wint? Bewaar dat gevoel voor Werkcollege 6.</a:t>
+            </a:r>
+          </a:p>
+        </p:txBody>
+      </p:sp>
+    </p:spTree>
+  </p:cSld>
+  <p:clrMapOvr>
+    <a:masterClrMapping/>
+  </p:clrMapOvr>
+</p:sld>
+</file>
+
+<file path=ppt/slides/slide33.xml><?xml version="1.0" encoding="utf-8"?>
+<p:sld xmlns:a="http://schemas.openxmlformats.org/drawingml/2006/main" xmlns:p="http://schemas.openxmlformats.org/presentationml/2006/main" xmlns:r="http://schemas.openxmlformats.org/officeDocument/2006/relationships">
+  <p:cSld>
+    <p:spTree>
+      <p:nvGrpSpPr>
+        <p:cNvPr id="1" name=""/>
+        <p:cNvGrpSpPr/>
+        <p:nvPr/>
+      </p:nvGrpSpPr>
+      <p:grpSpPr/>
+      <p:sp>
+        <p:nvSpPr>
+          <p:cNvPr id="2" name="Rectangle 1"/>
+          <p:cNvSpPr/>
+          <p:nvPr/>
+        </p:nvSpPr>
+        <p:spPr>
+          <a:xfrm>
+            <a:off x="0" y="0"/>
+            <a:ext cx="12191695" cy="6858000"/>
+          </a:xfrm>
+          <a:prstGeom prst="rect">
+            <a:avLst/>
+          </a:prstGeom>
+          <a:solidFill>
+            <a:srgbClr val="F8F9FA"/>
+          </a:solidFill>
+          <a:ln>
+            <a:noFill/>
+          </a:ln>
+          <a:effectLst/>
+        </p:spPr>
+        <p:style>
+          <a:lnRef idx="1">
+            <a:schemeClr val="accent1"/>
+          </a:lnRef>
+          <a:fillRef idx="3">
+            <a:schemeClr val="accent1"/>
+          </a:fillRef>
+          <a:effectRef idx="2">
+            <a:schemeClr val="accent1"/>
+          </a:effectRef>
+          <a:fontRef idx="minor">
+            <a:schemeClr val="lt1"/>
+          </a:fontRef>
+        </p:style>
+        <p:txBody>
+          <a:bodyPr rtlCol="0" anchor="ctr"/>
+          <a:lstStyle/>
+          <a:p>
+            <a:pPr algn="ctr"/>
+          </a:p>
+        </p:txBody>
+      </p:sp>
+      <p:sp>
+        <p:nvSpPr>
+          <p:cNvPr id="3" name="TextBox 2"/>
+          <p:cNvSpPr txBox="1"/>
+          <p:nvPr/>
+        </p:nvSpPr>
+        <p:spPr>
+          <a:xfrm>
+            <a:off x="731520" y="384048"/>
+            <a:ext cx="10698480" cy="1005840"/>
+          </a:xfrm>
+          <a:prstGeom prst="rect">
+            <a:avLst/>
+          </a:prstGeom>
+          <a:noFill/>
+        </p:spPr>
+        <p:txBody>
+          <a:bodyPr wrap="square">
+            <a:spAutoFit/>
+          </a:bodyPr>
+          <a:lstStyle/>
+          <a:p>
+            <a:pPr>
+              <a:defRPr sz="1000" b="1">
+                <a:solidFill>
+                  <a:srgbClr val="1B4D3E"/>
+                </a:solidFill>
+              </a:defRPr>
+            </a:pPr>
+            <a:r>
+              <a:t>DEEL 9 · 15 MIN · WAT JIJ DOET</a:t>
+            </a:r>
+          </a:p>
+          <a:p>
+            <a:pPr>
+              <a:spcBef>
+                <a:spcPts val="400"/>
+              </a:spcBef>
+              <a:defRPr sz="2400" b="1">
+                <a:solidFill>
+                  <a:srgbClr val="121E31"/>
+                </a:solidFill>
+              </a:defRPr>
+            </a:pPr>
+            <a:r>
+              <a:t>Plotly-grafiek van het Week 1-toernooi</a:t>
+            </a:r>
+          </a:p>
+        </p:txBody>
+      </p:sp>
+      <p:sp>
+        <p:nvSpPr>
+          <p:cNvPr id="4" name="Rounded Rectangle 3"/>
+          <p:cNvSpPr/>
+          <p:nvPr/>
+        </p:nvSpPr>
+        <p:spPr>
+          <a:xfrm>
+            <a:off x="731520" y="1600200"/>
+            <a:ext cx="10698480" cy="2468880"/>
+          </a:xfrm>
+          <a:prstGeom prst="roundRect">
+            <a:avLst>
+              <a:gd name="adj" fmla="val 3000"/>
+            </a:avLst>
+          </a:prstGeom>
+          <a:solidFill>
+            <a:srgbClr val="FFFFFF"/>
+          </a:solidFill>
+          <a:ln w="9525">
+            <a:solidFill>
+              <a:srgbClr val="DCE1E6"/>
+            </a:solidFill>
+          </a:ln>
+          <a:effectLst/>
+        </p:spPr>
+        <p:style>
+          <a:lnRef idx="1">
+            <a:schemeClr val="accent1"/>
+          </a:lnRef>
+          <a:fillRef idx="3">
+            <a:schemeClr val="accent1"/>
+          </a:fillRef>
+          <a:effectRef idx="2">
+            <a:schemeClr val="accent1"/>
+          </a:effectRef>
+          <a:fontRef idx="minor">
+            <a:schemeClr val="lt1"/>
+          </a:fontRef>
+        </p:style>
+        <p:txBody>
+          <a:bodyPr rtlCol="0" anchor="ctr"/>
+          <a:lstStyle/>
+          <a:p>
+            <a:pPr algn="ctr"/>
+          </a:p>
+        </p:txBody>
+      </p:sp>
+      <p:sp>
+        <p:nvSpPr>
+          <p:cNvPr id="5" name="TextBox 4"/>
+          <p:cNvSpPr txBox="1"/>
+          <p:nvPr/>
+        </p:nvSpPr>
+        <p:spPr>
+          <a:xfrm>
+            <a:off x="1005840" y="1828800"/>
+            <a:ext cx="10149840" cy="2011680"/>
+          </a:xfrm>
+          <a:prstGeom prst="rect">
+            <a:avLst/>
+          </a:prstGeom>
+          <a:noFill/>
+        </p:spPr>
+        <p:txBody>
+          <a:bodyPr wrap="square">
+            <a:spAutoFit/>
+          </a:bodyPr>
+          <a:lstStyle/>
+          <a:p>
+            <a:pPr>
+              <a:defRPr sz="1400" b="0">
+                <a:solidFill>
+                  <a:srgbClr val="121E31"/>
+                </a:solidFill>
+              </a:defRPr>
+            </a:pPr>
+            <a:r>
+              <a:t>•  Bouw de grafiek in Plotly express en geef hem een echte actietitel.</a:t>
+            </a:r>
+          </a:p>
+        </p:txBody>
+      </p:sp>
+      <p:sp>
+        <p:nvSpPr>
+          <p:cNvPr id="6" name="Rounded Rectangle 5"/>
+          <p:cNvSpPr/>
+          <p:nvPr/>
+        </p:nvSpPr>
+        <p:spPr>
+          <a:xfrm>
+            <a:off x="731520" y="4343400"/>
+            <a:ext cx="10698480" cy="1371600"/>
+          </a:xfrm>
+          <a:prstGeom prst="roundRect">
+            <a:avLst>
+              <a:gd name="adj" fmla="val 3000"/>
+            </a:avLst>
+          </a:prstGeom>
+          <a:solidFill>
+            <a:srgbClr val="F0F6F3"/>
+          </a:solidFill>
+          <a:ln w="9525">
+            <a:solidFill>
+              <a:srgbClr val="1B4D3E"/>
+            </a:solidFill>
+          </a:ln>
+          <a:effectLst/>
+        </p:spPr>
+        <p:style>
+          <a:lnRef idx="1">
+            <a:schemeClr val="accent1"/>
+          </a:lnRef>
+          <a:fillRef idx="3">
+            <a:schemeClr val="accent1"/>
+          </a:fillRef>
+          <a:effectRef idx="2">
+            <a:schemeClr val="accent1"/>
+          </a:effectRef>
+          <a:fontRef idx="minor">
+            <a:schemeClr val="lt1"/>
+          </a:fontRef>
+        </p:style>
+        <p:txBody>
+          <a:bodyPr rtlCol="0" anchor="ctr"/>
+          <a:lstStyle/>
+          <a:p>
+            <a:pPr algn="ctr"/>
+          </a:p>
+        </p:txBody>
+      </p:sp>
+      <p:sp>
+        <p:nvSpPr>
+          <p:cNvPr id="7" name="TextBox 6"/>
+          <p:cNvSpPr txBox="1"/>
+          <p:nvPr/>
+        </p:nvSpPr>
+        <p:spPr>
+          <a:xfrm>
+            <a:off x="1005840" y="4526280"/>
+            <a:ext cx="10149840" cy="1005840"/>
+          </a:xfrm>
+          <a:prstGeom prst="rect">
+            <a:avLst/>
+          </a:prstGeom>
+          <a:noFill/>
+        </p:spPr>
+        <p:txBody>
+          <a:bodyPr wrap="square">
+            <a:spAutoFit/>
+          </a:bodyPr>
+          <a:lstStyle/>
+          <a:p>
+            <a:pPr>
+              <a:defRPr sz="1000" b="1">
+                <a:solidFill>
+                  <a:srgbClr val="1B4D3E"/>
+                </a:solidFill>
+              </a:defRPr>
+            </a:pPr>
+            <a:r>
+              <a:t>WAT JE HIERVAN INLEVERT</a:t>
+            </a:r>
+          </a:p>
+          <a:p>
+            <a:pPr>
+              <a:spcBef>
+                <a:spcPts val="500"/>
+              </a:spcBef>
+              <a:defRPr sz="1500" b="1">
+                <a:solidFill>
+                  <a:srgbClr val="121E31"/>
+                </a:solidFill>
+              </a:defRPr>
+            </a:pPr>
+            <a:r>
+              <a:t>Een Plotly-grafiek met titel, x_label en y_label.</a:t>
+            </a:r>
+          </a:p>
+        </p:txBody>
+      </p:sp>
+    </p:spTree>
+  </p:cSld>
+  <p:clrMapOvr>
+    <a:masterClrMapping/>
+  </p:clrMapOvr>
+</p:sld>
+</file>
+
+<file path=ppt/slides/slide34.xml><?xml version="1.0" encoding="utf-8"?>
+<p:sld xmlns:a="http://schemas.openxmlformats.org/drawingml/2006/main" xmlns:p="http://schemas.openxmlformats.org/presentationml/2006/main" xmlns:r="http://schemas.openxmlformats.org/officeDocument/2006/relationships">
+  <p:cSld>
+    <p:spTree>
+      <p:nvGrpSpPr>
+        <p:cNvPr id="1" name=""/>
+        <p:cNvGrpSpPr/>
+        <p:nvPr/>
+      </p:nvGrpSpPr>
+      <p:grpSpPr/>
+      <p:sp>
+        <p:nvSpPr>
+          <p:cNvPr id="2" name="Rectangle 1"/>
+          <p:cNvSpPr/>
+          <p:nvPr/>
+        </p:nvSpPr>
+        <p:spPr>
+          <a:xfrm>
+            <a:off x="0" y="0"/>
+            <a:ext cx="12191695" cy="6858000"/>
+          </a:xfrm>
+          <a:prstGeom prst="rect">
+            <a:avLst/>
+          </a:prstGeom>
+          <a:solidFill>
+            <a:srgbClr val="F8F9FA"/>
+          </a:solidFill>
+          <a:ln>
+            <a:noFill/>
+          </a:ln>
+          <a:effectLst/>
+        </p:spPr>
+        <p:style>
+          <a:lnRef idx="1">
+            <a:schemeClr val="accent1"/>
+          </a:lnRef>
+          <a:fillRef idx="3">
+            <a:schemeClr val="accent1"/>
+          </a:fillRef>
+          <a:effectRef idx="2">
+            <a:schemeClr val="accent1"/>
+          </a:effectRef>
+          <a:fontRef idx="minor">
+            <a:schemeClr val="lt1"/>
+          </a:fontRef>
+        </p:style>
+        <p:txBody>
+          <a:bodyPr rtlCol="0" anchor="ctr"/>
+          <a:lstStyle/>
+          <a:p>
+            <a:pPr algn="ctr"/>
+          </a:p>
+        </p:txBody>
+      </p:sp>
+      <p:sp>
+        <p:nvSpPr>
+          <p:cNvPr id="3" name="TextBox 2"/>
+          <p:cNvSpPr txBox="1"/>
+          <p:nvPr/>
+        </p:nvSpPr>
+        <p:spPr>
+          <a:xfrm>
+            <a:off x="731520" y="384048"/>
+            <a:ext cx="10698480" cy="1005840"/>
+          </a:xfrm>
+          <a:prstGeom prst="rect">
+            <a:avLst/>
+          </a:prstGeom>
+          <a:noFill/>
+        </p:spPr>
+        <p:txBody>
+          <a:bodyPr wrap="square">
+            <a:spAutoFit/>
+          </a:bodyPr>
+          <a:lstStyle/>
+          <a:p>
+            <a:pPr>
+              <a:defRPr sz="1000" b="1">
+                <a:solidFill>
+                  <a:srgbClr val="1B4D3E"/>
+                </a:solidFill>
+              </a:defRPr>
+            </a:pPr>
+            <a:r>
+              <a:t>DEEL 10 · 10 MIN · HUISWERK · DE THEORIE</a:t>
+            </a:r>
+          </a:p>
+          <a:p>
+            <a:pPr>
+              <a:spcBef>
+                <a:spcPts val="400"/>
+              </a:spcBef>
+              <a:defRPr sz="2400" b="1">
+                <a:solidFill>
+                  <a:srgbClr val="121E31"/>
+                </a:solidFill>
+              </a:defRPr>
+            </a:pPr>
+            <a:r>
+              <a:t>Inleveren via de API</a:t>
+            </a:r>
+          </a:p>
+        </p:txBody>
+      </p:sp>
+      <p:sp>
+        <p:nvSpPr>
+          <p:cNvPr id="4" name="Rounded Rectangle 3"/>
+          <p:cNvSpPr/>
+          <p:nvPr/>
+        </p:nvSpPr>
+        <p:spPr>
+          <a:xfrm>
+            <a:off x="731520" y="1600200"/>
+            <a:ext cx="10698480" cy="4480560"/>
+          </a:xfrm>
+          <a:prstGeom prst="roundRect">
+            <a:avLst>
+              <a:gd name="adj" fmla="val 3000"/>
+            </a:avLst>
+          </a:prstGeom>
+          <a:solidFill>
+            <a:srgbClr val="FFFFFF"/>
+          </a:solidFill>
+          <a:ln w="9525">
+            <a:solidFill>
+              <a:srgbClr val="DCE1E6"/>
+            </a:solidFill>
+          </a:ln>
+          <a:effectLst/>
+        </p:spPr>
+        <p:style>
+          <a:lnRef idx="1">
+            <a:schemeClr val="accent1"/>
+          </a:lnRef>
+          <a:fillRef idx="3">
+            <a:schemeClr val="accent1"/>
+          </a:fillRef>
+          <a:effectRef idx="2">
+            <a:schemeClr val="accent1"/>
+          </a:effectRef>
+          <a:fontRef idx="minor">
+            <a:schemeClr val="lt1"/>
+          </a:fontRef>
+        </p:style>
+        <p:txBody>
+          <a:bodyPr rtlCol="0" anchor="ctr"/>
+          <a:lstStyle/>
+          <a:p>
+            <a:pPr algn="ctr"/>
+          </a:p>
+        </p:txBody>
+      </p:sp>
+      <p:sp>
+        <p:nvSpPr>
+          <p:cNvPr id="5" name="TextBox 4"/>
+          <p:cNvSpPr txBox="1"/>
+          <p:nvPr/>
+        </p:nvSpPr>
+        <p:spPr>
+          <a:xfrm>
+            <a:off x="1005840" y="1828800"/>
+            <a:ext cx="10149840" cy="4023360"/>
+          </a:xfrm>
+          <a:prstGeom prst="rect">
+            <a:avLst/>
+          </a:prstGeom>
+          <a:noFill/>
+        </p:spPr>
+        <p:txBody>
+          <a:bodyPr wrap="square">
+            <a:spAutoFit/>
+          </a:bodyPr>
+          <a:lstStyle/>
+          <a:p>
+            <a:pPr>
+              <a:defRPr sz="1400" b="1">
+                <a:solidFill>
+                  <a:srgbClr val="1B4D3E"/>
+                </a:solidFill>
+              </a:defRPr>
+            </a:pPr>
+            <a:r>
+              <a:t>Drie stappen</a:t>
+            </a:r>
+          </a:p>
+          <a:p>
+            <a:pPr>
+              <a:spcBef>
+                <a:spcPts val="300"/>
+              </a:spcBef>
+              <a:defRPr sz="1150" b="0">
+                <a:solidFill>
+                  <a:srgbClr val="121E31"/>
+                </a:solidFill>
+              </a:defRPr>
+            </a:pPr>
+            <a:r>
+              <a:t>Je bot-bestand inlezen, je grafiek klaarzetten met export_chart_info(), en versturen met lever_in().</a:t>
+            </a:r>
+          </a:p>
+          <a:p>
+            <a:pPr>
+              <a:spcBef>
+                <a:spcPts val="1400"/>
+              </a:spcBef>
+              <a:defRPr sz="1400" b="1">
+                <a:solidFill>
+                  <a:srgbClr val="1B4D3E"/>
+                </a:solidFill>
+              </a:defRPr>
+            </a:pPr>
+            <a:r>
+              <a:t>Wat er verandert</a:t>
+            </a:r>
+          </a:p>
+          <a:p>
+            <a:pPr>
+              <a:spcBef>
+                <a:spcPts val="300"/>
+              </a:spcBef>
+              <a:defRPr sz="1150" b="0">
+                <a:solidFill>
+                  <a:srgbClr val="121E31"/>
+                </a:solidFill>
+              </a:defRPr>
+            </a:pPr>
+            <a:r>
+              <a:t>Je bot-functie heeft nu 2 parameters in plaats van 1. Verder verandert er niets. Vanaf Week 5 komen strategie en bluf_kans erbij.</a:t>
+            </a:r>
+          </a:p>
+          <a:p>
+            <a:pPr>
+              <a:spcBef>
+                <a:spcPts val="1400"/>
+              </a:spcBef>
+              <a:defRPr sz="1400" b="1">
+                <a:solidFill>
+                  <a:srgbClr val="1B4D3E"/>
+                </a:solidFill>
+              </a:defRPr>
+            </a:pPr>
+            <a:r>
+              <a:t>geldig: False?</a:t>
+            </a:r>
+          </a:p>
+          <a:p>
+            <a:pPr>
+              <a:spcBef>
+                <a:spcPts val="300"/>
+              </a:spcBef>
+              <a:defRPr sz="1150" b="0">
+                <a:solidFill>
+                  <a:srgbClr val="121E31"/>
+                </a:solidFill>
+              </a:defRPr>
+            </a:pPr>
+            <a:r>
+              <a:t>Lees resultaat['bot_check'] en resultaat['chart_check'] — daar staat in het Nederlands wat er mis is.</a:t>
+            </a:r>
+          </a:p>
+          <a:p>
+            <a:pPr>
+              <a:spcBef>
+                <a:spcPts val="1400"/>
+              </a:spcBef>
+              <a:defRPr sz="1400" b="1">
+                <a:solidFill>
+                  <a:srgbClr val="1B4D3E"/>
+                </a:solidFill>
+              </a:defRPr>
+            </a:pPr>
+            <a:r>
+              <a:t>Zo vaak als je wil</a:t>
+            </a:r>
+          </a:p>
+          <a:p>
+            <a:pPr>
+              <a:spcBef>
+                <a:spcPts val="300"/>
+              </a:spcBef>
+              <a:defRPr sz="1150" b="0">
+                <a:solidFill>
+                  <a:srgbClr val="121E31"/>
+                </a:solidFill>
+              </a:defRPr>
+            </a:pPr>
+            <a:r>
+              <a:t>Het systeem gebruikt altijd je laatste geldige inzending.</a:t>
+            </a:r>
+          </a:p>
+        </p:txBody>
+      </p:sp>
+    </p:spTree>
+  </p:cSld>
+  <p:clrMapOvr>
+    <a:masterClrMapping/>
+  </p:clrMapOvr>
+</p:sld>
+</file>
+
+<file path=ppt/slides/slide35.xml><?xml version="1.0" encoding="utf-8"?>
+<p:sld xmlns:a="http://schemas.openxmlformats.org/drawingml/2006/main" xmlns:p="http://schemas.openxmlformats.org/presentationml/2006/main" xmlns:r="http://schemas.openxmlformats.org/officeDocument/2006/relationships">
+  <p:cSld>
+    <p:spTree>
+      <p:nvGrpSpPr>
+        <p:cNvPr id="1" name=""/>
+        <p:cNvGrpSpPr/>
+        <p:nvPr/>
+      </p:nvGrpSpPr>
+      <p:grpSpPr/>
+      <p:sp>
+        <p:nvSpPr>
+          <p:cNvPr id="2" name="Rectangle 1"/>
+          <p:cNvSpPr/>
+          <p:nvPr/>
+        </p:nvSpPr>
+        <p:spPr>
+          <a:xfrm>
+            <a:off x="0" y="0"/>
+            <a:ext cx="12191695" cy="6858000"/>
+          </a:xfrm>
+          <a:prstGeom prst="rect">
+            <a:avLst/>
+          </a:prstGeom>
+          <a:solidFill>
+            <a:srgbClr val="F8F9FA"/>
+          </a:solidFill>
+          <a:ln>
+            <a:noFill/>
+          </a:ln>
+          <a:effectLst/>
+        </p:spPr>
+        <p:style>
+          <a:lnRef idx="1">
+            <a:schemeClr val="accent1"/>
+          </a:lnRef>
+          <a:fillRef idx="3">
+            <a:schemeClr val="accent1"/>
+          </a:fillRef>
+          <a:effectRef idx="2">
+            <a:schemeClr val="accent1"/>
+          </a:effectRef>
+          <a:fontRef idx="minor">
+            <a:schemeClr val="lt1"/>
+          </a:fontRef>
+        </p:style>
+        <p:txBody>
+          <a:bodyPr rtlCol="0" anchor="ctr"/>
+          <a:lstStyle/>
+          <a:p>
+            <a:pPr algn="ctr"/>
+          </a:p>
+        </p:txBody>
+      </p:sp>
+      <p:sp>
+        <p:nvSpPr>
+          <p:cNvPr id="3" name="TextBox 2"/>
+          <p:cNvSpPr txBox="1"/>
+          <p:nvPr/>
+        </p:nvSpPr>
+        <p:spPr>
+          <a:xfrm>
+            <a:off x="731520" y="384048"/>
+            <a:ext cx="10698480" cy="1005840"/>
+          </a:xfrm>
+          <a:prstGeom prst="rect">
+            <a:avLst/>
+          </a:prstGeom>
+          <a:noFill/>
+        </p:spPr>
+        <p:txBody>
+          <a:bodyPr wrap="square">
+            <a:spAutoFit/>
+          </a:bodyPr>
+          <a:lstStyle/>
+          <a:p>
+            <a:pPr>
+              <a:defRPr sz="1000" b="1">
+                <a:solidFill>
+                  <a:srgbClr val="1B4D3E"/>
+                </a:solidFill>
+              </a:defRPr>
+            </a:pPr>
+            <a:r>
+              <a:t>DEEL 10 · 10 MIN · WAT JIJ DOET</a:t>
+            </a:r>
+          </a:p>
+          <a:p>
+            <a:pPr>
+              <a:spcBef>
+                <a:spcPts val="400"/>
+              </a:spcBef>
+              <a:defRPr sz="2400" b="1">
+                <a:solidFill>
+                  <a:srgbClr val="121E31"/>
+                </a:solidFill>
+              </a:defRPr>
+            </a:pPr>
+            <a:r>
+              <a:t>Inleveren via de API</a:t>
+            </a:r>
+          </a:p>
+        </p:txBody>
+      </p:sp>
+      <p:sp>
+        <p:nvSpPr>
+          <p:cNvPr id="4" name="Rounded Rectangle 3"/>
+          <p:cNvSpPr/>
+          <p:nvPr/>
+        </p:nvSpPr>
+        <p:spPr>
+          <a:xfrm>
+            <a:off x="731520" y="1600200"/>
+            <a:ext cx="10698480" cy="2468880"/>
+          </a:xfrm>
+          <a:prstGeom prst="roundRect">
+            <a:avLst>
+              <a:gd name="adj" fmla="val 3000"/>
+            </a:avLst>
+          </a:prstGeom>
+          <a:solidFill>
+            <a:srgbClr val="FFFFFF"/>
+          </a:solidFill>
+          <a:ln w="9525">
+            <a:solidFill>
+              <a:srgbClr val="DCE1E6"/>
+            </a:solidFill>
+          </a:ln>
+          <a:effectLst/>
+        </p:spPr>
+        <p:style>
+          <a:lnRef idx="1">
+            <a:schemeClr val="accent1"/>
+          </a:lnRef>
+          <a:fillRef idx="3">
+            <a:schemeClr val="accent1"/>
+          </a:fillRef>
+          <a:effectRef idx="2">
+            <a:schemeClr val="accent1"/>
+          </a:effectRef>
+          <a:fontRef idx="minor">
+            <a:schemeClr val="lt1"/>
+          </a:fontRef>
+        </p:style>
+        <p:txBody>
+          <a:bodyPr rtlCol="0" anchor="ctr"/>
+          <a:lstStyle/>
+          <a:p>
+            <a:pPr algn="ctr"/>
+          </a:p>
+        </p:txBody>
+      </p:sp>
+      <p:sp>
+        <p:nvSpPr>
+          <p:cNvPr id="5" name="TextBox 4"/>
+          <p:cNvSpPr txBox="1"/>
+          <p:nvPr/>
+        </p:nvSpPr>
+        <p:spPr>
+          <a:xfrm>
+            <a:off x="1005840" y="1828800"/>
+            <a:ext cx="10149840" cy="2011680"/>
+          </a:xfrm>
+          <a:prstGeom prst="rect">
+            <a:avLst/>
+          </a:prstGeom>
+          <a:noFill/>
+        </p:spPr>
+        <p:txBody>
+          <a:bodyPr wrap="square">
+            <a:spAutoFit/>
+          </a:bodyPr>
+          <a:lstStyle/>
+          <a:p>
+            <a:pPr>
+              <a:defRPr sz="1400" b="0">
+                <a:solidFill>
+                  <a:srgbClr val="121E31"/>
+                </a:solidFill>
+              </a:defRPr>
+            </a:pPr>
+            <a:r>
+              <a:t>•  Lever in, lees het antwoord, en los op wat er nog niet klopt.</a:t>
+            </a:r>
+          </a:p>
+        </p:txBody>
+      </p:sp>
+      <p:sp>
+        <p:nvSpPr>
+          <p:cNvPr id="6" name="Rounded Rectangle 5"/>
+          <p:cNvSpPr/>
+          <p:nvPr/>
+        </p:nvSpPr>
+        <p:spPr>
+          <a:xfrm>
+            <a:off x="731520" y="4343400"/>
+            <a:ext cx="10698480" cy="1371600"/>
+          </a:xfrm>
+          <a:prstGeom prst="roundRect">
+            <a:avLst>
+              <a:gd name="adj" fmla="val 3000"/>
+            </a:avLst>
+          </a:prstGeom>
+          <a:solidFill>
+            <a:srgbClr val="F0F6F3"/>
+          </a:solidFill>
+          <a:ln w="9525">
+            <a:solidFill>
+              <a:srgbClr val="1B4D3E"/>
+            </a:solidFill>
+          </a:ln>
+          <a:effectLst/>
+        </p:spPr>
+        <p:style>
+          <a:lnRef idx="1">
+            <a:schemeClr val="accent1"/>
+          </a:lnRef>
+          <a:fillRef idx="3">
+            <a:schemeClr val="accent1"/>
+          </a:fillRef>
+          <a:effectRef idx="2">
+            <a:schemeClr val="accent1"/>
+          </a:effectRef>
+          <a:fontRef idx="minor">
+            <a:schemeClr val="lt1"/>
+          </a:fontRef>
+        </p:style>
+        <p:txBody>
+          <a:bodyPr rtlCol="0" anchor="ctr"/>
+          <a:lstStyle/>
+          <a:p>
+            <a:pPr algn="ctr"/>
+          </a:p>
+        </p:txBody>
+      </p:sp>
+      <p:sp>
+        <p:nvSpPr>
+          <p:cNvPr id="7" name="TextBox 6"/>
+          <p:cNvSpPr txBox="1"/>
+          <p:nvPr/>
+        </p:nvSpPr>
+        <p:spPr>
+          <a:xfrm>
+            <a:off x="1005840" y="4526280"/>
+            <a:ext cx="10149840" cy="1005840"/>
+          </a:xfrm>
+          <a:prstGeom prst="rect">
+            <a:avLst/>
+          </a:prstGeom>
+          <a:noFill/>
+        </p:spPr>
+        <p:txBody>
+          <a:bodyPr wrap="square">
+            <a:spAutoFit/>
+          </a:bodyPr>
+          <a:lstStyle/>
+          <a:p>
+            <a:pPr>
+              <a:defRPr sz="1000" b="1">
+                <a:solidFill>
+                  <a:srgbClr val="1B4D3E"/>
+                </a:solidFill>
+              </a:defRPr>
+            </a:pPr>
+            <a:r>
+              <a:t>WAT JE HIERVAN INLEVERT</a:t>
+            </a:r>
+          </a:p>
+          <a:p>
+            <a:pPr>
+              <a:spcBef>
+                <a:spcPts val="500"/>
+              </a:spcBef>
+              <a:defRPr sz="1500" b="1">
+                <a:solidFill>
+                  <a:srgbClr val="121E31"/>
+                </a:solidFill>
+              </a:defRPr>
+            </a:pPr>
+            <a:r>
+              <a:t>Een inzending met geldig: True.</a:t>
+            </a:r>
+          </a:p>
+        </p:txBody>
+      </p:sp>
+    </p:spTree>
+  </p:cSld>
+  <p:clrMapOvr>
+    <a:masterClrMapping/>
+  </p:clrMapOvr>
+</p:sld>
+</file>
+
+<file path=ppt/slides/slide36.xml><?xml version="1.0" encoding="utf-8"?>
+<p:sld xmlns:a="http://schemas.openxmlformats.org/drawingml/2006/main" xmlns:p="http://schemas.openxmlformats.org/presentationml/2006/main" xmlns:r="http://schemas.openxmlformats.org/officeDocument/2006/relationships">
+  <p:cSld>
+    <p:spTree>
+      <p:nvGrpSpPr>
+        <p:cNvPr id="1" name=""/>
+        <p:cNvGrpSpPr/>
+        <p:nvPr/>
+      </p:nvGrpSpPr>
+      <p:grpSpPr/>
+      <p:sp>
+        <p:nvSpPr>
+          <p:cNvPr id="2" name="Rectangle 1"/>
+          <p:cNvSpPr/>
+          <p:nvPr/>
+        </p:nvSpPr>
+        <p:spPr>
+          <a:xfrm>
+            <a:off x="0" y="0"/>
+            <a:ext cx="12191695" cy="6858000"/>
+          </a:xfrm>
+          <a:prstGeom prst="rect">
+            <a:avLst/>
+          </a:prstGeom>
+          <a:solidFill>
+            <a:srgbClr val="F8F9FA"/>
+          </a:solidFill>
+          <a:ln>
+            <a:noFill/>
+          </a:ln>
+          <a:effectLst/>
+        </p:spPr>
+        <p:style>
+          <a:lnRef idx="1">
+            <a:schemeClr val="accent1"/>
+          </a:lnRef>
+          <a:fillRef idx="3">
+            <a:schemeClr val="accent1"/>
+          </a:fillRef>
+          <a:effectRef idx="2">
+            <a:schemeClr val="accent1"/>
+          </a:effectRef>
+          <a:fontRef idx="minor">
+            <a:schemeClr val="lt1"/>
+          </a:fontRef>
+        </p:style>
+        <p:txBody>
+          <a:bodyPr rtlCol="0" anchor="ctr"/>
+          <a:lstStyle/>
+          <a:p>
+            <a:pPr algn="ctr"/>
+          </a:p>
+        </p:txBody>
+      </p:sp>
+      <p:sp>
+        <p:nvSpPr>
+          <p:cNvPr id="3" name="TextBox 2"/>
+          <p:cNvSpPr txBox="1"/>
+          <p:nvPr/>
+        </p:nvSpPr>
+        <p:spPr>
+          <a:xfrm>
+            <a:off x="731520" y="384048"/>
+            <a:ext cx="10698480" cy="1005840"/>
+          </a:xfrm>
+          <a:prstGeom prst="rect">
+            <a:avLst/>
+          </a:prstGeom>
+          <a:noFill/>
+        </p:spPr>
+        <p:txBody>
+          <a:bodyPr wrap="square">
+            <a:spAutoFit/>
+          </a:bodyPr>
+          <a:lstStyle/>
+          <a:p>
+            <a:pPr>
+              <a:defRPr sz="1000" b="1">
+                <a:solidFill>
+                  <a:srgbClr val="1B4D3E"/>
+                </a:solidFill>
+              </a:defRPr>
+            </a:pPr>
+            <a:r>
+              <a:t>WERKCOLLEGE 4 · SLOT</a:t>
+            </a:r>
+          </a:p>
+          <a:p>
+            <a:pPr>
+              <a:spcBef>
+                <a:spcPts val="400"/>
+              </a:spcBef>
+              <a:defRPr sz="2400" b="1">
+                <a:solidFill>
+                  <a:srgbClr val="121E31"/>
+                </a:solidFill>
+              </a:defRPr>
+            </a:pPr>
+            <a:r>
+              <a:t>Wat lever je in, en wanneer?</a:t>
+            </a:r>
+          </a:p>
+        </p:txBody>
+      </p:sp>
+      <p:sp>
+        <p:nvSpPr>
+          <p:cNvPr id="4" name="Rounded Rectangle 3"/>
+          <p:cNvSpPr/>
+          <p:nvPr/>
+        </p:nvSpPr>
+        <p:spPr>
+          <a:xfrm>
+            <a:off x="731520" y="1600200"/>
+            <a:ext cx="10698480" cy="2743200"/>
+          </a:xfrm>
+          <a:prstGeom prst="roundRect">
+            <a:avLst>
+              <a:gd name="adj" fmla="val 3000"/>
+            </a:avLst>
+          </a:prstGeom>
+          <a:solidFill>
+            <a:srgbClr val="FFFFFF"/>
+          </a:solidFill>
+          <a:ln w="9525">
+            <a:solidFill>
+              <a:srgbClr val="DCE1E6"/>
+            </a:solidFill>
+          </a:ln>
+          <a:effectLst/>
+        </p:spPr>
+        <p:style>
+          <a:lnRef idx="1">
+            <a:schemeClr val="accent1"/>
+          </a:lnRef>
+          <a:fillRef idx="3">
+            <a:schemeClr val="accent1"/>
+          </a:fillRef>
+          <a:effectRef idx="2">
+            <a:schemeClr val="accent1"/>
+          </a:effectRef>
+          <a:fontRef idx="minor">
+            <a:schemeClr val="lt1"/>
+          </a:fontRef>
+        </p:style>
+        <p:txBody>
+          <a:bodyPr rtlCol="0" anchor="ctr"/>
+          <a:lstStyle/>
+          <a:p>
+            <a:pPr algn="ctr"/>
+          </a:p>
+        </p:txBody>
+      </p:sp>
+      <p:sp>
+        <p:nvSpPr>
+          <p:cNvPr id="5" name="TextBox 4"/>
+          <p:cNvSpPr txBox="1"/>
+          <p:nvPr/>
+        </p:nvSpPr>
+        <p:spPr>
+          <a:xfrm>
+            <a:off x="1005840" y="1828800"/>
+            <a:ext cx="10149840" cy="2286000"/>
+          </a:xfrm>
+          <a:prstGeom prst="rect">
+            <a:avLst/>
+          </a:prstGeom>
+          <a:noFill/>
+        </p:spPr>
+        <p:txBody>
+          <a:bodyPr wrap="square">
+            <a:spAutoFit/>
+          </a:bodyPr>
+          <a:lstStyle/>
+          <a:p>
+            <a:pPr>
+              <a:defRPr sz="1600" b="1">
+                <a:solidFill>
+                  <a:srgbClr val="1B4D3E"/>
+                </a:solidFill>
+              </a:defRPr>
+            </a:pPr>
+            <a:r>
+              <a:t>wo 09:00</a:t>
+            </a:r>
+          </a:p>
+          <a:p>
+            <a:pPr>
+              <a:spcBef>
+                <a:spcPts val="300"/>
+              </a:spcBef>
+              <a:defRPr sz="1300" b="0">
+                <a:solidFill>
+                  <a:srgbClr val="121E31"/>
+                </a:solidFill>
+              </a:defRPr>
+            </a:pPr>
+            <a:r>
+              <a:t>Een werkende Bot v2 — anders speel je niet mee in het toernooi van woensdag</a:t>
+            </a:r>
+          </a:p>
+          <a:p>
+            <a:pPr>
+              <a:spcBef>
+                <a:spcPts val="1600"/>
+              </a:spcBef>
+              <a:defRPr sz="1600" b="1">
+                <a:solidFill>
+                  <a:srgbClr val="1B4D3E"/>
+                </a:solidFill>
+              </a:defRPr>
+            </a:pPr>
+            <a:r>
+              <a:t>wo werkcollege</a:t>
+            </a:r>
+          </a:p>
+          <a:p>
+            <a:pPr>
+              <a:spcBef>
+                <a:spcPts val="300"/>
+              </a:spcBef>
+              <a:defRPr sz="1300" b="0">
+                <a:solidFill>
+                  <a:srgbClr val="121E31"/>
+                </a:solidFill>
+              </a:defRPr>
+            </a:pPr>
+            <a:r>
+              <a:t>Je ziet de uitslag terug in Werkcollege 5</a:t>
+            </a:r>
+          </a:p>
+          <a:p>
+            <a:pPr>
+              <a:spcBef>
+                <a:spcPts val="1600"/>
+              </a:spcBef>
+              <a:defRPr sz="1600" b="1">
+                <a:solidFill>
+                  <a:srgbClr val="1B4D3E"/>
+                </a:solidFill>
+              </a:defRPr>
+            </a:pPr>
+            <a:r>
+              <a:t>do 18:00</a:t>
+            </a:r>
+          </a:p>
+          <a:p>
+            <a:pPr>
+              <a:spcBef>
+                <a:spcPts val="300"/>
+              </a:spcBef>
+              <a:defRPr sz="1300" b="0">
+                <a:solidFill>
+                  <a:srgbClr val="121E31"/>
+                </a:solidFill>
+              </a:defRPr>
+            </a:pPr>
+            <a:r>
+              <a:t>Je verbeterde Bot v2, plus de Plotly-grafiek, plus het onderwerp van Case 2</a:t>
+            </a:r>
+          </a:p>
+        </p:txBody>
+      </p:sp>
+      <p:sp>
+        <p:nvSpPr>
+          <p:cNvPr id="6" name="Rounded Rectangle 5"/>
+          <p:cNvSpPr/>
+          <p:nvPr/>
+        </p:nvSpPr>
+        <p:spPr>
+          <a:xfrm>
+            <a:off x="731520" y="4617720"/>
+            <a:ext cx="10698480" cy="1188720"/>
+          </a:xfrm>
+          <a:prstGeom prst="roundRect">
+            <a:avLst>
+              <a:gd name="adj" fmla="val 3000"/>
+            </a:avLst>
+          </a:prstGeom>
+          <a:solidFill>
+            <a:srgbClr val="FCF2F1"/>
+          </a:solidFill>
+          <a:ln w="9525">
+            <a:solidFill>
+              <a:srgbClr val="B3261E"/>
+            </a:solidFill>
+          </a:ln>
+          <a:effectLst/>
+        </p:spPr>
+        <p:style>
+          <a:lnRef idx="1">
+            <a:schemeClr val="accent1"/>
+          </a:lnRef>
+          <a:fillRef idx="3">
+            <a:schemeClr val="accent1"/>
+          </a:fillRef>
+          <a:effectRef idx="2">
+            <a:schemeClr val="accent1"/>
+          </a:effectRef>
+          <a:fontRef idx="minor">
+            <a:schemeClr val="lt1"/>
+          </a:fontRef>
+        </p:style>
+        <p:txBody>
+          <a:bodyPr rtlCol="0" anchor="ctr"/>
+          <a:lstStyle/>
+          <a:p>
+            <a:pPr algn="ctr"/>
+          </a:p>
+        </p:txBody>
+      </p:sp>
+      <p:sp>
+        <p:nvSpPr>
+          <p:cNvPr id="7" name="TextBox 6"/>
+          <p:cNvSpPr txBox="1"/>
+          <p:nvPr/>
+        </p:nvSpPr>
+        <p:spPr>
+          <a:xfrm>
+            <a:off x="1005840" y="4800600"/>
+            <a:ext cx="10149840" cy="822960"/>
+          </a:xfrm>
+          <a:prstGeom prst="rect">
+            <a:avLst/>
+          </a:prstGeom>
+          <a:noFill/>
+        </p:spPr>
+        <p:txBody>
+          <a:bodyPr wrap="square">
+            <a:spAutoFit/>
+          </a:bodyPr>
+          <a:lstStyle/>
+          <a:p>
+            <a:pPr>
+              <a:defRPr sz="1200" b="1">
+                <a:solidFill>
+                  <a:srgbClr val="B3261E"/>
+                </a:solidFill>
+              </a:defRPr>
+            </a:pPr>
+            <a:r>
+              <a:t>De deadline handhaaft zichzelf</a:t>
+            </a:r>
+          </a:p>
+          <a:p>
+            <a:pPr>
+              <a:spcBef>
+                <a:spcPts val="400"/>
+              </a:spcBef>
+              <a:defRPr sz="1200" b="0">
+                <a:solidFill>
+                  <a:srgbClr val="121E31"/>
+                </a:solidFill>
+              </a:defRPr>
+            </a:pPr>
+            <a:r>
+              <a:t>Een toernooi speelt met de bots die er op dat moment zijn. Lever je woensdagmiddag in, dan doe je niet mee aan het woensdagtoernooi.</a:t>
+            </a:r>
+          </a:p>
+        </p:txBody>
+      </p:sp>
+    </p:spTree>
+  </p:cSld>
+  <p:clrMapOvr>
+    <a:masterClrMapping/>
+  </p:clrMapOvr>
+</p:sld>
+</file>
+
 <file path=ppt/slides/slide4.xml><?xml version="1.0" encoding="utf-8"?>
 <p:sld xmlns:a="http://schemas.openxmlformats.org/drawingml/2006/main" xmlns:p="http://schemas.openxmlformats.org/presentationml/2006/main" xmlns:r="http://schemas.openxmlformats.org/officeDocument/2006/relationships">
   <p:cSld>
@@ -9042,7 +13086,7 @@
               </a:defRPr>
             </a:pPr>
             <a:r>
-              <a:t>DEEL 2 · 16 MIN · WAT JIJ DOET</a:t>
+              <a:t>DEEL 2 · DE SPELREGELS</a:t>
             </a:r>
           </a:p>
           <a:p>
@@ -9057,59 +13101,35 @@
               </a:defRPr>
             </a:pPr>
             <a:r>
-              <a:t>Pokerbot Upgrade: hoe het spel écht werkt</a:t>
-            </a:r>
-          </a:p>
-        </p:txBody>
-      </p:sp>
-      <p:sp>
-        <p:nvSpPr>
-          <p:cNvPr id="4" name="Rounded Rectangle 3"/>
-          <p:cNvSpPr/>
-          <p:nvPr/>
-        </p:nvSpPr>
-        <p:spPr>
-          <a:xfrm>
-            <a:off x="731520" y="1600200"/>
-            <a:ext cx="10698480" cy="2468880"/>
-          </a:xfrm>
-          <a:prstGeom prst="roundRect">
-            <a:avLst>
-              <a:gd name="adj" fmla="val 3000"/>
-            </a:avLst>
-          </a:prstGeom>
-          <a:solidFill>
-            <a:srgbClr val="FFFFFF"/>
-          </a:solidFill>
-          <a:ln w="9525">
-            <a:solidFill>
-              <a:srgbClr val="DCE1E6"/>
-            </a:solidFill>
-          </a:ln>
-          <a:effectLst/>
-        </p:spPr>
-        <p:style>
-          <a:lnRef idx="1">
-            <a:schemeClr val="accent1"/>
-          </a:lnRef>
-          <a:fillRef idx="3">
-            <a:schemeClr val="accent1"/>
-          </a:fillRef>
-          <a:effectRef idx="2">
-            <a:schemeClr val="accent1"/>
-          </a:effectRef>
-          <a:fontRef idx="minor">
-            <a:schemeClr val="lt1"/>
-          </a:fontRef>
-        </p:style>
-        <p:txBody>
-          <a:bodyPr rtlCol="0" anchor="ctr"/>
-          <a:lstStyle/>
-          <a:p>
-            <a:pPr algn="ctr"/>
-          </a:p>
-        </p:txBody>
-      </p:sp>
+              <a:t>Twee kaarten van jezelf, vijf van de tafel</a:t>
+            </a:r>
+          </a:p>
+        </p:txBody>
+      </p:sp>
+      <p:pic>
+        <p:nvPicPr>
+          <p:cNvPr id="4" name="Picture 3" descr="hole_cards.png"/>
+          <p:cNvPicPr>
+            <a:picLocks noChangeAspect="1"/>
+          </p:cNvPicPr>
+          <p:nvPr/>
+        </p:nvPicPr>
+        <p:blipFill>
+          <a:blip r:embed="rId2"/>
+          <a:stretch>
+            <a:fillRect/>
+          </a:stretch>
+        </p:blipFill>
+        <p:spPr>
+          <a:xfrm>
+            <a:off x="746607" y="1554480"/>
+            <a:ext cx="10698480" cy="2965291"/>
+          </a:xfrm>
+          <a:prstGeom prst="rect">
+            <a:avLst/>
+          </a:prstGeom>
+        </p:spPr>
+      </p:pic>
       <p:sp>
         <p:nvSpPr>
           <p:cNvPr id="5" name="TextBox 4"/>
@@ -9118,8 +13138,8 @@
         </p:nvSpPr>
         <p:spPr>
           <a:xfrm>
-            <a:off x="1005840" y="1828800"/>
-            <a:ext cx="10149840" cy="2011680"/>
+            <a:off x="1005840" y="5852160"/>
+            <a:ext cx="10149840" cy="777240"/>
           </a:xfrm>
           <a:prstGeom prst="rect">
             <a:avLst/>
@@ -9133,127 +13153,14 @@
           <a:lstStyle/>
           <a:p>
             <a:pPr>
-              <a:defRPr sz="1400" b="0">
+              <a:defRPr sz="1250" b="0">
                 <a:solidFill>
                   <a:srgbClr val="121E31"/>
                 </a:solidFill>
               </a:defRPr>
             </a:pPr>
             <a:r>
-              <a:t>•  Live demo van één hand, en daarna bouw je zelf een rondje op in code.</a:t>
-            </a:r>
-          </a:p>
-          <a:p>
-            <a:pPr>
-              <a:spcBef>
-                <a:spcPts val="1200"/>
-              </a:spcBef>
-              <a:defRPr sz="1400" b="0">
-                <a:solidFill>
-                  <a:srgbClr val="121E31"/>
-                </a:solidFill>
-              </a:defRPr>
-            </a:pPr>
-            <a:r>
-              <a:t>•  Let op de raise-regel: maximaal twee raises per straat.</a:t>
-            </a:r>
-          </a:p>
-        </p:txBody>
-      </p:sp>
-      <p:sp>
-        <p:nvSpPr>
-          <p:cNvPr id="6" name="Rounded Rectangle 5"/>
-          <p:cNvSpPr/>
-          <p:nvPr/>
-        </p:nvSpPr>
-        <p:spPr>
-          <a:xfrm>
-            <a:off x="731520" y="4343400"/>
-            <a:ext cx="10698480" cy="1371600"/>
-          </a:xfrm>
-          <a:prstGeom prst="roundRect">
-            <a:avLst>
-              <a:gd name="adj" fmla="val 3000"/>
-            </a:avLst>
-          </a:prstGeom>
-          <a:solidFill>
-            <a:srgbClr val="F0F6F3"/>
-          </a:solidFill>
-          <a:ln w="9525">
-            <a:solidFill>
-              <a:srgbClr val="1B4D3E"/>
-            </a:solidFill>
-          </a:ln>
-          <a:effectLst/>
-        </p:spPr>
-        <p:style>
-          <a:lnRef idx="1">
-            <a:schemeClr val="accent1"/>
-          </a:lnRef>
-          <a:fillRef idx="3">
-            <a:schemeClr val="accent1"/>
-          </a:fillRef>
-          <a:effectRef idx="2">
-            <a:schemeClr val="accent1"/>
-          </a:effectRef>
-          <a:fontRef idx="minor">
-            <a:schemeClr val="lt1"/>
-          </a:fontRef>
-        </p:style>
-        <p:txBody>
-          <a:bodyPr rtlCol="0" anchor="ctr"/>
-          <a:lstStyle/>
-          <a:p>
-            <a:pPr algn="ctr"/>
-          </a:p>
-        </p:txBody>
-      </p:sp>
-      <p:sp>
-        <p:nvSpPr>
-          <p:cNvPr id="7" name="TextBox 6"/>
-          <p:cNvSpPr txBox="1"/>
-          <p:nvPr/>
-        </p:nvSpPr>
-        <p:spPr>
-          <a:xfrm>
-            <a:off x="1005840" y="4526280"/>
-            <a:ext cx="10149840" cy="1005840"/>
-          </a:xfrm>
-          <a:prstGeom prst="rect">
-            <a:avLst/>
-          </a:prstGeom>
-          <a:noFill/>
-        </p:spPr>
-        <p:txBody>
-          <a:bodyPr wrap="square">
-            <a:spAutoFit/>
-          </a:bodyPr>
-          <a:lstStyle/>
-          <a:p>
-            <a:pPr>
-              <a:defRPr sz="1000" b="1">
-                <a:solidFill>
-                  <a:srgbClr val="1B4D3E"/>
-                </a:solidFill>
-              </a:defRPr>
-            </a:pPr>
-            <a:r>
-              <a:t>WAT JE HIERVAN INLEVERT</a:t>
-            </a:r>
-          </a:p>
-          <a:p>
-            <a:pPr>
-              <a:spcBef>
-                <a:spcPts val="500"/>
-              </a:spcBef>
-              <a:defRPr sz="1500" b="1">
-                <a:solidFill>
-                  <a:srgbClr val="121E31"/>
-                </a:solidFill>
-              </a:defRPr>
-            </a:pPr>
-            <a:r>
-              <a:t>Niets — dit is de uitleg waar Deel 3 op verder bouwt.</a:t>
+              <a:t>Jouw twee hole cards zijn privé. Wat de anderen hebben weet je niet — je schat het. Dat schatten is waar Deel 5 over gaat.</a:t>
             </a:r>
           </a:p>
         </p:txBody>
@@ -9350,7 +13257,7 @@
               </a:defRPr>
             </a:pPr>
             <a:r>
-              <a:t>DEEL 3 · 12 MIN · DE THEORIE</a:t>
+              <a:t>DEEL 2 · DE SPELREGELS</a:t>
             </a:r>
           </a:p>
           <a:p>
@@ -9365,59 +13272,35 @@
               </a:defRPr>
             </a:pPr>
             <a:r>
-              <a:t>Zelf starten: Bot v2 skeleton</a:t>
-            </a:r>
-          </a:p>
-        </p:txBody>
-      </p:sp>
-      <p:sp>
-        <p:nvSpPr>
-          <p:cNvPr id="4" name="Rounded Rectangle 3"/>
-          <p:cNvSpPr/>
-          <p:nvPr/>
-        </p:nvSpPr>
-        <p:spPr>
-          <a:xfrm>
-            <a:off x="731520" y="1600200"/>
-            <a:ext cx="10698480" cy="4480560"/>
-          </a:xfrm>
-          <a:prstGeom prst="roundRect">
-            <a:avLst>
-              <a:gd name="adj" fmla="val 3000"/>
-            </a:avLst>
-          </a:prstGeom>
-          <a:solidFill>
-            <a:srgbClr val="FFFFFF"/>
-          </a:solidFill>
-          <a:ln w="9525">
-            <a:solidFill>
-              <a:srgbClr val="DCE1E6"/>
-            </a:solidFill>
-          </a:ln>
-          <a:effectLst/>
-        </p:spPr>
-        <p:style>
-          <a:lnRef idx="1">
-            <a:schemeClr val="accent1"/>
-          </a:lnRef>
-          <a:fillRef idx="3">
-            <a:schemeClr val="accent1"/>
-          </a:fillRef>
-          <a:effectRef idx="2">
-            <a:schemeClr val="accent1"/>
-          </a:effectRef>
-          <a:fontRef idx="minor">
-            <a:schemeClr val="lt1"/>
-          </a:fontRef>
-        </p:style>
-        <p:txBody>
-          <a:bodyPr rtlCol="0" anchor="ctr"/>
-          <a:lstStyle/>
-          <a:p>
-            <a:pPr algn="ctr"/>
-          </a:p>
-        </p:txBody>
-      </p:sp>
+              <a:t>Er ligt al geld in de pot voordat iemand kiest</a:t>
+            </a:r>
+          </a:p>
+        </p:txBody>
+      </p:sp>
+      <p:pic>
+        <p:nvPicPr>
+          <p:cNvPr id="4" name="Picture 3" descr="tafel.png"/>
+          <p:cNvPicPr>
+            <a:picLocks noChangeAspect="1"/>
+          </p:cNvPicPr>
+          <p:nvPr/>
+        </p:nvPicPr>
+        <p:blipFill>
+          <a:blip r:embed="rId2"/>
+          <a:stretch>
+            <a:fillRect/>
+          </a:stretch>
+        </p:blipFill>
+        <p:spPr>
+          <a:xfrm>
+            <a:off x="3364994" y="1554480"/>
+            <a:ext cx="5461706" cy="4069080"/>
+          </a:xfrm>
+          <a:prstGeom prst="rect">
+            <a:avLst/>
+          </a:prstGeom>
+        </p:spPr>
+      </p:pic>
       <p:sp>
         <p:nvSpPr>
           <p:cNvPr id="5" name="TextBox 4"/>
@@ -9426,8 +13309,8 @@
         </p:nvSpPr>
         <p:spPr>
           <a:xfrm>
-            <a:off x="1005840" y="1828800"/>
-            <a:ext cx="10149840" cy="4023360"/>
+            <a:off x="1005840" y="5852160"/>
+            <a:ext cx="10149840" cy="777240"/>
           </a:xfrm>
           <a:prstGeom prst="rect">
             <a:avLst/>
@@ -9441,89 +13324,14 @@
           <a:lstStyle/>
           <a:p>
             <a:pPr>
-              <a:defRPr sz="1400" b="1">
-                <a:solidFill>
-                  <a:srgbClr val="1B4D3E"/>
-                </a:solidFill>
-              </a:defRPr>
-            </a:pPr>
-            <a:r>
-              <a:t>Van één naar twee parameters</a:t>
-            </a:r>
-          </a:p>
-          <a:p>
-            <a:pPr>
-              <a:spcBef>
-                <a:spcPts val="300"/>
-              </a:spcBef>
-              <a:defRPr sz="1150" b="0">
+              <a:defRPr sz="1250" b="0">
                 <a:solidFill>
                   <a:srgbClr val="121E31"/>
                 </a:solidFill>
               </a:defRPr>
             </a:pPr>
             <a:r>
-              <a:t>Bot v1 kende alleen je hand. Bot v2 krijgt je stack erbij: hoeveel risico kun je je veroorloven?</a:t>
-            </a:r>
-          </a:p>
-          <a:p>
-            <a:pPr>
-              <a:spcBef>
-                <a:spcPts val="1400"/>
-              </a:spcBef>
-              <a:defRPr sz="1400" b="1">
-                <a:solidFill>
-                  <a:srgbClr val="1B4D3E"/>
-                </a:solidFill>
-              </a:defRPr>
-            </a:pPr>
-            <a:r>
-              <a:t>Een patroon, geen voorschrift</a:t>
-            </a:r>
-          </a:p>
-          <a:p>
-            <a:pPr>
-              <a:spcBef>
-                <a:spcPts val="300"/>
-              </a:spcBef>
-              <a:defRPr sz="1150" b="0">
-                <a:solidFill>
-                  <a:srgbClr val="121E31"/>
-                </a:solidFill>
-              </a:defRPr>
-            </a:pPr>
-            <a:r>
-              <a:t>stack &gt; 700 kun je wachten of druk zetten; 300–700 normaal spelen; onder 300 korte-stack-modus. Bedenk je eigen getallen.</a:t>
-            </a:r>
-          </a:p>
-          <a:p>
-            <a:pPr>
-              <a:spcBef>
-                <a:spcPts val="1400"/>
-              </a:spcBef>
-              <a:defRPr sz="1400" b="1">
-                <a:solidFill>
-                  <a:srgbClr val="1B4D3E"/>
-                </a:solidFill>
-              </a:defRPr>
-            </a:pPr>
-            <a:r>
-              <a:t>Vier acties</a:t>
-            </a:r>
-          </a:p>
-          <a:p>
-            <a:pPr>
-              <a:spcBef>
-                <a:spcPts val="300"/>
-              </a:spcBef>
-              <a:defRPr sz="1150" b="0">
-                <a:solidFill>
-                  <a:srgbClr val="121E31"/>
-                </a:solidFill>
-              </a:defRPr>
-            </a:pPr>
-            <a:r>
-              <a:t>fold, call, raise, all_in. Wat elke actie doet staat in Deel 2.</a:t>
+              <a:t>Twee spelers leggen verplicht in: de small blind en de big blind, twee keer zo groot. Daarom is folden nooit gratis.</a:t>
             </a:r>
           </a:p>
         </p:txBody>
@@ -9620,7 +13428,7 @@
               </a:defRPr>
             </a:pPr>
             <a:r>
-              <a:t>DEEL 3 · 12 MIN · WAT JIJ DOET</a:t>
+              <a:t>DEEL 2 · DE SPELREGELS</a:t>
             </a:r>
           </a:p>
           <a:p>
@@ -9635,59 +13443,35 @@
               </a:defRPr>
             </a:pPr>
             <a:r>
-              <a:t>Zelf starten: Bot v2 skeleton</a:t>
-            </a:r>
-          </a:p>
-        </p:txBody>
-      </p:sp>
-      <p:sp>
-        <p:nvSpPr>
-          <p:cNvPr id="4" name="Rounded Rectangle 3"/>
-          <p:cNvSpPr/>
-          <p:nvPr/>
-        </p:nvSpPr>
-        <p:spPr>
-          <a:xfrm>
-            <a:off x="731520" y="1600200"/>
-            <a:ext cx="10698480" cy="2468880"/>
-          </a:xfrm>
-          <a:prstGeom prst="roundRect">
-            <a:avLst>
-              <a:gd name="adj" fmla="val 3000"/>
-            </a:avLst>
-          </a:prstGeom>
-          <a:solidFill>
-            <a:srgbClr val="FFFFFF"/>
-          </a:solidFill>
-          <a:ln w="9525">
-            <a:solidFill>
-              <a:srgbClr val="DCE1E6"/>
-            </a:solidFill>
-          </a:ln>
-          <a:effectLst/>
-        </p:spPr>
-        <p:style>
-          <a:lnRef idx="1">
-            <a:schemeClr val="accent1"/>
-          </a:lnRef>
-          <a:fillRef idx="3">
-            <a:schemeClr val="accent1"/>
-          </a:fillRef>
-          <a:effectRef idx="2">
-            <a:schemeClr val="accent1"/>
-          </a:effectRef>
-          <a:fontRef idx="minor">
-            <a:schemeClr val="lt1"/>
-          </a:fontRef>
-        </p:style>
-        <p:txBody>
-          <a:bodyPr rtlCol="0" anchor="ctr"/>
-          <a:lstStyle/>
-          <a:p>
-            <a:pPr algn="ctr"/>
-          </a:p>
-        </p:txBody>
-      </p:sp>
+              <a:t>Vier straten, vier keer bieden</a:t>
+            </a:r>
+          </a:p>
+        </p:txBody>
+      </p:sp>
+      <p:pic>
+        <p:nvPicPr>
+          <p:cNvPr id="4" name="Picture 3" descr="straten.png"/>
+          <p:cNvPicPr>
+            <a:picLocks noChangeAspect="1"/>
+          </p:cNvPicPr>
+          <p:nvPr/>
+        </p:nvPicPr>
+        <p:blipFill>
+          <a:blip r:embed="rId2"/>
+          <a:stretch>
+            <a:fillRect/>
+          </a:stretch>
+        </p:blipFill>
+        <p:spPr>
+          <a:xfrm>
+            <a:off x="2693161" y="1554480"/>
+            <a:ext cx="6805373" cy="4069080"/>
+          </a:xfrm>
+          <a:prstGeom prst="rect">
+            <a:avLst/>
+          </a:prstGeom>
+        </p:spPr>
+      </p:pic>
       <p:sp>
         <p:nvSpPr>
           <p:cNvPr id="5" name="TextBox 4"/>
@@ -9696,8 +13480,8 @@
         </p:nvSpPr>
         <p:spPr>
           <a:xfrm>
-            <a:off x="1005840" y="1828800"/>
-            <a:ext cx="10149840" cy="2011680"/>
+            <a:off x="1005840" y="5852160"/>
+            <a:ext cx="10149840" cy="777240"/>
           </a:xfrm>
           <a:prstGeom prst="rect">
             <a:avLst/>
@@ -9711,127 +13495,14 @@
           <a:lstStyle/>
           <a:p>
             <a:pPr>
-              <a:defRPr sz="1400" b="0">
+              <a:defRPr sz="1250" b="0">
                 <a:solidFill>
                   <a:srgbClr val="121E31"/>
                 </a:solidFill>
               </a:defRPr>
             </a:pPr>
             <a:r>
-              <a:t>•  Schrijf kies_actie(hand, stack) in mijn_bot_week3.py.</a:t>
-            </a:r>
-          </a:p>
-          <a:p>
-            <a:pPr>
-              <a:spcBef>
-                <a:spcPts val="1200"/>
-              </a:spcBef>
-              <a:defRPr sz="1400" b="0">
-                <a:solidFill>
-                  <a:srgbClr val="121E31"/>
-                </a:solidFill>
-              </a:defRPr>
-            </a:pPr>
-            <a:r>
-              <a:t>•  Bouw hem stap voor stap op: eerst de hand, dan de stack erbij.</a:t>
-            </a:r>
-          </a:p>
-        </p:txBody>
-      </p:sp>
-      <p:sp>
-        <p:nvSpPr>
-          <p:cNvPr id="6" name="Rounded Rectangle 5"/>
-          <p:cNvSpPr/>
-          <p:nvPr/>
-        </p:nvSpPr>
-        <p:spPr>
-          <a:xfrm>
-            <a:off x="731520" y="4343400"/>
-            <a:ext cx="10698480" cy="1371600"/>
-          </a:xfrm>
-          <a:prstGeom prst="roundRect">
-            <a:avLst>
-              <a:gd name="adj" fmla="val 3000"/>
-            </a:avLst>
-          </a:prstGeom>
-          <a:solidFill>
-            <a:srgbClr val="F0F6F3"/>
-          </a:solidFill>
-          <a:ln w="9525">
-            <a:solidFill>
-              <a:srgbClr val="1B4D3E"/>
-            </a:solidFill>
-          </a:ln>
-          <a:effectLst/>
-        </p:spPr>
-        <p:style>
-          <a:lnRef idx="1">
-            <a:schemeClr val="accent1"/>
-          </a:lnRef>
-          <a:fillRef idx="3">
-            <a:schemeClr val="accent1"/>
-          </a:fillRef>
-          <a:effectRef idx="2">
-            <a:schemeClr val="accent1"/>
-          </a:effectRef>
-          <a:fontRef idx="minor">
-            <a:schemeClr val="lt1"/>
-          </a:fontRef>
-        </p:style>
-        <p:txBody>
-          <a:bodyPr rtlCol="0" anchor="ctr"/>
-          <a:lstStyle/>
-          <a:p>
-            <a:pPr algn="ctr"/>
-          </a:p>
-        </p:txBody>
-      </p:sp>
-      <p:sp>
-        <p:nvSpPr>
-          <p:cNvPr id="7" name="TextBox 6"/>
-          <p:cNvSpPr txBox="1"/>
-          <p:nvPr/>
-        </p:nvSpPr>
-        <p:spPr>
-          <a:xfrm>
-            <a:off x="1005840" y="4526280"/>
-            <a:ext cx="10149840" cy="1005840"/>
-          </a:xfrm>
-          <a:prstGeom prst="rect">
-            <a:avLst/>
-          </a:prstGeom>
-          <a:noFill/>
-        </p:spPr>
-        <p:txBody>
-          <a:bodyPr wrap="square">
-            <a:spAutoFit/>
-          </a:bodyPr>
-          <a:lstStyle/>
-          <a:p>
-            <a:pPr>
-              <a:defRPr sz="1000" b="1">
-                <a:solidFill>
-                  <a:srgbClr val="1B4D3E"/>
-                </a:solidFill>
-              </a:defRPr>
-            </a:pPr>
-            <a:r>
-              <a:t>WAT JE HIERVAN INLEVERT</a:t>
-            </a:r>
-          </a:p>
-          <a:p>
-            <a:pPr>
-              <a:spcBef>
-                <a:spcPts val="500"/>
-              </a:spcBef>
-              <a:defRPr sz="1500" b="1">
-                <a:solidFill>
-                  <a:srgbClr val="121E31"/>
-                </a:solidFill>
-              </a:defRPr>
-            </a:pPr>
-            <a:r>
-              <a:t>Een werkend skeleton — de rest van de week maak je hem beter.</a:t>
+              <a:t>preflop → flop → turn → river. Na elke straat wordt er opnieuw geboden, dus je bot beslist vier keer per hand.</a:t>
             </a:r>
           </a:p>
         </p:txBody>
@@ -9928,7 +13599,7 @@
               </a:defRPr>
             </a:pPr>
             <a:r>
-              <a:t>DEEL 4 · 14 MIN · DE THEORIE</a:t>
+              <a:t>DEEL 2 · DE SPELREGELS</a:t>
             </a:r>
           </a:p>
           <a:p>
@@ -9943,59 +13614,35 @@
               </a:defRPr>
             </a:pPr>
             <a:r>
-              <a:t>Handsterkte: wat wint er eigenlijk?</a:t>
-            </a:r>
-          </a:p>
-        </p:txBody>
-      </p:sp>
-      <p:sp>
-        <p:nvSpPr>
-          <p:cNvPr id="4" name="Rounded Rectangle 3"/>
-          <p:cNvSpPr/>
-          <p:nvPr/>
-        </p:nvSpPr>
-        <p:spPr>
-          <a:xfrm>
-            <a:off x="731520" y="1600200"/>
-            <a:ext cx="10698480" cy="4480560"/>
-          </a:xfrm>
-          <a:prstGeom prst="roundRect">
-            <a:avLst>
-              <a:gd name="adj" fmla="val 3000"/>
-            </a:avLst>
-          </a:prstGeom>
-          <a:solidFill>
-            <a:srgbClr val="FFFFFF"/>
-          </a:solidFill>
-          <a:ln w="9525">
-            <a:solidFill>
-              <a:srgbClr val="DCE1E6"/>
-            </a:solidFill>
-          </a:ln>
-          <a:effectLst/>
-        </p:spPr>
-        <p:style>
-          <a:lnRef idx="1">
-            <a:schemeClr val="accent1"/>
-          </a:lnRef>
-          <a:fillRef idx="3">
-            <a:schemeClr val="accent1"/>
-          </a:fillRef>
-          <a:effectRef idx="2">
-            <a:schemeClr val="accent1"/>
-          </a:effectRef>
-          <a:fontRef idx="minor">
-            <a:schemeClr val="lt1"/>
-          </a:fontRef>
-        </p:style>
-        <p:txBody>
-          <a:bodyPr rtlCol="0" anchor="ctr"/>
-          <a:lstStyle/>
-          <a:p>
-            <a:pPr algn="ctr"/>
-          </a:p>
-        </p:txBody>
-      </p:sp>
+              <a:t>Waarom twee kaarten niet genoeg zijn</a:t>
+            </a:r>
+          </a:p>
+        </p:txBody>
+      </p:sp>
+      <p:pic>
+        <p:nvPicPr>
+          <p:cNvPr id="4" name="Picture 3" descr="handverloop.png"/>
+          <p:cNvPicPr>
+            <a:picLocks noChangeAspect="1"/>
+          </p:cNvPicPr>
+          <p:nvPr/>
+        </p:nvPicPr>
+        <p:blipFill>
+          <a:blip r:embed="rId2"/>
+          <a:stretch>
+            <a:fillRect/>
+          </a:stretch>
+        </p:blipFill>
+        <p:spPr>
+          <a:xfrm>
+            <a:off x="1825300" y="1554480"/>
+            <a:ext cx="8541095" cy="4069080"/>
+          </a:xfrm>
+          <a:prstGeom prst="rect">
+            <a:avLst/>
+          </a:prstGeom>
+        </p:spPr>
+      </p:pic>
       <p:sp>
         <p:nvSpPr>
           <p:cNvPr id="5" name="TextBox 4"/>
@@ -10004,8 +13651,8 @@
         </p:nvSpPr>
         <p:spPr>
           <a:xfrm>
-            <a:off x="1005840" y="1828800"/>
-            <a:ext cx="10149840" cy="4023360"/>
+            <a:off x="1005840" y="5852160"/>
+            <a:ext cx="10149840" cy="777240"/>
           </a:xfrm>
           <a:prstGeom prst="rect">
             <a:avLst/>
@@ -10019,89 +13666,14 @@
           <a:lstStyle/>
           <a:p>
             <a:pPr>
-              <a:defRPr sz="1400" b="1">
-                <a:solidFill>
-                  <a:srgbClr val="1B4D3E"/>
-                </a:solidFill>
-              </a:defRPr>
-            </a:pPr>
-            <a:r>
-              <a:t>Negen soorten</a:t>
-            </a:r>
-          </a:p>
-          <a:p>
-            <a:pPr>
-              <a:spcBef>
-                <a:spcPts val="300"/>
-              </a:spcBef>
-              <a:defRPr sz="1150" b="0">
+              <a:defRPr sz="1250" b="0">
                 <a:solidFill>
                   <a:srgbClr val="121E31"/>
                 </a:solidFill>
               </a:defRPr>
             </a:pPr>
             <a:r>
-              <a:t>hoge kaart · één paar · twee paar · three of a kind · straat · flush · full house · four of a kind · straight flush.</a:t>
-            </a:r>
-          </a:p>
-          <a:p>
-            <a:pPr>
-              <a:spcBef>
-                <a:spcPts val="1400"/>
-              </a:spcBef>
-              <a:defRPr sz="1400" b="1">
-                <a:solidFill>
-                  <a:srgbClr val="1B4D3E"/>
-                </a:solidFill>
-              </a:defRPr>
-            </a:pPr>
-            <a:r>
-              <a:t>Vijf uit zeven</a:t>
-            </a:r>
-          </a:p>
-          <a:p>
-            <a:pPr>
-              <a:spcBef>
-                <a:spcPts val="300"/>
-              </a:spcBef>
-              <a:defRPr sz="1150" b="0">
-                <a:solidFill>
-                  <a:srgbClr val="121E31"/>
-                </a:solidFill>
-              </a:defRPr>
-            </a:pPr>
-            <a:r>
-              <a:t>Elke speler maakt de beste 5-kaartshand uit zijn 2 hole cards plus de 5 gedeelde kaarten.</a:t>
-            </a:r>
-          </a:p>
-          <a:p>
-            <a:pPr>
-              <a:spcBef>
-                <a:spcPts val="1400"/>
-              </a:spcBef>
-              <a:defRPr sz="1400" b="1">
-                <a:solidFill>
-                  <a:srgbClr val="1B4D3E"/>
-                </a:solidFill>
-              </a:defRPr>
-            </a:pPr>
-            <a:r>
-              <a:t>Kleur telt hier wél</a:t>
-            </a:r>
-          </a:p>
-          <a:p>
-            <a:pPr>
-              <a:spcBef>
-                <a:spcPts val="300"/>
-              </a:spcBef>
-              <a:defRPr sz="1150" b="0">
-                <a:solidFill>
-                  <a:srgbClr val="121E31"/>
-                </a:solidFill>
-              </a:defRPr>
-            </a:pPr>
-            <a:r>
-              <a:t>Twee tekens: eerst de kleur, dan de rang. SA is schoppen aas, HK harten heer, DQ ruiten vrouw, CJ klaveren boer. Zonder kleur kun je geen flush herkennen.</a:t>
+              <a:t>Twee azen tegen 7-8 schoppen. Preflop is dat geen wedstrijd; op de river wint 7-8. Dit is geen uitzondering die we hebben opgezocht.</a:t>
             </a:r>
           </a:p>
         </p:txBody>

--- a/powerpoints/Pokerbot_Upgrade_Week3.pptx
+++ b/powerpoints/Pokerbot_Upgrade_Week3.pptx
@@ -3361,7 +3361,7 @@
         <p:spPr>
           <a:xfrm>
             <a:off x="746607" y="1554480"/>
-            <a:ext cx="10698480" cy="3059963"/>
+            <a:ext cx="10698480" cy="3148133"/>
           </a:xfrm>
           <a:prstGeom prst="rect">
             <a:avLst/>
@@ -3702,8 +3702,8 @@
         </p:blipFill>
         <p:spPr>
           <a:xfrm>
-            <a:off x="746607" y="1554480"/>
-            <a:ext cx="10698480" cy="3995214"/>
+            <a:off x="1550772" y="1554480"/>
+            <a:ext cx="9090150" cy="4069080"/>
           </a:xfrm>
           <a:prstGeom prst="rect">
             <a:avLst/>
@@ -4993,7 +4993,7 @@
               </a:defRPr>
             </a:pPr>
             <a:r>
-              <a:t>DEEL 4 · DE SPELREGELS</a:t>
+              <a:t>DEEL 4 · DE RANGORDE</a:t>
             </a:r>
           </a:p>
           <a:p>
@@ -6412,7 +6412,7 @@
               </a:defRPr>
             </a:pPr>
             <a:r>
-              <a:t>DEEL 5 · DE SPELREGELS</a:t>
+              <a:t>DEEL 5 · MONTE CARLO</a:t>
             </a:r>
           </a:p>
           <a:p>
@@ -6583,7 +6583,7 @@
               </a:defRPr>
             </a:pPr>
             <a:r>
-              <a:t>DEEL 5 · DE SPELREGELS</a:t>
+              <a:t>DEEL 5 · MONTE CARLO</a:t>
             </a:r>
           </a:p>
           <a:p>
@@ -6620,7 +6620,7 @@
         <p:spPr>
           <a:xfrm>
             <a:off x="746607" y="1554480"/>
-            <a:ext cx="10698480" cy="3911551"/>
+            <a:ext cx="10698480" cy="2478003"/>
           </a:xfrm>
           <a:prstGeom prst="rect">
             <a:avLst/>
@@ -6657,7 +6657,7 @@
               </a:defRPr>
             </a:pPr>
             <a:r>
-              <a:t>Precies wat schat_winkans() doet. Je hoeft het niet te bouwen — je moet weten wat het getal betekent en tegen hoeveel mensen het gerekend is. Hetzelfde idee als n_simulaties in het toernooi.</a:t>
+              <a:t>Je hoeft het niet te bouwen — je moet weten wat het getal betekent, en tegen hoeveel mensen het gerekend is. Hetzelfde idee als n_simulaties in het toernooi: één toernooi is toeval, twintig zijn een meting.</a:t>
             </a:r>
           </a:p>
         </p:txBody>
@@ -8062,7 +8062,7 @@
               </a:defRPr>
             </a:pPr>
             <a:r>
-              <a:t>1.  Andere drempels per straat</a:t>
+              <a:t>1.  Je winkans-grens</a:t>
             </a:r>
           </a:p>
           <a:p>
@@ -8077,7 +8077,7 @@
               </a:defRPr>
             </a:pPr>
             <a:r>
-              <a:t>Preflop weet je alleen je twee kaarten; op de river ligt alles op tafel.</a:t>
+              <a:t>Vanaf welke winkans doe je mee, en vanaf welke raise je? Dat is een getal dat jij kiest — en waarvan je kunt meten of een ander getal beter werkt.</a:t>
             </a:r>
           </a:p>
           <a:p>
@@ -8092,7 +8092,7 @@
               </a:defRPr>
             </a:pPr>
             <a:r>
-              <a:t>2.  Je winkans-grens</a:t>
+              <a:t>2.  Een andere grens per straat</a:t>
             </a:r>
           </a:p>
           <a:p>
@@ -8107,7 +8107,7 @@
               </a:defRPr>
             </a:pPr>
             <a:r>
-              <a:t>Vanaf welke winkans call je, vanaf welke raise je? Een getal dat je kunt meten.</a:t>
+              <a:t>Preflop weet je alleen je twee kaarten en komen er nog vijf bij; op de river ligt alles er al. Dezelfde 40% betekent daar dus iets anders.</a:t>
             </a:r>
           </a:p>
           <a:p>
@@ -8573,7 +8573,7 @@
               </a:defRPr>
             </a:pPr>
             <a:r>
-              <a:t>1 · drempel per straat</a:t>
+              <a:t>1 · je winkans-grens</a:t>
             </a:r>
           </a:p>
           <a:p>
@@ -8589,7 +8589,7 @@
               </a:defRPr>
             </a:pPr>
             <a:r>
-              <a:t>DREMPELS = {"preflop": 45, "flop": 40,</a:t>
+              <a:t># vanaf welke winkans doe je mee?</a:t>
             </a:r>
           </a:p>
           <a:p>
@@ -8602,7 +8602,7 @@
               </a:defRPr>
             </a:pPr>
             <a:r>
-              <a:t>            "turn": 35, "river": 30}</a:t>
+              <a:t>GRENS = 40</a:t>
             </a:r>
           </a:p>
           <a:p>
@@ -8615,7 +8615,46 @@
               </a:defRPr>
             </a:pPr>
             <a:r>
-              <a:t>grens = DREMPELS[ronde]</a:t>
+              <a:t> </a:t>
+            </a:r>
+          </a:p>
+          <a:p>
+            <a:pPr>
+              <a:defRPr sz="900">
+                <a:solidFill>
+                  <a:srgbClr val="E8EEF4"/>
+                </a:solidFill>
+                <a:latin typeface="Consolas"/>
+              </a:defRPr>
+            </a:pPr>
+            <a:r>
+              <a:t>winkans = schat_winkans(hand, tegenstanders=5)</a:t>
+            </a:r>
+          </a:p>
+          <a:p>
+            <a:pPr>
+              <a:defRPr sz="900">
+                <a:solidFill>
+                  <a:srgbClr val="E8EEF4"/>
+                </a:solidFill>
+                <a:latin typeface="Consolas"/>
+              </a:defRPr>
+            </a:pPr>
+            <a:r>
+              <a:t>if winkans &gt; GRENS:</a:t>
+            </a:r>
+          </a:p>
+          <a:p>
+            <a:pPr>
+              <a:defRPr sz="900">
+                <a:solidFill>
+                  <a:srgbClr val="E8EEF4"/>
+                </a:solidFill>
+                <a:latin typeface="Consolas"/>
+              </a:defRPr>
+            </a:pPr>
+            <a:r>
+              <a:t>    return "raise"</a:t>
             </a:r>
           </a:p>
         </p:txBody>
@@ -8698,7 +8737,7 @@
               </a:defRPr>
             </a:pPr>
             <a:r>
-              <a:t>2 · je winkans-grens</a:t>
+              <a:t>2 · een andere grens per straat</a:t>
             </a:r>
           </a:p>
           <a:p>
@@ -8714,7 +8753,7 @@
               </a:defRPr>
             </a:pPr>
             <a:r>
-              <a:t>winkans = schat_winkans(hand, tegenstanders=5)</a:t>
+              <a:t># zelfde idee, maar per straat een eigen getal</a:t>
             </a:r>
           </a:p>
           <a:p>
@@ -8727,7 +8766,46 @@
               </a:defRPr>
             </a:pPr>
             <a:r>
-              <a:t>if winkans &gt; grens:</a:t>
+              <a:t>GRENS = {"preflop": 45, "flop": 40,</a:t>
+            </a:r>
+          </a:p>
+          <a:p>
+            <a:pPr>
+              <a:defRPr sz="900">
+                <a:solidFill>
+                  <a:srgbClr val="E8EEF4"/>
+                </a:solidFill>
+                <a:latin typeface="Consolas"/>
+              </a:defRPr>
+            </a:pPr>
+            <a:r>
+              <a:t>         "turn": 35, "river": 30}</a:t>
+            </a:r>
+          </a:p>
+          <a:p>
+            <a:pPr>
+              <a:defRPr sz="900">
+                <a:solidFill>
+                  <a:srgbClr val="E8EEF4"/>
+                </a:solidFill>
+                <a:latin typeface="Consolas"/>
+              </a:defRPr>
+            </a:pPr>
+            <a:r>
+              <a:t> </a:t>
+            </a:r>
+          </a:p>
+          <a:p>
+            <a:pPr>
+              <a:defRPr sz="900">
+                <a:solidFill>
+                  <a:srgbClr val="E8EEF4"/>
+                </a:solidFill>
+                <a:latin typeface="Consolas"/>
+              </a:defRPr>
+            </a:pPr>
+            <a:r>
+              <a:t>if winkans &gt; GRENS[ronde]:</a:t>
             </a:r>
           </a:p>
           <a:p>
@@ -13123,7 +13201,7 @@
         <p:spPr>
           <a:xfrm>
             <a:off x="746607" y="1554480"/>
-            <a:ext cx="10698480" cy="2965291"/>
+            <a:ext cx="10698480" cy="3939162"/>
           </a:xfrm>
           <a:prstGeom prst="rect">
             <a:avLst/>

--- a/powerpoints/Pokerbot_Upgrade_Week3.pptx
+++ b/powerpoints/Pokerbot_Upgrade_Week3.pptx
@@ -8615,19 +8615,6 @@
               </a:defRPr>
             </a:pPr>
             <a:r>
-              <a:t> </a:t>
-            </a:r>
-          </a:p>
-          <a:p>
-            <a:pPr>
-              <a:defRPr sz="900">
-                <a:solidFill>
-                  <a:srgbClr val="E8EEF4"/>
-                </a:solidFill>
-                <a:latin typeface="Consolas"/>
-              </a:defRPr>
-            </a:pPr>
-            <a:r>
               <a:t>winkans = schat_winkans(hand, tegenstanders=5)</a:t>
             </a:r>
           </a:p>
@@ -8753,7 +8740,7 @@
               </a:defRPr>
             </a:pPr>
             <a:r>
-              <a:t># zelfde idee, maar per straat een eigen getal</a:t>
+              <a:t># zelfde idee, per straat een eigen getal</a:t>
             </a:r>
           </a:p>
           <a:p>
@@ -8780,19 +8767,6 @@
             </a:pPr>
             <a:r>
               <a:t>         "turn": 35, "river": 30}</a:t>
-            </a:r>
-          </a:p>
-          <a:p>
-            <a:pPr>
-              <a:defRPr sz="900">
-                <a:solidFill>
-                  <a:srgbClr val="E8EEF4"/>
-                </a:solidFill>
-                <a:latin typeface="Consolas"/>
-              </a:defRPr>
-            </a:pPr>
-            <a:r>
-              <a:t> </a:t>
             </a:r>
           </a:p>
           <a:p>

--- a/powerpoints/Pokerbot_Upgrade_Week3.pptx
+++ b/powerpoints/Pokerbot_Upgrade_Week3.pptx
@@ -3531,8 +3531,8 @@
         </p:blipFill>
         <p:spPr>
           <a:xfrm>
-            <a:off x="1509564" y="1554480"/>
-            <a:ext cx="9172566" cy="4069080"/>
+            <a:off x="889544" y="1554480"/>
+            <a:ext cx="10412607" cy="4069080"/>
           </a:xfrm>
           <a:prstGeom prst="rect">
             <a:avLst/>
